--- a/slides/pptx/lecture10_imbalanced_data.pptx
+++ b/slides/pptx/lecture10_imbalanced_data.pptx
@@ -22,6 +22,7 @@
     <p:sldId id="264" r:id="rId13"/>
     <p:sldId id="276" r:id="rId14"/>
     <p:sldId id="278" r:id="rId15"/>
+    <p:sldId id="279" r:id="rId27"/>
     <p:sldId id="277" r:id="rId16"/>
     <p:sldId id="265" r:id="rId17"/>
     <p:sldId id="266" r:id="rId18"/>
@@ -647,7 +648,7 @@
           <a:lstStyle/>
           <a:p>
             <a:r>
-              <a:t>The workhorse of the menu and the one they will actually type. THE RULE, which is sklearn's class_weight='balanced' and PyTorch's weight= argument: w_c = N / (K · n_c) — the total, over the number of classes times that class's count. Do it together on the real split: resistant = 738/(2×41) = 9.00; susceptible = 738/(2×697) = 0.53. Ask for the ratio: 9.00/0.53 = 17, which is exactly 697/41 — the formula reproduces the imbalance by construction, so in the loss one resistant spectrum now shouts as loud as 17 susceptible ones. Then the three siblings and what each really means on spectra. OVERSAMPLE: draw each of the 41 about 17 times per epoch (a WeightedRandomSampler); same effect, more compute, and repeating the SAME spectrum invites memorisation. UNDERSAMPLE: cut the majority to 41 — you throw away 656 real spectra, which is almost never the right trade, though it is defensible when the majority is enormous and redundant. AUGMENT: the honest one for mass spec — new VIEWS of the 41 you already have (m/z jitter ±0.1%, intensity scaling ±10%, baseline shift, added noise), which is exactly Lab 2's move and, unlike SMOTE, every augmented spectrum is still something an instrument could produce. One warning to give out loud: weighting and oversampling both change the EFFECTIVE prevalence the model sees, so its output probabilities are no longer calibrated to the real 6% — recalibrate before you quote a probability to a clinician. SMOTE is the fourth sibling and gets the next slide because it INVENTS points rather than reusing them.</a:t>
+              <a:t>The workhorse of the menu and the one they will actually type. THE RULE, which is sklearn's class_weight='balanced' and PyTorch's weight= argument: w_c = N / (K · n_c) — the total, over the number of classes times that class's count. Do it together on the real split: resistant = 738/(2×41) = 9.00; susceptible = 738/(2×697) = 0.53. Ask for the ratio: 9.00/0.53 = 17, which is exactly 697/41 — the formula reproduces the imbalance by construction, so in the loss one resistant spectrum now shouts as loud as 17 susceptible ones. Then the three siblings and what each really means on spectra. OVERSAMPLE: draw each of the 41 about 17 times per epoch (a WeightedRandomSampler); same effect, more compute, and repeating the SAME spectrum invites memorisation. UNDERSAMPLE: cut the majority to 41 — you throw away 656 real spectra, which is almost never the right trade, though it is defensible when the majority is enormous and redundant. AUGMENT: covered on its own slide just before this one — new VIEWS of the 41 you already have, which is the Lab 5 Track A blank, and unlike SMOTE every augmented spectrum is still something an instrument could produce. Refer back to it rather than re-explaining. One warning to give out loud: weighting and oversampling both change the EFFECTIVE prevalence the model sees, so its output probabilities are no longer calibrated to the real 6% — recalibrate before you quote a probability to a clinician. SMOTE is the fourth sibling and gets the next slide because it INVENTS points rather than reusing them.</a:t>
             </a:r>
           </a:p>
         </p:txBody>
@@ -1089,6 +1090,52 @@
           </p:nvPr>
         </p:nvSpPr>
         <p:spPr/>
+      </p:sp>
+    </p:spTree>
+  </p:cSld>
+  <p:clrMapOvr>
+    <a:masterClrMapping/>
+  </p:clrMapOvr>
+</p:notes>
+</file>
+
+<file path=ppt/notesSlides/notesSlide20.xml><?xml version="1.0" encoding="utf-8"?>
+<p:notes xmlns:a="http://schemas.openxmlformats.org/drawingml/2006/main" xmlns:p="http://schemas.openxmlformats.org/presentationml/2006/main" xmlns:r="http://schemas.openxmlformats.org/officeDocument/2006/relationships">
+  <p:cSld>
+    <p:spTree>
+      <p:nvGrpSpPr>
+        <p:cNvPr id="1" name=""/>
+        <p:cNvGrpSpPr/>
+        <p:nvPr/>
+      </p:nvGrpSpPr>
+      <p:grpSpPr>
+        <a:xfrm>
+          <a:off x="0" y="0"/>
+          <a:ext cx="0" cy="0"/>
+          <a:chOff x="0" y="0"/>
+          <a:chExt cx="0" cy="0"/>
+        </a:xfrm>
+      </p:grpSpPr>
+      <p:sp>
+        <p:nvSpPr>
+          <p:cNvPr id="3" name="Notes Placeholder 2"/>
+          <p:cNvSpPr>
+            <a:spLocks noGrp="1"/>
+          </p:cNvSpPr>
+          <p:nvPr>
+            <p:ph type="body" sz="quarter" idx="3"/>
+          </p:nvPr>
+        </p:nvSpPr>
+        <p:spPr/>
+        <p:txBody>
+          <a:bodyPr/>
+          <a:lstStyle/>
+          <a:p>
+            <a:r>
+              <a:t>NEW (instructor, 2026-09-16): augmentation used to be three words on the class-weights slide. It sits HERE, straight after curation, because it is the other move that works on the DATA rather than on the training — and because the room needs the validity rule before SMOTE turns up two slides later and breaks it. DO-IT-TOGETHER, ~4 minutes. START WITH THE PICTURE: one real resistant spectrum, then four views of it. m/z JITTER — the mass axis drifts a little run to run, so shifting every peak by ±0.1% is a spectrum the same isolate could genuinely have produced (the shift is drawn exaggerated so it is visible from the back; say so). INTENSITY ×0.9 — ionisation efficiency varies between shots. BASELINE AND NOISE — a noisier acquisition of the same colony. Ask the room after each one: could the instrument have produced that? Yes, every time. THE RULE, top right, and it is the whole slide: a transform is legitimate only if (1) the instrument could have produced it and (2) it does not change the label. Both halves matter — flipping a spectrum left-to-right satisfies neither, and a transform so aggressive the isolate would now be called susceptible fails the second. THE ARITHMETIC, done together: you have 41 resistant spectra; take 8 augmented views of each and you are training on 41 × 8 = 328. Ask for the new batch imbalance before revealing it — 697 to 328, which is about 2.1 to 1, against the 697 to 41 ≈ 17 to 1 you started with. That is the single biggest change to the effective imbalance of anything in Part B, and it costs no new data. THE TRAP, and it is a callback to the slide you just did: augment AFTER the train/test split, never before. Augment first and eight views of the same isolate scatter across train and test, which is exactly the leakage the embedding-dedup pass just removed — your model recognises the isolate, not resistance, and the score is meaningless. THE HONEST FOOTER: it is still 41 isolates. Augmentation multiplies views, not biology; your confidence interval is set by the 41, not the 328. FORWARD POINTER, and it makes SMOTE land harder: hold the validity rule in your head, because SMOTE two slides from now breaks it — a straight-line blend of two real 6000-dim spectra is NOT something an instrument could produce. ASSESSMENT (rule 3): this is the Lab 5 Track A blank — `augment`, an m/z-jitter function the participants write and whose asserts check that it keeps the shape and changes the values.</a:t>
+            </a:r>
+          </a:p>
+        </p:txBody>
       </p:sp>
     </p:spTree>
   </p:cSld>
@@ -4032,7 +4079,7 @@
 </file>
 
 <file path=ppt/slides/slide15.xml><?xml version="1.0" encoding="utf-8"?>
-<p:sld xmlns:a="http://schemas.openxmlformats.org/drawingml/2006/main" xmlns:r="http://schemas.openxmlformats.org/officeDocument/2006/relationships" xmlns:p="http://schemas.openxmlformats.org/presentationml/2006/main">
+<p:sld xmlns:a="http://schemas.openxmlformats.org/drawingml/2006/main" xmlns:p="http://schemas.openxmlformats.org/presentationml/2006/main" xmlns:r="http://schemas.openxmlformats.org/officeDocument/2006/relationships">
   <p:cSld>
     <p:spTree>
       <p:nvGrpSpPr>
@@ -4040,14 +4087,7 @@
         <p:cNvGrpSpPr/>
         <p:nvPr/>
       </p:nvGrpSpPr>
-      <p:grpSpPr>
-        <a:xfrm>
-          <a:off x="0" y="0"/>
-          <a:ext cx="0" cy="0"/>
-          <a:chOff x="0" y="0"/>
-          <a:chExt cx="0" cy="0"/>
-        </a:xfrm>
-      </p:grpSpPr>
+      <p:grpSpPr/>
       <p:sp>
         <p:nvSpPr>
           <p:cNvPr id="2" name="Rectangle 1"/>
@@ -4122,7 +4162,7 @@
                 </a:solidFill>
                 <a:latin typeface="Menlo"/>
               </a:rPr>
-              <a:t>PART B · 2 · MAKE THE RARE CLASS COUNT · DO-IT-TOGETHER</a:t>
+              <a:t>PART B · 2 · AUGMENTATION · DO-IT-TOGETHER</a:t>
             </a:r>
           </a:p>
         </p:txBody>
@@ -4150,35 +4190,35 @@
           <a:lstStyle/>
           <a:p>
             <a:r>
-              <a:rPr sz="3400" b="1" i="0" dirty="0">
+              <a:rPr sz="3400" b="1" i="0">
                 <a:solidFill>
                   <a:srgbClr val="1B2025"/>
                 </a:solidFill>
                 <a:latin typeface="Avenir Next"/>
               </a:rPr>
-              <a:t>Class weights, oversampling, augmentation</a:t>
+              <a:t>Augment: more views of the spectra you already have</a:t>
             </a:r>
           </a:p>
         </p:txBody>
       </p:sp>
       <p:pic>
         <p:nvPicPr>
-          <p:cNvPr id="8" name="Picture 4" descr="fig_class_weights.png"/>
+          <p:cNvPr id="7" name="Picture 4" descr="fig_augmentation.png"/>
           <p:cNvPicPr>
             <a:picLocks noChangeAspect="1"/>
           </p:cNvPicPr>
           <p:nvPr/>
         </p:nvPicPr>
         <p:blipFill>
-          <a:blip r:embed="rId3"/>
+          <a:blip r:embed="rId2"/>
           <a:stretch>
             <a:fillRect/>
           </a:stretch>
         </p:blipFill>
         <p:spPr>
           <a:xfrm>
-            <a:off x="1900703" y="1874519"/>
-            <a:ext cx="8390561" cy="3200400"/>
+            <a:off x="2235382" y="1828800"/>
+            <a:ext cx="7720930" cy="3320000"/>
           </a:xfrm>
           <a:prstGeom prst="rect">
             <a:avLst/>
@@ -4193,8 +4233,8 @@
         </p:nvSpPr>
         <p:spPr>
           <a:xfrm>
-            <a:off x="548640" y="5193792"/>
-            <a:ext cx="10515600" cy="1481328"/>
+            <a:off x="548640" y="5279136"/>
+            <a:ext cx="10515600" cy="1441703"/>
           </a:xfrm>
           <a:prstGeom prst="rect">
             <a:avLst/>
@@ -4244,7 +4284,7 @@
                 </a:solidFill>
                 <a:latin typeface="Avenir Next"/>
               </a:rPr>
-              <a:t>Balanced weights: w = N / (K · n_c). Do-it-together on our split — resistant 738/(2×41) = 9.00, susceptible 738/(2×697) = 0.53; the ratio is exactly the 17:1 imbalance, so one resistant spectrum counts as 17. Oversampling repeats those 41, augmentation makes new VIEWS of them (m/z jitter, intensity ±10%) — and none of it adds a 42nd isolate.</a:t>
+              <a:t>Make new VIEWS of the 41 resistant spectra with transforms an instrument could have produced: m/z jitter ±0.1%, intensity ×0.9, baseline and noise — the label never changes. Do-it-together: 41 × 8 views = 328, so the batch imbalance goes 697:41 ≈ 17:1 → 697:328 ≈ 2.1:1. But augment AFTER the split, and remember it is still 41 isolates.</a:t>
             </a:r>
           </a:p>
         </p:txBody>
@@ -4348,7 +4388,7 @@
                 </a:solidFill>
                 <a:latin typeface="Menlo"/>
               </a:rPr>
-              <a:t>PART B · SMOTE · DO-IT-TOGETHER</a:t>
+              <a:t>PART B · 3 · MAKE THE RARE CLASS COUNT · DO-IT-TOGETHER</a:t>
             </a:r>
           </a:p>
         </p:txBody>
@@ -4376,20 +4416,20 @@
           <a:lstStyle/>
           <a:p>
             <a:r>
-              <a:rPr sz="3400" b="1" i="0">
+              <a:rPr sz="3400" b="1" i="0" dirty="0">
                 <a:solidFill>
                   <a:srgbClr val="1B2025"/>
                 </a:solidFill>
                 <a:latin typeface="Avenir Next"/>
               </a:rPr>
-              <a:t>SMOTE: synthesize a new minority point between two real ones</a:t>
+              <a:t>Class weights, oversampling, undersampling</a:t>
             </a:r>
           </a:p>
         </p:txBody>
       </p:sp>
       <p:pic>
         <p:nvPicPr>
-          <p:cNvPr id="7" name="Picture 4" descr="fig_smote.png"/>
+          <p:cNvPr id="8" name="Picture 4" descr="fig_class_weights.png"/>
           <p:cNvPicPr>
             <a:picLocks noChangeAspect="1"/>
           </p:cNvPicPr>
@@ -4403,8 +4443,8 @@
         </p:blipFill>
         <p:spPr>
           <a:xfrm>
-            <a:off x="2509427" y="1828800"/>
-            <a:ext cx="7172839" cy="3320000"/>
+            <a:off x="1900703" y="1874519"/>
+            <a:ext cx="8390561" cy="3200400"/>
           </a:xfrm>
           <a:prstGeom prst="rect">
             <a:avLst/>
@@ -4419,8 +4459,8 @@
         </p:nvSpPr>
         <p:spPr>
           <a:xfrm>
-            <a:off x="548640" y="5279136"/>
-            <a:ext cx="10515600" cy="1441703"/>
+            <a:off x="548640" y="5193792"/>
+            <a:ext cx="10515600" cy="1481328"/>
           </a:xfrm>
           <a:prstGeom prst="rect">
             <a:avLst/>
@@ -4470,7 +4510,7 @@
                 </a:solidFill>
                 <a:latin typeface="Avenir Next"/>
               </a:rPr>
-              <a:t>SMOTE fills in the rare class by INTERPOLATING between two real minority points: synthetic = A + λ·(B−A). Do-it-together with two m/z-bin intensities, A = (2, 6) and B = (4, 10), λ = 0.5 → (3, 8). Now the same three points AS SPECTRA (right): the blend carries A's private peak at m/z 4,100 and B's at m/z 6,800 at HALF height — two ghost peaks no real isolate has. That is the caveat, drawn.</a:t>
+              <a:t>Balanced weights: w = N / (K · n_c). Do-it-together on our split — resistant 738/(2×41) = 9.00, susceptible 738/(2×697) = 0.53; the ratio is exactly the 17:1 imbalance, so one resistant spectrum counts as 17. Oversampling repeats those 41, undersampling throws away 656 real susceptible spectra — and none of it adds a 42nd isolate.</a:t>
             </a:r>
           </a:p>
         </p:txBody>
@@ -4574,7 +4614,7 @@
                 </a:solidFill>
                 <a:latin typeface="Menlo"/>
               </a:rPr>
-              <a:t>PART B · FOCAL LOSS · I-DO</a:t>
+              <a:t>PART B · 4 · SMOTE · DO-IT-TOGETHER</a:t>
             </a:r>
           </a:p>
         </p:txBody>
@@ -4608,14 +4648,14 @@
                 </a:solidFill>
                 <a:latin typeface="Avenir Next"/>
               </a:rPr>
-              <a:t>Focal loss: turn the volume up on the hard cases</a:t>
+              <a:t>SMOTE: synthesize a new minority point between two real ones</a:t>
             </a:r>
           </a:p>
         </p:txBody>
       </p:sp>
       <p:pic>
         <p:nvPicPr>
-          <p:cNvPr id="7" name="Picture 4" descr="fig_focal_volume.png"/>
+          <p:cNvPr id="7" name="Picture 4" descr="fig_smote.png"/>
           <p:cNvPicPr>
             <a:picLocks noChangeAspect="1"/>
           </p:cNvPicPr>
@@ -4629,8 +4669,8 @@
         </p:blipFill>
         <p:spPr>
           <a:xfrm>
-            <a:off x="2481539" y="1828800"/>
-            <a:ext cx="7228615" cy="3320000"/>
+            <a:off x="2509427" y="1828800"/>
+            <a:ext cx="7172839" cy="3320000"/>
           </a:xfrm>
           <a:prstGeom prst="rect">
             <a:avLst/>
@@ -4645,18 +4685,18 @@
         </p:nvSpPr>
         <p:spPr>
           <a:xfrm>
-            <a:off x="548640" y="5279137"/>
+            <a:off x="548640" y="5279136"/>
             <a:ext cx="10515600" cy="1441703"/>
           </a:xfrm>
           <a:prstGeom prst="rect">
             <a:avLst/>
           </a:prstGeom>
           <a:solidFill>
-            <a:srgbClr val="E3F0EF"/>
+            <a:srgbClr val="F1F1EC"/>
           </a:solidFill>
           <a:ln w="12700">
             <a:solidFill>
-              <a:srgbClr val="0E7C7B"/>
+              <a:srgbClr val="E09E2F"/>
             </a:solidFill>
           </a:ln>
           <a:effectLst/>
@@ -4683,11 +4723,11 @@
             <a:r>
               <a:rPr sz="1200" b="1" i="0">
                 <a:solidFill>
-                  <a:srgbClr val="0E7C7B"/>
+                  <a:srgbClr val="E09E2F"/>
                 </a:solidFill>
                 <a:latin typeface="Menlo"/>
               </a:rPr>
-              <a:t>MASS SPEC · </a:t>
+              <a:t>CHECKPOINT · </a:t>
             </a:r>
             <a:r>
               <a:rPr sz="1700" b="0" i="0">
@@ -4696,7 +4736,7 @@
                 </a:solidFill>
                 <a:latin typeface="Avenir Next"/>
               </a:rPr>
-              <a:t>Focal loss reshapes the loss so easy, confident cases stop dominating: FL = (1−p)²·(−ln p). Read the CURVE: γ = 0 is plain cross-entropy; raising γ collapses the confident right-hand side and barely touches p = 0.50. Easy p = 0.90 → 0.001 (DOWN ~100×); hard p = 0.50 → 0.173 (barely moved) — so breakpoint MICs and low-biomass spectra count 165× the easy ones, not 6.6×.</a:t>
+              <a:t>SMOTE fills in the rare class by INTERPOLATING between two real minority points: synthetic = A + λ·(B−A). Do-it-together with two m/z-bin intensities, A = (2, 6) and B = (4, 10), λ = 0.5 → (3, 8). Now the same three points AS SPECTRA (right): the blend carries A's private peak at m/z 4,100 and B's at m/z 6,800 at HALF height — two ghost peaks no real isolate has. That is the caveat, drawn.</a:t>
             </a:r>
           </a:p>
         </p:txBody>
@@ -4800,7 +4840,7 @@
                 </a:solidFill>
                 <a:latin typeface="Menlo"/>
               </a:rPr>
-              <a:t>PART B · CURRICULUM LEARNING · THE SCHEDULE</a:t>
+              <a:t>PART B · 5 · FOCAL LOSS · I-DO</a:t>
             </a:r>
           </a:p>
         </p:txBody>
@@ -4814,7 +4854,7 @@
         <p:spPr>
           <a:xfrm>
             <a:off x="548640" y="731520"/>
-            <a:ext cx="11064240" cy="1005840"/>
+            <a:ext cx="11064240" cy="1127760"/>
           </a:xfrm>
           <a:prstGeom prst="rect">
             <a:avLst/>
@@ -4834,14 +4874,14 @@
                 </a:solidFill>
                 <a:latin typeface="Avenir Next"/>
               </a:rPr>
-              <a:t>Curriculum: the training diet as a schedule</a:t>
+              <a:t>Focal loss: turn the volume up on the hard cases</a:t>
             </a:r>
           </a:p>
         </p:txBody>
       </p:sp>
       <p:pic>
         <p:nvPicPr>
-          <p:cNvPr id="7" name="Picture 4" descr="fig_curriculum.png"/>
+          <p:cNvPr id="7" name="Picture 4" descr="fig_focal_volume.png"/>
           <p:cNvPicPr>
             <a:picLocks noChangeAspect="1"/>
           </p:cNvPicPr>
@@ -4855,8 +4895,8 @@
         </p:blipFill>
         <p:spPr>
           <a:xfrm>
-            <a:off x="2389308" y="1828800"/>
-            <a:ext cx="7413078" cy="3320000"/>
+            <a:off x="2481539" y="1828800"/>
+            <a:ext cx="7228615" cy="3320000"/>
           </a:xfrm>
           <a:prstGeom prst="rect">
             <a:avLst/>
@@ -4878,11 +4918,11 @@
             <a:avLst/>
           </a:prstGeom>
           <a:solidFill>
-            <a:srgbClr val="F1F1EC"/>
+            <a:srgbClr val="E3F0EF"/>
           </a:solidFill>
           <a:ln w="12700">
             <a:solidFill>
-              <a:srgbClr val="3D444C"/>
+              <a:srgbClr val="0E7C7B"/>
             </a:solidFill>
           </a:ln>
           <a:effectLst/>
@@ -4922,7 +4962,7 @@
                 </a:solidFill>
                 <a:latin typeface="Avenir Next"/>
               </a:rPr>
-              <a:t>Don’t feed the model the full, lopsided mix from day one — write a SCHEDULE. Left, over 20 epochs: the sampler anneals from 50% resistant per batch (class-balanced) down to the true 6%, while the hard cases — low-biomass runs, MICs on the breakpoint — are admitted from 0% to 100%. Right: the curriculum run climbs steadily where the shuffled run lurches. Same 41 resistant spectra in both.</a:t>
+              <a:t>Focal loss reshapes the loss so easy, confident cases stop dominating: FL = (1−p)²·(−ln p). Read the CURVE: γ = 0 is plain cross-entropy; raising γ collapses the confident right-hand side and barely touches p = 0.50. Easy p = 0.90 → 0.001 (DOWN ~100×); hard p = 0.50 → 0.173 (barely moved) — so breakpoint MICs and low-biomass spectra count 165× the easy ones, not 6.6×.</a:t>
             </a:r>
           </a:p>
         </p:txBody>
@@ -5026,7 +5066,7 @@
                 </a:solidFill>
                 <a:latin typeface="Menlo"/>
               </a:rPr>
-              <a:t>LECTURE 10 · WHAT YOU CAN DO NOW</a:t>
+              <a:t>PART B · 6 · CURRICULUM LEARNING · THE SCHEDULE</a:t>
             </a:r>
           </a:p>
         </p:txBody>
@@ -5060,134 +5100,35 @@
                 </a:solidFill>
                 <a:latin typeface="Avenir Next"/>
               </a:rPr>
-              <a:t>You can now…</a:t>
-            </a:r>
-          </a:p>
-        </p:txBody>
-      </p:sp>
-      <p:sp>
-        <p:nvSpPr>
-          <p:cNvPr id="5" name="TextBox 4"/>
-          <p:cNvSpPr txBox="1"/>
-          <p:nvPr/>
-        </p:nvSpPr>
-        <p:spPr>
-          <a:xfrm>
-            <a:off x="548640" y="1920240"/>
-            <a:ext cx="10789920" cy="3809999"/>
-          </a:xfrm>
-          <a:prstGeom prst="rect">
-            <a:avLst/>
-          </a:prstGeom>
-          <a:noFill/>
-        </p:spPr>
-        <p:txBody>
-          <a:bodyPr wrap="square" anchor="t">
-            <a:spAutoFit/>
-          </a:bodyPr>
-          <a:lstStyle/>
-          <a:p>
-            <a:pPr>
-              <a:spcAft>
-                <a:spcPts val="1800"/>
-              </a:spcAft>
-            </a:pPr>
-            <a:r>
-              <a:rPr sz="2300" b="1" i="0" dirty="0">
-                <a:solidFill>
-                  <a:srgbClr val="0E7C7B"/>
-                </a:solidFill>
-                <a:latin typeface="Avenir Next"/>
-              </a:rPr>
-              <a:t>•  </a:t>
-            </a:r>
-            <a:r>
-              <a:rPr sz="2300" b="0" i="0" dirty="0">
-                <a:solidFill>
-                  <a:srgbClr val="1B2025"/>
-                </a:solidFill>
-                <a:latin typeface="Avenir Next"/>
-              </a:rPr>
-              <a:t>Compute precision, recall (sensitivity), and specificity by hand — and say why accuracy lies under imbalance</a:t>
-            </a:r>
-          </a:p>
-          <a:p>
-            <a:pPr>
-              <a:spcAft>
-                <a:spcPts val="1800"/>
-              </a:spcAft>
-            </a:pPr>
-            <a:r>
-              <a:rPr sz="2300" b="1" i="0" dirty="0">
-                <a:solidFill>
-                  <a:srgbClr val="0E7C7B"/>
-                </a:solidFill>
-                <a:latin typeface="Avenir Next"/>
-              </a:rPr>
-              <a:t>•  </a:t>
-            </a:r>
-            <a:r>
-              <a:rPr sz="2300" b="0" i="0" dirty="0">
-                <a:solidFill>
-                  <a:srgbClr val="1B2025"/>
-                </a:solidFill>
-                <a:latin typeface="Avenir Next"/>
-              </a:rPr>
-              <a:t>Build an ROC and a PR curve from a threshold sweep — report AUPRC, whose baseline is the prevalence</a:t>
-            </a:r>
-          </a:p>
-          <a:p>
-            <a:pPr>
-              <a:spcAft>
-                <a:spcPts val="1800"/>
-              </a:spcAft>
-            </a:pPr>
-            <a:r>
-              <a:rPr sz="2300" b="1" i="0" dirty="0">
-                <a:solidFill>
-                  <a:srgbClr val="0E7C7B"/>
-                </a:solidFill>
-                <a:latin typeface="Avenir Next"/>
-              </a:rPr>
-              <a:t>•  </a:t>
-            </a:r>
-            <a:r>
-              <a:rPr sz="2300" b="0" i="0" dirty="0">
-                <a:solidFill>
-                  <a:srgbClr val="1B2025"/>
-                </a:solidFill>
-                <a:latin typeface="Avenir Next"/>
-              </a:rPr>
-              <a:t>Demand external + temporal validation — a metric is only valid on the distribution you tested</a:t>
-            </a:r>
-          </a:p>
-          <a:p>
-            <a:pPr>
-              <a:spcAft>
-                <a:spcPts val="1800"/>
-              </a:spcAft>
-            </a:pPr>
-            <a:r>
-              <a:rPr sz="2300" b="1" i="0" dirty="0">
-                <a:solidFill>
-                  <a:srgbClr val="0E7C7B"/>
-                </a:solidFill>
-                <a:latin typeface="Avenir Next"/>
-              </a:rPr>
-              <a:t>•  </a:t>
-            </a:r>
-            <a:r>
-              <a:rPr sz="2300" b="0" i="0" dirty="0">
-                <a:solidFill>
-                  <a:srgbClr val="1B2025"/>
-                </a:solidFill>
-                <a:latin typeface="Avenir Next"/>
-              </a:rPr>
-              <a:t>Treat imbalance with curation, SMOTE, class weights / focal loss, and curriculum — knowing none adds new signal</a:t>
-            </a:r>
-          </a:p>
-        </p:txBody>
-      </p:sp>
+              <a:t>Curriculum: the training diet as a schedule</a:t>
+            </a:r>
+          </a:p>
+        </p:txBody>
+      </p:sp>
+      <p:pic>
+        <p:nvPicPr>
+          <p:cNvPr id="7" name="Picture 4" descr="fig_curriculum.png"/>
+          <p:cNvPicPr>
+            <a:picLocks noChangeAspect="1"/>
+          </p:cNvPicPr>
+          <p:nvPr/>
+        </p:nvPicPr>
+        <p:blipFill>
+          <a:blip r:embed="rId3"/>
+          <a:stretch>
+            <a:fillRect/>
+          </a:stretch>
+        </p:blipFill>
+        <p:spPr>
+          <a:xfrm>
+            <a:off x="2389308" y="1828800"/>
+            <a:ext cx="7413078" cy="3320000"/>
+          </a:xfrm>
+          <a:prstGeom prst="rect">
+            <a:avLst/>
+          </a:prstGeom>
+        </p:spPr>
+      </p:pic>
       <p:sp>
         <p:nvSpPr>
           <p:cNvPr id="6" name="Rectangle 5"/>
@@ -5196,8 +5137,8 @@
         </p:nvSpPr>
         <p:spPr>
           <a:xfrm>
-            <a:off x="548640" y="5843016"/>
-            <a:ext cx="10515600" cy="923544"/>
+            <a:off x="548640" y="5279137"/>
+            <a:ext cx="10515600" cy="1441703"/>
           </a:xfrm>
           <a:prstGeom prst="rect">
             <a:avLst/>
@@ -5232,13 +5173,22 @@
           <a:p>
             <a:pPr algn="ctr"/>
             <a:r>
+              <a:rPr sz="1200" b="1" i="0">
+                <a:solidFill>
+                  <a:srgbClr val="0E7C7B"/>
+                </a:solidFill>
+                <a:latin typeface="Menlo"/>
+              </a:rPr>
+              <a:t>MASS SPEC · </a:t>
+            </a:r>
+            <a:r>
               <a:rPr sz="1700" b="0" i="0">
                 <a:solidFill>
                   <a:srgbClr val="3D444C"/>
                 </a:solidFill>
                 <a:latin typeface="Avenir Next"/>
               </a:rPr>
-              <a:t>You have worked the whole of Quiz 10 live — the three rates (Q1), AUROC vs. AUPRC (Q2), the treatment match (Q3), and a SMOTE point (Q4). Keep the sheet; it's your checklist for any rare-class assay in your own lab.</a:t>
+              <a:t>Don’t feed the model the full, lopsided mix from day one — write a SCHEDULE. Left, over 20 epochs: the sampler anneals from 50% resistant per batch (class-balanced) down to the true 6%, while the hard cases — low-biomass runs, MICs on the breakpoint — are admitted from 0% to 100%. Right: the curriculum run climbs steadily where the shuffled run lurches. Same 41 resistant spectra in both.</a:t>
             </a:r>
           </a:p>
         </p:txBody>
@@ -5526,7 +5476,7 @@
                 </a:solidFill>
                 <a:latin typeface="Avenir Next"/>
               </a:rPr>
-              <a:t>PART B — Treat it: curation + embedding dedup, class weights, SMOTE, focal loss, curriculum</a:t>
+              <a:t>PART B — Treat it: curation + dedup, augmentation, class weights, SMOTE, focal loss, curriculum</a:t>
             </a:r>
             <a:r>
               <a:rPr sz="1800" b="0" i="0">
@@ -5535,7 +5485,7 @@
                 </a:solidFill>
                 <a:latin typeface="Menlo"/>
               </a:rPr>
-              <a:t>   · 25 min</a:t>
+              <a:t>   · 29 min</a:t>
             </a:r>
           </a:p>
           <a:p>
@@ -5583,6 +5533,322 @@
 </file>
 
 <file path=ppt/slides/slide20.xml><?xml version="1.0" encoding="utf-8"?>
+<p:sld xmlns:a="http://schemas.openxmlformats.org/drawingml/2006/main" xmlns:r="http://schemas.openxmlformats.org/officeDocument/2006/relationships" xmlns:p="http://schemas.openxmlformats.org/presentationml/2006/main">
+  <p:cSld>
+    <p:spTree>
+      <p:nvGrpSpPr>
+        <p:cNvPr id="1" name=""/>
+        <p:cNvGrpSpPr/>
+        <p:nvPr/>
+      </p:nvGrpSpPr>
+      <p:grpSpPr>
+        <a:xfrm>
+          <a:off x="0" y="0"/>
+          <a:ext cx="0" cy="0"/>
+          <a:chOff x="0" y="0"/>
+          <a:chExt cx="0" cy="0"/>
+        </a:xfrm>
+      </p:grpSpPr>
+      <p:sp>
+        <p:nvSpPr>
+          <p:cNvPr id="2" name="Rectangle 1"/>
+          <p:cNvSpPr/>
+          <p:nvPr/>
+        </p:nvSpPr>
+        <p:spPr>
+          <a:xfrm>
+            <a:off x="0" y="0"/>
+            <a:ext cx="12191695" cy="6858000"/>
+          </a:xfrm>
+          <a:prstGeom prst="rect">
+            <a:avLst/>
+          </a:prstGeom>
+          <a:solidFill>
+            <a:srgbClr val="FBFBF8"/>
+          </a:solidFill>
+          <a:ln>
+            <a:noFill/>
+          </a:ln>
+          <a:effectLst/>
+        </p:spPr>
+        <p:style>
+          <a:lnRef idx="1">
+            <a:schemeClr val="accent1"/>
+          </a:lnRef>
+          <a:fillRef idx="3">
+            <a:schemeClr val="accent1"/>
+          </a:fillRef>
+          <a:effectRef idx="2">
+            <a:schemeClr val="accent1"/>
+          </a:effectRef>
+          <a:fontRef idx="minor">
+            <a:schemeClr val="lt1"/>
+          </a:fontRef>
+        </p:style>
+        <p:txBody>
+          <a:bodyPr rtlCol="0" anchor="ctr"/>
+          <a:lstStyle/>
+          <a:p>
+            <a:pPr algn="ctr"/>
+            <a:endParaRPr/>
+          </a:p>
+        </p:txBody>
+      </p:sp>
+      <p:sp>
+        <p:nvSpPr>
+          <p:cNvPr id="3" name="TextBox 2"/>
+          <p:cNvSpPr txBox="1"/>
+          <p:nvPr/>
+        </p:nvSpPr>
+        <p:spPr>
+          <a:xfrm>
+            <a:off x="548640" y="320040"/>
+            <a:ext cx="10972800" cy="365760"/>
+          </a:xfrm>
+          <a:prstGeom prst="rect">
+            <a:avLst/>
+          </a:prstGeom>
+          <a:noFill/>
+        </p:spPr>
+        <p:txBody>
+          <a:bodyPr wrap="square" anchor="t">
+            <a:spAutoFit/>
+          </a:bodyPr>
+          <a:lstStyle/>
+          <a:p>
+            <a:r>
+              <a:rPr sz="1300" b="1" i="0">
+                <a:solidFill>
+                  <a:srgbClr val="8A9099"/>
+                </a:solidFill>
+                <a:latin typeface="Menlo"/>
+              </a:rPr>
+              <a:t>LECTURE 10 · WHAT YOU CAN DO NOW</a:t>
+            </a:r>
+          </a:p>
+        </p:txBody>
+      </p:sp>
+      <p:sp>
+        <p:nvSpPr>
+          <p:cNvPr id="4" name="TextBox 3"/>
+          <p:cNvSpPr txBox="1"/>
+          <p:nvPr/>
+        </p:nvSpPr>
+        <p:spPr>
+          <a:xfrm>
+            <a:off x="548640" y="731520"/>
+            <a:ext cx="11064240" cy="1005840"/>
+          </a:xfrm>
+          <a:prstGeom prst="rect">
+            <a:avLst/>
+          </a:prstGeom>
+          <a:noFill/>
+        </p:spPr>
+        <p:txBody>
+          <a:bodyPr wrap="square" anchor="t">
+            <a:spAutoFit/>
+          </a:bodyPr>
+          <a:lstStyle/>
+          <a:p>
+            <a:r>
+              <a:rPr sz="3400" b="1" i="0">
+                <a:solidFill>
+                  <a:srgbClr val="1B2025"/>
+                </a:solidFill>
+                <a:latin typeface="Avenir Next"/>
+              </a:rPr>
+              <a:t>You can now…</a:t>
+            </a:r>
+          </a:p>
+        </p:txBody>
+      </p:sp>
+      <p:sp>
+        <p:nvSpPr>
+          <p:cNvPr id="5" name="TextBox 4"/>
+          <p:cNvSpPr txBox="1"/>
+          <p:nvPr/>
+        </p:nvSpPr>
+        <p:spPr>
+          <a:xfrm>
+            <a:off x="548640" y="1920240"/>
+            <a:ext cx="10789920" cy="3809999"/>
+          </a:xfrm>
+          <a:prstGeom prst="rect">
+            <a:avLst/>
+          </a:prstGeom>
+          <a:noFill/>
+        </p:spPr>
+        <p:txBody>
+          <a:bodyPr wrap="square" anchor="t">
+            <a:spAutoFit/>
+          </a:bodyPr>
+          <a:lstStyle/>
+          <a:p>
+            <a:pPr>
+              <a:spcAft>
+                <a:spcPts val="1800"/>
+              </a:spcAft>
+            </a:pPr>
+            <a:r>
+              <a:rPr sz="2300" b="1" i="0" dirty="0">
+                <a:solidFill>
+                  <a:srgbClr val="0E7C7B"/>
+                </a:solidFill>
+                <a:latin typeface="Avenir Next"/>
+              </a:rPr>
+              <a:t>•  </a:t>
+            </a:r>
+            <a:r>
+              <a:rPr sz="2300" b="0" i="0" dirty="0">
+                <a:solidFill>
+                  <a:srgbClr val="1B2025"/>
+                </a:solidFill>
+                <a:latin typeface="Avenir Next"/>
+              </a:rPr>
+              <a:t>Compute precision, recall (sensitivity), and specificity by hand — and say why accuracy lies under imbalance</a:t>
+            </a:r>
+          </a:p>
+          <a:p>
+            <a:pPr>
+              <a:spcAft>
+                <a:spcPts val="1800"/>
+              </a:spcAft>
+            </a:pPr>
+            <a:r>
+              <a:rPr sz="2300" b="1" i="0" dirty="0">
+                <a:solidFill>
+                  <a:srgbClr val="0E7C7B"/>
+                </a:solidFill>
+                <a:latin typeface="Avenir Next"/>
+              </a:rPr>
+              <a:t>•  </a:t>
+            </a:r>
+            <a:r>
+              <a:rPr sz="2300" b="0" i="0" dirty="0">
+                <a:solidFill>
+                  <a:srgbClr val="1B2025"/>
+                </a:solidFill>
+                <a:latin typeface="Avenir Next"/>
+              </a:rPr>
+              <a:t>Build an ROC and a PR curve from a threshold sweep — report AUPRC, whose baseline is the prevalence</a:t>
+            </a:r>
+          </a:p>
+          <a:p>
+            <a:pPr>
+              <a:spcAft>
+                <a:spcPts val="1800"/>
+              </a:spcAft>
+            </a:pPr>
+            <a:r>
+              <a:rPr sz="2300" b="1" i="0" dirty="0">
+                <a:solidFill>
+                  <a:srgbClr val="0E7C7B"/>
+                </a:solidFill>
+                <a:latin typeface="Avenir Next"/>
+              </a:rPr>
+              <a:t>•  </a:t>
+            </a:r>
+            <a:r>
+              <a:rPr sz="2300" b="0" i="0" dirty="0">
+                <a:solidFill>
+                  <a:srgbClr val="1B2025"/>
+                </a:solidFill>
+                <a:latin typeface="Avenir Next"/>
+              </a:rPr>
+              <a:t>Demand external + temporal validation — a metric is only valid on the distribution you tested</a:t>
+            </a:r>
+          </a:p>
+          <a:p>
+            <a:pPr>
+              <a:spcAft>
+                <a:spcPts val="1800"/>
+              </a:spcAft>
+            </a:pPr>
+            <a:r>
+              <a:rPr sz="2300" b="1" i="0" dirty="0">
+                <a:solidFill>
+                  <a:srgbClr val="0E7C7B"/>
+                </a:solidFill>
+                <a:latin typeface="Avenir Next"/>
+              </a:rPr>
+              <a:t>•  </a:t>
+            </a:r>
+            <a:r>
+              <a:rPr sz="2300" b="0" i="0" dirty="0">
+                <a:solidFill>
+                  <a:srgbClr val="1B2025"/>
+                </a:solidFill>
+                <a:latin typeface="Avenir Next"/>
+              </a:rPr>
+              <a:t>Treat imbalance with curation, SMOTE, class weights / focal loss, and curriculum — knowing none adds new signal</a:t>
+            </a:r>
+          </a:p>
+        </p:txBody>
+      </p:sp>
+      <p:sp>
+        <p:nvSpPr>
+          <p:cNvPr id="6" name="Rectangle 5"/>
+          <p:cNvSpPr/>
+          <p:nvPr/>
+        </p:nvSpPr>
+        <p:spPr>
+          <a:xfrm>
+            <a:off x="548640" y="5843016"/>
+            <a:ext cx="10515600" cy="923544"/>
+          </a:xfrm>
+          <a:prstGeom prst="rect">
+            <a:avLst/>
+          </a:prstGeom>
+          <a:solidFill>
+            <a:srgbClr val="F1F1EC"/>
+          </a:solidFill>
+          <a:ln w="12700">
+            <a:solidFill>
+              <a:srgbClr val="3D444C"/>
+            </a:solidFill>
+          </a:ln>
+          <a:effectLst/>
+        </p:spPr>
+        <p:style>
+          <a:lnRef idx="1">
+            <a:schemeClr val="accent1"/>
+          </a:lnRef>
+          <a:fillRef idx="3">
+            <a:schemeClr val="accent1"/>
+          </a:fillRef>
+          <a:effectRef idx="2">
+            <a:schemeClr val="accent1"/>
+          </a:effectRef>
+          <a:fontRef idx="minor">
+            <a:schemeClr val="lt1"/>
+          </a:fontRef>
+        </p:style>
+        <p:txBody>
+          <a:bodyPr wrap="square" lIns="182880" rIns="182880" rtlCol="0" anchor="ctr"/>
+          <a:lstStyle/>
+          <a:p>
+            <a:pPr algn="ctr"/>
+            <a:r>
+              <a:rPr sz="1700" b="0" i="0">
+                <a:solidFill>
+                  <a:srgbClr val="3D444C"/>
+                </a:solidFill>
+                <a:latin typeface="Avenir Next"/>
+              </a:rPr>
+              <a:t>You have worked the whole of Quiz 10 live — the three rates (Q1), AUROC vs. AUPRC (Q2), the treatment match (Q3), and a SMOTE point (Q4). Keep the sheet; it's your checklist for any rare-class assay in your own lab.</a:t>
+            </a:r>
+          </a:p>
+        </p:txBody>
+      </p:sp>
+    </p:spTree>
+  </p:cSld>
+  <p:clrMapOvr>
+    <a:masterClrMapping/>
+  </p:clrMapOvr>
+</p:sld>
+</file>
+
+<file path=ppt/slides/slide21.xml><?xml version="1.0" encoding="utf-8"?>
 <p:sld xmlns:a="http://schemas.openxmlformats.org/drawingml/2006/main" xmlns:r="http://schemas.openxmlformats.org/officeDocument/2006/relationships" xmlns:p="http://schemas.openxmlformats.org/presentationml/2006/main">
   <p:cSld>
     <p:spTree>

--- a/slides/pptx/lecture10_imbalanced_data.pptx
+++ b/slides/pptx/lecture10_imbalanced_data.pptx
@@ -1132,7 +1132,7 @@
           <a:lstStyle/>
           <a:p>
             <a:r>
-              <a:t>NEW (instructor, 2026-09-16): augmentation used to be three words on the class-weights slide. It sits HERE, straight after curation, because it is the other move that works on the DATA rather than on the training — and because the room needs the validity rule before SMOTE turns up two slides later and breaks it. DO-IT-TOGETHER, ~4 minutes. START WITH THE PICTURE: one real resistant spectrum, then four views of it. m/z JITTER — the mass axis drifts a little run to run, so shifting every peak by ±0.1% is a spectrum the same isolate could genuinely have produced (the shift is drawn exaggerated so it is visible from the back; say so). INTENSITY ×0.9 — ionisation efficiency varies between shots. BASELINE AND NOISE — a noisier acquisition of the same colony. Ask the room after each one: could the instrument have produced that? Yes, every time. THE RULE, top right, and it is the whole slide: a transform is legitimate only if (1) the instrument could have produced it and (2) it does not change the label. Both halves matter — flipping a spectrum left-to-right satisfies neither, and a transform so aggressive the isolate would now be called susceptible fails the second. THE ARITHMETIC, done together: you have 41 resistant spectra; take 8 augmented views of each and you are training on 41 × 8 = 328. Ask for the new batch imbalance before revealing it — 697 to 328, which is about 2.1 to 1, against the 697 to 41 ≈ 17 to 1 you started with. That is the single biggest change to the effective imbalance of anything in Part B, and it costs no new data. THE TRAP, and it is a callback to the slide you just did: augment AFTER the train/test split, never before. Augment first and eight views of the same isolate scatter across train and test, which is exactly the leakage the embedding-dedup pass just removed — your model recognises the isolate, not resistance, and the score is meaningless. THE HONEST FOOTER: it is still 41 isolates. Augmentation multiplies views, not biology; your confidence interval is set by the 41, not the 328. FORWARD POINTER, and it makes SMOTE land harder: hold the validity rule in your head, because SMOTE two slides from now breaks it — a straight-line blend of two real 6000-dim spectra is NOT something an instrument could produce. ASSESSMENT (rule 3): this is the Lab 5 Track A blank — `augment`, an m/z-jitter function the participants write and whose asserts check that it keeps the shape and changes the values.</a:t>
+              <a:t>NEW (instructor, 2026-09-16; retaught on a PICTURE 2026-09-17). Augmentation used to be three words on the class-weights slide. It sits HERE, straight after curation, because it is the other move that works on the DATA rather than on the training — and because the room needs the validity rule before SMOTE turns up two slides later and breaks it. WHY A MICROSCOPY IMAGE AND NOT A SPECTRUM: augmentation is a visual idea, and a ±0.1% m/z shift is invisible from the back of a room, so the concept is carried by a picture where every transform is unmistakable; the arithmetic underneath is still our real DRIAMS split, so the picture is the bridge and the spectra are the payload. It also happens to be the honest example for this audience: a cell has no canonical orientation, so rotating and flipping a smear genuinely preserves the label in a way that rotating, say, a chest film would not. DO-IT-TOGETHER, ~4 minutes. WALK THE SIX PANELS. Original, then flip, rotate 35°, zoom/crop, and dim + noise — ask the room after each one: is it still a band neutrophil? Yes, every time; the transform changed the pixels and not the truth. Then the sixth panel, and this is the one that teaches the rule: crop too aggressively and the neutrophil is simply outside the frame. Same operation, one step further, and the label is now a lie — you would be training the model to call a field of red cells a neutrophil. THE RULE, top right, and both halves matter: a transform is legitimate only if (1) your instrument could have produced it and (2) it does not change the label. THE TRANSFER, one line, say it explicitly so nobody thinks this is only about images: on spectra the same idea is m/z jitter of about ±0.1% because the mass axis drifts run to run, intensity scaling because ionisation efficiency varies, and added baseline and noise for a poorer acquisition — and never a left-right flip, because a mirrored spectrum is not something any instrument produces. THE ARITHMETIC, done together: 41 resistant spectra, 8 augmented views each, so you train on 41 × 8 = 328. Ask for the new batch imbalance before revealing it — 697 to 328, about 2.1 to 1, against the 697 to 41 ≈ 17 to 1 you started with. That is the biggest single change to effective imbalance in Part B and it costs no new data. THE TRAP, a callback to the slide you just did: augment AFTER the train/test split, never before, or eight views of one isolate scatter across both sides and the model recognises the isolate rather than resistance — the same leakage the embedding-dedup pass removed. THE HONEST FOOTER: still 41 isolates. Augmentation multiplies views, not biology, and your confidence interval is set by the 41. FORWARD POINTER: hold the validity rule, because SMOTE breaks it — a straight-line blend of two real 6000-dim spectra is NOT something an instrument could produce. ASSESSMENT (rule 3): this is the Lab 5 Track A blank — `augment`, an m/z-jitter function whose asserts check that it keeps the shape and changes the values. IMAGE CREDIT is on the figure: Bobjgalindo, 'Band neutrophil', Wikimedia Commons, CC BY-SA 4.0; the six views are produced by the course at build time from that one file.</a:t>
             </a:r>
           </a:p>
         </p:txBody>
@@ -4196,7 +4196,7 @@
                 </a:solidFill>
                 <a:latin typeface="Avenir Next"/>
               </a:rPr>
-              <a:t>Augment: more views of the spectra you already have</a:t>
+              <a:t>Augment: more views of the data you already have</a:t>
             </a:r>
           </a:p>
         </p:txBody>
@@ -4210,15 +4210,15 @@
           <p:nvPr/>
         </p:nvPicPr>
         <p:blipFill>
-          <a:blip r:embed="rId2"/>
+          <a:blip r:embed="rId4"/>
           <a:stretch>
             <a:fillRect/>
           </a:stretch>
         </p:blipFill>
         <p:spPr>
           <a:xfrm>
-            <a:off x="2235382" y="1828800"/>
-            <a:ext cx="7720930" cy="3320000"/>
+            <a:off x="2196518" y="1828800"/>
+            <a:ext cx="7798657" cy="3320000"/>
           </a:xfrm>
           <a:prstGeom prst="rect">
             <a:avLst/>
@@ -4284,7 +4284,7 @@
                 </a:solidFill>
                 <a:latin typeface="Avenir Next"/>
               </a:rPr>
-              <a:t>Make new VIEWS of the 41 resistant spectra with transforms an instrument could have produced: m/z jitter ±0.1%, intensity ×0.9, baseline and noise — the label never changes. Do-it-together: 41 × 8 views = 328, so the batch imbalance goes 697:41 ≈ 17:1 → 697:328 ≈ 2.1:1. But augment AFTER the split, and remember it is still 41 isolates.</a:t>
+              <a:t>One labelled image, five more of it — flip, rotate, zoom, dim, add noise; every view is still a band neutrophil. Crop too hard and the cell is gone: the label is destroyed. On spectra the same idea is m/z jitter ±0.1%, intensity ×0.9, baseline and noise. Do-it-together: 41 × 8 views = 328, so 697:41 ≈ 17:1 → 697:328 ≈ 2.1:1 — but augment AFTER the split.</a:t>
             </a:r>
           </a:p>
         </p:txBody>

--- a/slides/pptx/lecture10_imbalanced_data.pptx
+++ b/slides/pptx/lecture10_imbalanced_data.pptx
@@ -6597,25 +6597,14 @@
               <a:defRPr/>
             </a:pPr>
             <a:r>
-              <a:rPr kumimoji="0" lang="en-US" sz="1300" b="1" i="0" u="none" strike="noStrike" kern="1200" cap="none" spc="0" normalizeH="0" baseline="0" noProof="0" dirty="0">
-                <a:ln>
-                  <a:noFill/>
-                </a:ln>
+              <a:rPr sz="1300" b="1" i="0">
                 <a:solidFill>
                   <a:srgbClr val="8A9099"/>
                 </a:solidFill>
-                <a:effectLst/>
-                <a:uLnTx/>
-                <a:uFillTx/>
                 <a:latin typeface="Menlo"/>
-                <a:ea typeface="+mn-ea"/>
-                <a:cs typeface="+mn-cs"/>
-              </a:rPr>
-              <a:t>PART A · Metrics</a:t>
-            </a:r>
-          </a:p>
-          <a:p>
-            <a:endParaRPr lang="en-US" dirty="0"/>
+              </a:rPr>
+              <a:t>PART A · THE METRICS IN PLAIN LANGUAGE</a:t>
+            </a:r>
           </a:p>
         </p:txBody>
       </p:sp>

--- a/slides/pptx/lecture10_imbalanced_data.pptx
+++ b/slides/pptx/lecture10_imbalanced_data.pptx
@@ -18,6 +18,7 @@
     <p:sldId id="274" r:id="rId9"/>
     <p:sldId id="275" r:id="rId10"/>
     <p:sldId id="261" r:id="rId11"/>
+    <p:sldId id="282" r:id="rId30"/>
     <p:sldId id="263" r:id="rId12"/>
     <p:sldId id="264" r:id="rId13"/>
     <p:sldId id="276" r:id="rId14"/>
@@ -25,8 +26,10 @@
     <p:sldId id="279" r:id="rId27"/>
     <p:sldId id="277" r:id="rId16"/>
     <p:sldId id="265" r:id="rId17"/>
+    <p:sldId id="281" r:id="rId29"/>
     <p:sldId id="266" r:id="rId18"/>
     <p:sldId id="267" r:id="rId19"/>
+    <p:sldId id="280" r:id="rId28"/>
     <p:sldId id="270" r:id="rId20"/>
     <p:sldId id="271" r:id="rId21"/>
   </p:sldIdLst>
@@ -1145,6 +1148,144 @@
 </p:notes>
 </file>
 
+<file path=ppt/notesSlides/notesSlide21.xml><?xml version="1.0" encoding="utf-8"?>
+<p:notes xmlns:a="http://schemas.openxmlformats.org/drawingml/2006/main" xmlns:p="http://schemas.openxmlformats.org/presentationml/2006/main" xmlns:r="http://schemas.openxmlformats.org/officeDocument/2006/relationships">
+  <p:cSld>
+    <p:spTree>
+      <p:nvGrpSpPr>
+        <p:cNvPr id="1" name=""/>
+        <p:cNvGrpSpPr/>
+        <p:nvPr/>
+      </p:nvGrpSpPr>
+      <p:grpSpPr>
+        <a:xfrm>
+          <a:off x="0" y="0"/>
+          <a:ext cx="0" cy="0"/>
+          <a:chOff x="0" y="0"/>
+          <a:chExt cx="0" cy="0"/>
+        </a:xfrm>
+      </p:grpSpPr>
+      <p:sp>
+        <p:nvSpPr>
+          <p:cNvPr id="3" name="Notes Placeholder 2"/>
+          <p:cNvSpPr>
+            <a:spLocks noGrp="1"/>
+          </p:cNvSpPr>
+          <p:nvPr>
+            <p:ph type="body" sz="quarter" idx="3"/>
+          </p:nvPr>
+        </p:nvSpPr>
+        <p:spPr/>
+        <p:txBody>
+          <a:bodyPr/>
+          <a:lstStyle/>
+          <a:p>
+            <a:r>
+              <a:t>YOU-DO = Quiz 10 Q3, after the last treatment (curriculum). Worked answer: (a) curation — clean the labels and drop the junk before anything fancier, then deduplicate: embed every spectrum (the CNN's last hidden layer) and treat cosine ≥ 0.99 as the same isolate, keeping one — repeats split across train and test are leakage. (b) class weights / SMOTE / oversample — make the rare class count. (c) focal loss — up-weight the hard, low-confidence cases. (d) curriculum — order easy, or class-balanced prevalence. (e) None of them. Every move re-uses the same 41 resistant spectra (reweighting shouts them louder, SMOTE interpolates between them, focal loss focuses on them, curriculum reorders them) — no new biological information enters. Only collecting more real resistant isolates adds signal.</a:t>
+            </a:r>
+          </a:p>
+        </p:txBody>
+      </p:sp>
+    </p:spTree>
+  </p:cSld>
+  <p:clrMapOvr>
+    <a:masterClrMapping/>
+  </p:clrMapOvr>
+</p:notes>
+</file>
+
+<file path=ppt/notesSlides/notesSlide22.xml><?xml version="1.0" encoding="utf-8"?>
+<p:notes xmlns:a="http://schemas.openxmlformats.org/drawingml/2006/main" xmlns:p="http://schemas.openxmlformats.org/presentationml/2006/main" xmlns:r="http://schemas.openxmlformats.org/officeDocument/2006/relationships">
+  <p:cSld>
+    <p:spTree>
+      <p:nvGrpSpPr>
+        <p:cNvPr id="1" name=""/>
+        <p:cNvGrpSpPr/>
+        <p:nvPr/>
+      </p:nvGrpSpPr>
+      <p:grpSpPr>
+        <a:xfrm>
+          <a:off x="0" y="0"/>
+          <a:ext cx="0" cy="0"/>
+          <a:chOff x="0" y="0"/>
+          <a:chExt cx="0" cy="0"/>
+        </a:xfrm>
+      </p:grpSpPr>
+      <p:sp>
+        <p:nvSpPr>
+          <p:cNvPr id="3" name="Notes Placeholder 2"/>
+          <p:cNvSpPr>
+            <a:spLocks noGrp="1"/>
+          </p:cNvSpPr>
+          <p:nvPr>
+            <p:ph type="body" sz="quarter" idx="3"/>
+          </p:nvPr>
+        </p:nvSpPr>
+        <p:spPr/>
+        <p:txBody>
+          <a:bodyPr/>
+          <a:lstStyle/>
+          <a:p>
+            <a:r>
+              <a:t>YOU-DO = Quiz 10 Q4, straight after the SMOTE do-it-together. Worked answer: (a) synthetic = (2 + 0.25 2, 6 + 0.25 4) = (2 + 0.5, 6 + 1) = (2.5, 7) — a quarter of the way from A toward B. (b) A straight-line blend of two real 6,000-dimensional spectra can produce a non-physical spectrum (a peak pattern no instrument would ever record), so pair SMOTE with curation and domain augmentation (m/z jitter), or simply oversample real spectra.</a:t>
+            </a:r>
+          </a:p>
+        </p:txBody>
+      </p:sp>
+    </p:spTree>
+  </p:cSld>
+  <p:clrMapOvr>
+    <a:masterClrMapping/>
+  </p:clrMapOvr>
+</p:notes>
+</file>
+
+<file path=ppt/notesSlides/notesSlide23.xml><?xml version="1.0" encoding="utf-8"?>
+<p:notes xmlns:a="http://schemas.openxmlformats.org/drawingml/2006/main" xmlns:p="http://schemas.openxmlformats.org/presentationml/2006/main" xmlns:r="http://schemas.openxmlformats.org/officeDocument/2006/relationships">
+  <p:cSld>
+    <p:spTree>
+      <p:nvGrpSpPr>
+        <p:cNvPr id="1" name=""/>
+        <p:cNvGrpSpPr/>
+        <p:nvPr/>
+      </p:nvGrpSpPr>
+      <p:grpSpPr>
+        <a:xfrm>
+          <a:off x="0" y="0"/>
+          <a:ext cx="0" cy="0"/>
+          <a:chOff x="0" y="0"/>
+          <a:chExt cx="0" cy="0"/>
+        </a:xfrm>
+      </p:grpSpPr>
+      <p:sp>
+        <p:nvSpPr>
+          <p:cNvPr id="3" name="Notes Placeholder 2"/>
+          <p:cNvSpPr>
+            <a:spLocks noGrp="1"/>
+          </p:cNvSpPr>
+          <p:nvPr>
+            <p:ph type="body" sz="quarter" idx="3"/>
+          </p:nvPr>
+        </p:nvSpPr>
+        <p:spPr/>
+        <p:txBody>
+          <a:bodyPr/>
+          <a:lstStyle/>
+          <a:p>
+            <a:r>
+              <a:t>YOU-DO = Quiz 10 Q2, straight after 'why AUROC flatters'. The formulas it needs are restated on the slide. Worked answer: (a) FPR = 32/(32+448) = 32/480 = 0.067; TPR = 0.80 — the point (0.067, 0.80) hugs the top-left, so the ROC/AUROC looks excellent. (b) PR point =(recall 0.80, precision 0.33); PR baseline = prevalence = 20/500 = 0.04 (ROC's baseline is 0.5). (c) Trust the AUPRC / PR curve (reported with recall). At 4% prevalence the 480 true-negatives dominate, so a tiny FPR keeps AUROC flatteringly high even though precision is only 0.33 (2 of 3 flags false). AUROC is invariant to the class ratio; AUPRC collapses toward the prevalence, so it stays honest as recall grows (Saito \&amp; Rehmsmeier 2015).</a:t>
+            </a:r>
+          </a:p>
+        </p:txBody>
+      </p:sp>
+    </p:spTree>
+  </p:cSld>
+  <p:clrMapOvr>
+    <a:masterClrMapping/>
+  </p:clrMapOvr>
+</p:notes>
+</file>
+
 <file path=ppt/notesSlides/notesSlide3.xml><?xml version="1.0" encoding="utf-8"?>
 <p:notes xmlns:a="http://schemas.openxmlformats.org/drawingml/2006/main" xmlns:r="http://schemas.openxmlformats.org/officeDocument/2006/relationships" xmlns:p="http://schemas.openxmlformats.org/presentationml/2006/main">
   <p:cSld>
@@ -6173,6 +6314,1516 @@
 </p:sld>
 </file>
 
+<file path=ppt/slides/slide22.xml><?xml version="1.0" encoding="utf-8"?>
+<p:sld xmlns:a="http://schemas.openxmlformats.org/drawingml/2006/main" xmlns:p="http://schemas.openxmlformats.org/presentationml/2006/main" xmlns:r="http://schemas.openxmlformats.org/officeDocument/2006/relationships">
+  <p:cSld>
+    <p:spTree>
+      <p:nvGrpSpPr>
+        <p:cNvPr id="1" name=""/>
+        <p:cNvGrpSpPr/>
+        <p:nvPr/>
+      </p:nvGrpSpPr>
+      <p:grpSpPr/>
+      <p:sp>
+        <p:nvSpPr>
+          <p:cNvPr id="2" name="Rectangle 1"/>
+          <p:cNvSpPr/>
+          <p:nvPr/>
+        </p:nvSpPr>
+        <p:spPr>
+          <a:xfrm>
+            <a:off x="0" y="0"/>
+            <a:ext cx="12191695" cy="6858000"/>
+          </a:xfrm>
+          <a:prstGeom prst="rect">
+            <a:avLst/>
+          </a:prstGeom>
+          <a:solidFill>
+            <a:srgbClr val="FBFBF8"/>
+          </a:solidFill>
+          <a:ln>
+            <a:noFill/>
+          </a:ln>
+          <a:effectLst/>
+        </p:spPr>
+        <p:style>
+          <a:lnRef idx="1">
+            <a:schemeClr val="accent1"/>
+          </a:lnRef>
+          <a:fillRef idx="3">
+            <a:schemeClr val="accent1"/>
+          </a:fillRef>
+          <a:effectRef idx="2">
+            <a:schemeClr val="accent1"/>
+          </a:effectRef>
+          <a:fontRef idx="minor">
+            <a:schemeClr val="lt1"/>
+          </a:fontRef>
+        </p:style>
+        <p:txBody>
+          <a:bodyPr rtlCol="0" anchor="ctr"/>
+          <a:lstStyle/>
+          <a:p>
+            <a:pPr algn="ctr"/>
+            <a:endParaRPr/>
+          </a:p>
+        </p:txBody>
+      </p:sp>
+      <p:sp>
+        <p:nvSpPr>
+          <p:cNvPr id="3" name="TextBox 2"/>
+          <p:cNvSpPr txBox="1"/>
+          <p:nvPr/>
+        </p:nvSpPr>
+        <p:spPr>
+          <a:xfrm>
+            <a:off x="548640" y="320040"/>
+            <a:ext cx="10972800" cy="365760"/>
+          </a:xfrm>
+          <a:prstGeom prst="rect">
+            <a:avLst/>
+          </a:prstGeom>
+          <a:noFill/>
+        </p:spPr>
+        <p:txBody>
+          <a:bodyPr wrap="square" anchor="t">
+            <a:spAutoFit/>
+          </a:bodyPr>
+          <a:lstStyle/>
+          <a:p>
+            <a:r>
+              <a:rPr sz="1300" b="1" i="0">
+                <a:solidFill>
+                  <a:srgbClr val="8A9099"/>
+                </a:solidFill>
+                <a:latin typeface="Menlo"/>
+              </a:rPr>
+              <a:t>PART B · YOUR TURN (YOU-DO = Q3)</a:t>
+            </a:r>
+          </a:p>
+        </p:txBody>
+      </p:sp>
+      <p:sp>
+        <p:nvSpPr>
+          <p:cNvPr id="4" name="TextBox 3"/>
+          <p:cNvSpPr txBox="1"/>
+          <p:nvPr/>
+        </p:nvSpPr>
+        <p:spPr>
+          <a:xfrm>
+            <a:off x="548640" y="731520"/>
+            <a:ext cx="11064240" cy="1005840"/>
+          </a:xfrm>
+          <a:prstGeom prst="rect">
+            <a:avLst/>
+          </a:prstGeom>
+          <a:noFill/>
+        </p:spPr>
+        <p:txBody>
+          <a:bodyPr wrap="square" anchor="t">
+            <a:spAutoFit/>
+          </a:bodyPr>
+          <a:lstStyle/>
+          <a:p>
+            <a:r>
+              <a:rPr sz="3400" b="1" i="0">
+                <a:solidFill>
+                  <a:srgbClr val="1B2025"/>
+                </a:solidFill>
+                <a:latin typeface="Avenir Next"/>
+              </a:rPr>
+              <a:t>Your turn — match treatment to symptom</a:t>
+            </a:r>
+          </a:p>
+        </p:txBody>
+      </p:sp>
+      <p:sp>
+        <p:nvSpPr>
+          <p:cNvPr id="6" name="Rectangle 5"/>
+          <p:cNvSpPr/>
+          <p:nvPr/>
+        </p:nvSpPr>
+        <p:spPr>
+          <a:xfrm>
+            <a:off x="548640" y="5538216"/>
+            <a:ext cx="10515600" cy="1182624"/>
+          </a:xfrm>
+          <a:prstGeom prst="rect">
+            <a:avLst/>
+          </a:prstGeom>
+          <a:solidFill>
+            <a:srgbClr val="F1F1EC"/>
+          </a:solidFill>
+          <a:ln w="12700">
+            <a:solidFill>
+              <a:srgbClr val="E09E2F"/>
+            </a:solidFill>
+          </a:ln>
+          <a:effectLst/>
+        </p:spPr>
+        <p:style>
+          <a:lnRef idx="1">
+            <a:schemeClr val="accent1"/>
+          </a:lnRef>
+          <a:fillRef idx="3">
+            <a:schemeClr val="accent1"/>
+          </a:fillRef>
+          <a:effectRef idx="2">
+            <a:schemeClr val="accent1"/>
+          </a:effectRef>
+          <a:fontRef idx="minor">
+            <a:schemeClr val="lt1"/>
+          </a:fontRef>
+        </p:style>
+        <p:txBody>
+          <a:bodyPr wrap="square" lIns="182880" rIns="182880" rtlCol="0" anchor="ctr"/>
+          <a:lstStyle/>
+          <a:p>
+            <a:pPr algn="ctr"/>
+            <a:r>
+              <a:rPr sz="1200" b="1" i="0">
+                <a:solidFill>
+                  <a:srgbClr val="E09E2F"/>
+                </a:solidFill>
+                <a:latin typeface="Menlo"/>
+              </a:rPr>
+              <a:t>CHECKPOINT · </a:t>
+            </a:r>
+            <a:r>
+              <a:rPr sz="1700" b="0" i="0">
+                <a:solidFill>
+                  <a:srgbClr val="3D444C"/>
+                </a:solidFill>
+                <a:latin typeface="Avenir Next"/>
+              </a:rPr>
+              <a:t>Your turn → Quiz 10, Q3. Four situations, four moves from the menu — each used once. Then the honest question: which of the four adds NEW resistant signal? Worked answer in the notes.</a:t>
+            </a:r>
+          </a:p>
+        </p:txBody>
+      </p:sp>
+      <p:sp>
+        <p:nvSpPr>
+          <p:cNvPr id="7" name="TextBox 6"/>
+          <p:cNvSpPr txBox="1"/>
+          <p:nvPr/>
+        </p:nvSpPr>
+        <p:spPr>
+          <a:xfrm>
+            <a:off x="548640" y="1848800"/>
+            <a:ext cx="2925040" cy="330000"/>
+          </a:xfrm>
+          <a:prstGeom prst="rect">
+            <a:avLst/>
+          </a:prstGeom>
+          <a:noFill/>
+        </p:spPr>
+        <p:txBody>
+          <a:bodyPr wrap="square" lIns="45720" rIns="45720" tIns="27432" bIns="27432" anchor="ctr">
+            <a:spAutoFit/>
+          </a:bodyPr>
+          <a:lstStyle/>
+          <a:p>
+            <a:pPr algn="l">
+              <a:spcAft>
+                <a:spcPts val="400"/>
+              </a:spcAft>
+            </a:pPr>
+            <a:r>
+              <a:rPr sz="1400" b="1">
+                <a:solidFill>
+                  <a:srgbClr val="3D444C"/>
+                </a:solidFill>
+                <a:latin typeface="Avenir Next"/>
+              </a:rPr>
+              <a:t>Menu (each used once):</a:t>
+            </a:r>
+          </a:p>
+        </p:txBody>
+      </p:sp>
+      <p:sp>
+        <p:nvSpPr>
+          <p:cNvPr id="8" name="Rounded Rectangle 7"/>
+          <p:cNvSpPr/>
+          <p:nvPr/>
+        </p:nvSpPr>
+        <p:spPr>
+          <a:xfrm>
+            <a:off x="3610840" y="1848800"/>
+            <a:ext cx="980119" cy="330000"/>
+          </a:xfrm>
+          <a:prstGeom prst="roundRect">
+            <a:avLst>
+              <a:gd name="adj" fmla="val 8000"/>
+            </a:avLst>
+          </a:prstGeom>
+          <a:solidFill>
+            <a:srgbClr val="E3F0EF"/>
+          </a:solidFill>
+          <a:ln>
+            <a:noFill/>
+          </a:ln>
+          <a:effectLst/>
+        </p:spPr>
+        <p:style>
+          <a:lnRef idx="1">
+            <a:schemeClr val="accent1"/>
+          </a:lnRef>
+          <a:fillRef idx="3">
+            <a:schemeClr val="accent1"/>
+          </a:fillRef>
+          <a:effectRef idx="2">
+            <a:schemeClr val="accent1"/>
+          </a:effectRef>
+          <a:fontRef idx="minor">
+            <a:schemeClr val="lt1"/>
+          </a:fontRef>
+        </p:style>
+        <p:txBody>
+          <a:bodyPr rtlCol="0" anchor="ctr" lIns="45720" rIns="45720"/>
+          <a:lstStyle/>
+          <a:p>
+            <a:pPr algn="ctr"/>
+            <a:r>
+              <a:rPr sz="1400" b="0">
+                <a:solidFill>
+                  <a:srgbClr val="1B2025"/>
+                </a:solidFill>
+                <a:latin typeface="Avenir Next"/>
+              </a:rPr>
+              <a:t>curation</a:t>
+            </a:r>
+          </a:p>
+        </p:txBody>
+      </p:sp>
+      <p:sp>
+        <p:nvSpPr>
+          <p:cNvPr id="9" name="Rounded Rectangle 8"/>
+          <p:cNvSpPr/>
+          <p:nvPr/>
+        </p:nvSpPr>
+        <p:spPr>
+          <a:xfrm>
+            <a:off x="4728119" y="1848800"/>
+            <a:ext cx="3685368" cy="330000"/>
+          </a:xfrm>
+          <a:prstGeom prst="roundRect">
+            <a:avLst>
+              <a:gd name="adj" fmla="val 8000"/>
+            </a:avLst>
+          </a:prstGeom>
+          <a:solidFill>
+            <a:srgbClr val="E3F0EF"/>
+          </a:solidFill>
+          <a:ln>
+            <a:noFill/>
+          </a:ln>
+          <a:effectLst/>
+        </p:spPr>
+        <p:style>
+          <a:lnRef idx="1">
+            <a:schemeClr val="accent1"/>
+          </a:lnRef>
+          <a:fillRef idx="3">
+            <a:schemeClr val="accent1"/>
+          </a:fillRef>
+          <a:effectRef idx="2">
+            <a:schemeClr val="accent1"/>
+          </a:effectRef>
+          <a:fontRef idx="minor">
+            <a:schemeClr val="lt1"/>
+          </a:fontRef>
+        </p:style>
+        <p:txBody>
+          <a:bodyPr rtlCol="0" anchor="ctr" lIns="45720" rIns="45720"/>
+          <a:lstStyle/>
+          <a:p>
+            <a:pPr algn="ctr"/>
+            <a:r>
+              <a:rPr sz="1400" b="0">
+                <a:solidFill>
+                  <a:srgbClr val="1B2025"/>
+                </a:solidFill>
+                <a:latin typeface="Avenir Next"/>
+              </a:rPr>
+              <a:t>class weights / SMOTE / oversample</a:t>
+            </a:r>
+          </a:p>
+        </p:txBody>
+      </p:sp>
+      <p:sp>
+        <p:nvSpPr>
+          <p:cNvPr id="10" name="Rounded Rectangle 9"/>
+          <p:cNvSpPr/>
+          <p:nvPr/>
+        </p:nvSpPr>
+        <p:spPr>
+          <a:xfrm>
+            <a:off x="8550647" y="1848800"/>
+            <a:ext cx="1188215" cy="330000"/>
+          </a:xfrm>
+          <a:prstGeom prst="roundRect">
+            <a:avLst>
+              <a:gd name="adj" fmla="val 8000"/>
+            </a:avLst>
+          </a:prstGeom>
+          <a:solidFill>
+            <a:srgbClr val="E3F0EF"/>
+          </a:solidFill>
+          <a:ln>
+            <a:noFill/>
+          </a:ln>
+          <a:effectLst/>
+        </p:spPr>
+        <p:style>
+          <a:lnRef idx="1">
+            <a:schemeClr val="accent1"/>
+          </a:lnRef>
+          <a:fillRef idx="3">
+            <a:schemeClr val="accent1"/>
+          </a:fillRef>
+          <a:effectRef idx="2">
+            <a:schemeClr val="accent1"/>
+          </a:effectRef>
+          <a:fontRef idx="minor">
+            <a:schemeClr val="lt1"/>
+          </a:fontRef>
+        </p:style>
+        <p:txBody>
+          <a:bodyPr rtlCol="0" anchor="ctr" lIns="45720" rIns="45720"/>
+          <a:lstStyle/>
+          <a:p>
+            <a:pPr algn="ctr"/>
+            <a:r>
+              <a:rPr sz="1400" b="0">
+                <a:solidFill>
+                  <a:srgbClr val="1B2025"/>
+                </a:solidFill>
+                <a:latin typeface="Avenir Next"/>
+              </a:rPr>
+              <a:t>focal loss</a:t>
+            </a:r>
+          </a:p>
+        </p:txBody>
+      </p:sp>
+      <p:sp>
+        <p:nvSpPr>
+          <p:cNvPr id="11" name="Rounded Rectangle 10"/>
+          <p:cNvSpPr/>
+          <p:nvPr/>
+        </p:nvSpPr>
+        <p:spPr>
+          <a:xfrm>
+            <a:off x="9876022" y="1848800"/>
+            <a:ext cx="1188215" cy="330000"/>
+          </a:xfrm>
+          <a:prstGeom prst="roundRect">
+            <a:avLst>
+              <a:gd name="adj" fmla="val 8000"/>
+            </a:avLst>
+          </a:prstGeom>
+          <a:solidFill>
+            <a:srgbClr val="E3F0EF"/>
+          </a:solidFill>
+          <a:ln>
+            <a:noFill/>
+          </a:ln>
+          <a:effectLst/>
+        </p:spPr>
+        <p:style>
+          <a:lnRef idx="1">
+            <a:schemeClr val="accent1"/>
+          </a:lnRef>
+          <a:fillRef idx="3">
+            <a:schemeClr val="accent1"/>
+          </a:fillRef>
+          <a:effectRef idx="2">
+            <a:schemeClr val="accent1"/>
+          </a:effectRef>
+          <a:fontRef idx="minor">
+            <a:schemeClr val="lt1"/>
+          </a:fontRef>
+        </p:style>
+        <p:txBody>
+          <a:bodyPr rtlCol="0" anchor="ctr" lIns="45720" rIns="45720"/>
+          <a:lstStyle/>
+          <a:p>
+            <a:pPr algn="ctr"/>
+            <a:r>
+              <a:rPr sz="1400" b="0">
+                <a:solidFill>
+                  <a:srgbClr val="1B2025"/>
+                </a:solidFill>
+                <a:latin typeface="Avenir Next"/>
+              </a:rPr>
+              <a:t>curriculum</a:t>
+            </a:r>
+          </a:p>
+        </p:txBody>
+      </p:sp>
+      <p:sp>
+        <p:nvSpPr>
+          <p:cNvPr id="12" name="TextBox 11"/>
+          <p:cNvSpPr txBox="1"/>
+          <p:nvPr/>
+        </p:nvSpPr>
+        <p:spPr>
+          <a:xfrm>
+            <a:off x="548640" y="2278800"/>
+            <a:ext cx="10515600" cy="3100000"/>
+          </a:xfrm>
+          <a:prstGeom prst="rect">
+            <a:avLst/>
+          </a:prstGeom>
+          <a:noFill/>
+        </p:spPr>
+        <p:txBody>
+          <a:bodyPr wrap="square" lIns="45720" rIns="45720" tIns="27432" bIns="27432" anchor="t">
+            <a:spAutoFit/>
+          </a:bodyPr>
+          <a:lstStyle/>
+          <a:p>
+            <a:pPr algn="l">
+              <a:spcAft>
+                <a:spcPts val="700"/>
+              </a:spcAft>
+            </a:pPr>
+            <a:r>
+              <a:rPr sz="1500" b="1">
+                <a:solidFill>
+                  <a:srgbClr val="0E7C7B"/>
+                </a:solidFill>
+                <a:latin typeface="Avenir Next"/>
+              </a:rPr>
+              <a:t>(a)  </a:t>
+            </a:r>
+            <a:r>
+              <a:rPr sz="1500" b="0">
+                <a:solidFill>
+                  <a:srgbClr val="1B2025"/>
+                </a:solidFill>
+                <a:latin typeface="Avenir Next"/>
+              </a:rPr>
+              <a:t>Junk runs and mislabeled spectra contaminate the training set — and the same isolate appears three times.  →</a:t>
+            </a:r>
+            <a:r>
+              <a:rPr sz="1500" b="1">
+                <a:solidFill>
+                  <a:srgbClr val="0E7C7B"/>
+                </a:solidFill>
+                <a:latin typeface="Avenir Next"/>
+              </a:rPr>
+              <a:t>  ________</a:t>
+            </a:r>
+          </a:p>
+          <a:p>
+            <a:pPr algn="l">
+              <a:spcAft>
+                <a:spcPts val="700"/>
+              </a:spcAft>
+            </a:pPr>
+            <a:r>
+              <a:rPr sz="1500" b="1">
+                <a:solidFill>
+                  <a:srgbClr val="0E7C7B"/>
+                </a:solidFill>
+                <a:latin typeface="Avenir Next"/>
+              </a:rPr>
+              <a:t>(b)  </a:t>
+            </a:r>
+            <a:r>
+              <a:rPr sz="1500" b="0">
+                <a:solidFill>
+                  <a:srgbClr val="1B2025"/>
+                </a:solidFill>
+                <a:latin typeface="Avenir Next"/>
+              </a:rPr>
+              <a:t>Only 41 real resistant spectra; the model just predicts “susceptible”.  →</a:t>
+            </a:r>
+            <a:r>
+              <a:rPr sz="1500" b="1">
+                <a:solidFill>
+                  <a:srgbClr val="0E7C7B"/>
+                </a:solidFill>
+                <a:latin typeface="Avenir Next"/>
+              </a:rPr>
+              <a:t>  ________</a:t>
+            </a:r>
+          </a:p>
+          <a:p>
+            <a:pPr algn="l">
+              <a:spcAft>
+                <a:spcPts val="700"/>
+              </a:spcAft>
+            </a:pPr>
+            <a:r>
+              <a:rPr sz="1500" b="1">
+                <a:solidFill>
+                  <a:srgbClr val="0E7C7B"/>
+                </a:solidFill>
+                <a:latin typeface="Avenir Next"/>
+              </a:rPr>
+              <a:t>(c)  </a:t>
+            </a:r>
+            <a:r>
+              <a:rPr sz="1500" b="0">
+                <a:solidFill>
+                  <a:srgbClr val="1B2025"/>
+                </a:solidFill>
+                <a:latin typeface="Avenir Next"/>
+              </a:rPr>
+              <a:t>Easy cases are fine, but borderline isolates are missed.  →</a:t>
+            </a:r>
+            <a:r>
+              <a:rPr sz="1500" b="1">
+                <a:solidFill>
+                  <a:srgbClr val="0E7C7B"/>
+                </a:solidFill>
+                <a:latin typeface="Avenir Next"/>
+              </a:rPr>
+              <a:t>  ________</a:t>
+            </a:r>
+          </a:p>
+          <a:p>
+            <a:pPr algn="l">
+              <a:spcAft>
+                <a:spcPts val="700"/>
+              </a:spcAft>
+            </a:pPr>
+            <a:r>
+              <a:rPr sz="1500" b="1">
+                <a:solidFill>
+                  <a:srgbClr val="0E7C7B"/>
+                </a:solidFill>
+                <a:latin typeface="Avenir Next"/>
+              </a:rPr>
+              <a:t>(d)  </a:t>
+            </a:r>
+            <a:r>
+              <a:rPr sz="1500" b="0">
+                <a:solidFill>
+                  <a:srgbClr val="1B2025"/>
+                </a:solidFill>
+                <a:latin typeface="Avenir Next"/>
+              </a:rPr>
+              <a:t>Training is unstable when very easy and very hard batches alternate.  →</a:t>
+            </a:r>
+            <a:r>
+              <a:rPr sz="1500" b="1">
+                <a:solidFill>
+                  <a:srgbClr val="0E7C7B"/>
+                </a:solidFill>
+                <a:latin typeface="Avenir Next"/>
+              </a:rPr>
+              <a:t>  ________</a:t>
+            </a:r>
+          </a:p>
+          <a:p>
+            <a:pPr algn="l">
+              <a:spcAft>
+                <a:spcPts val="700"/>
+              </a:spcAft>
+            </a:pPr>
+            <a:r>
+              <a:rPr sz="1500" b="1">
+                <a:solidFill>
+                  <a:srgbClr val="0E7C7B"/>
+                </a:solidFill>
+                <a:latin typeface="Avenir Next"/>
+              </a:rPr>
+              <a:t>(e)  </a:t>
+            </a:r>
+            <a:r>
+              <a:rPr sz="1500" b="0">
+                <a:solidFill>
+                  <a:srgbClr val="1B2025"/>
+                </a:solidFill>
+                <a:latin typeface="Avenir Next"/>
+              </a:rPr>
+              <a:t>Which of these four adds NEW resistant signal to the dataset?</a:t>
+            </a:r>
+          </a:p>
+        </p:txBody>
+      </p:sp>
+    </p:spTree>
+  </p:cSld>
+  <p:clrMapOvr>
+    <a:masterClrMapping/>
+  </p:clrMapOvr>
+</p:sld>
+</file>
+
+<file path=ppt/slides/slide23.xml><?xml version="1.0" encoding="utf-8"?>
+<p:sld xmlns:a="http://schemas.openxmlformats.org/drawingml/2006/main" xmlns:p="http://schemas.openxmlformats.org/presentationml/2006/main" xmlns:r="http://schemas.openxmlformats.org/officeDocument/2006/relationships">
+  <p:cSld>
+    <p:spTree>
+      <p:nvGrpSpPr>
+        <p:cNvPr id="1" name=""/>
+        <p:cNvGrpSpPr/>
+        <p:nvPr/>
+      </p:nvGrpSpPr>
+      <p:grpSpPr/>
+      <p:sp>
+        <p:nvSpPr>
+          <p:cNvPr id="2" name="Rectangle 1"/>
+          <p:cNvSpPr/>
+          <p:nvPr/>
+        </p:nvSpPr>
+        <p:spPr>
+          <a:xfrm>
+            <a:off x="0" y="0"/>
+            <a:ext cx="12191695" cy="6858000"/>
+          </a:xfrm>
+          <a:prstGeom prst="rect">
+            <a:avLst/>
+          </a:prstGeom>
+          <a:solidFill>
+            <a:srgbClr val="FBFBF8"/>
+          </a:solidFill>
+          <a:ln>
+            <a:noFill/>
+          </a:ln>
+          <a:effectLst/>
+        </p:spPr>
+        <p:style>
+          <a:lnRef idx="1">
+            <a:schemeClr val="accent1"/>
+          </a:lnRef>
+          <a:fillRef idx="3">
+            <a:schemeClr val="accent1"/>
+          </a:fillRef>
+          <a:effectRef idx="2">
+            <a:schemeClr val="accent1"/>
+          </a:effectRef>
+          <a:fontRef idx="minor">
+            <a:schemeClr val="lt1"/>
+          </a:fontRef>
+        </p:style>
+        <p:txBody>
+          <a:bodyPr rtlCol="0" anchor="ctr"/>
+          <a:lstStyle/>
+          <a:p>
+            <a:pPr algn="ctr"/>
+            <a:endParaRPr/>
+          </a:p>
+        </p:txBody>
+      </p:sp>
+      <p:sp>
+        <p:nvSpPr>
+          <p:cNvPr id="3" name="TextBox 2"/>
+          <p:cNvSpPr txBox="1"/>
+          <p:nvPr/>
+        </p:nvSpPr>
+        <p:spPr>
+          <a:xfrm>
+            <a:off x="548640" y="320040"/>
+            <a:ext cx="10972800" cy="365760"/>
+          </a:xfrm>
+          <a:prstGeom prst="rect">
+            <a:avLst/>
+          </a:prstGeom>
+          <a:noFill/>
+        </p:spPr>
+        <p:txBody>
+          <a:bodyPr wrap="square" anchor="t">
+            <a:spAutoFit/>
+          </a:bodyPr>
+          <a:lstStyle/>
+          <a:p>
+            <a:r>
+              <a:rPr sz="1300" b="1" i="0">
+                <a:solidFill>
+                  <a:srgbClr val="8A9099"/>
+                </a:solidFill>
+                <a:latin typeface="Menlo"/>
+              </a:rPr>
+              <a:t>PART B · 4 · SMOTE · YOUR TURN (YOU-DO = Q4)</a:t>
+            </a:r>
+          </a:p>
+        </p:txBody>
+      </p:sp>
+      <p:sp>
+        <p:nvSpPr>
+          <p:cNvPr id="4" name="TextBox 3"/>
+          <p:cNvSpPr txBox="1"/>
+          <p:nvPr/>
+        </p:nvSpPr>
+        <p:spPr>
+          <a:xfrm>
+            <a:off x="548640" y="731520"/>
+            <a:ext cx="11064240" cy="1005840"/>
+          </a:xfrm>
+          <a:prstGeom prst="rect">
+            <a:avLst/>
+          </a:prstGeom>
+          <a:noFill/>
+        </p:spPr>
+        <p:txBody>
+          <a:bodyPr wrap="square" anchor="t">
+            <a:spAutoFit/>
+          </a:bodyPr>
+          <a:lstStyle/>
+          <a:p>
+            <a:r>
+              <a:rPr sz="3400" b="1" i="0">
+                <a:solidFill>
+                  <a:srgbClr val="1B2025"/>
+                </a:solidFill>
+                <a:latin typeface="Avenir Next"/>
+              </a:rPr>
+              <a:t>Your turn — make one SMOTE point</a:t>
+            </a:r>
+          </a:p>
+        </p:txBody>
+      </p:sp>
+      <p:sp>
+        <p:nvSpPr>
+          <p:cNvPr id="6" name="Rectangle 5"/>
+          <p:cNvSpPr/>
+          <p:nvPr/>
+        </p:nvSpPr>
+        <p:spPr>
+          <a:xfrm>
+            <a:off x="548640" y="5538216"/>
+            <a:ext cx="10515600" cy="1182624"/>
+          </a:xfrm>
+          <a:prstGeom prst="rect">
+            <a:avLst/>
+          </a:prstGeom>
+          <a:solidFill>
+            <a:srgbClr val="F1F1EC"/>
+          </a:solidFill>
+          <a:ln w="12700">
+            <a:solidFill>
+              <a:srgbClr val="E09E2F"/>
+            </a:solidFill>
+          </a:ln>
+          <a:effectLst/>
+        </p:spPr>
+        <p:style>
+          <a:lnRef idx="1">
+            <a:schemeClr val="accent1"/>
+          </a:lnRef>
+          <a:fillRef idx="3">
+            <a:schemeClr val="accent1"/>
+          </a:fillRef>
+          <a:effectRef idx="2">
+            <a:schemeClr val="accent1"/>
+          </a:effectRef>
+          <a:fontRef idx="minor">
+            <a:schemeClr val="lt1"/>
+          </a:fontRef>
+        </p:style>
+        <p:txBody>
+          <a:bodyPr wrap="square" lIns="182880" rIns="182880" rtlCol="0" anchor="ctr"/>
+          <a:lstStyle/>
+          <a:p>
+            <a:pPr algn="ctr"/>
+            <a:r>
+              <a:rPr sz="1200" b="1" i="0">
+                <a:solidFill>
+                  <a:srgbClr val="E09E2F"/>
+                </a:solidFill>
+                <a:latin typeface="Menlo"/>
+              </a:rPr>
+              <a:t>CHECKPOINT · </a:t>
+            </a:r>
+            <a:r>
+              <a:rPr sz="1700" b="0" i="0">
+                <a:solidFill>
+                  <a:srgbClr val="3D444C"/>
+                </a:solidFill>
+                <a:latin typeface="Avenir Next"/>
+              </a:rPr>
+              <a:t>Your turn → Quiz 10, Q4. Same formula, new numbers: A = (2, 6), B = (4, 10), λ = 0.25. (a) Compute the synthetic point. (b) Why is raw-spectrum SMOTE risky in 6,000 dimensions? Worked answer in the notes.</a:t>
+            </a:r>
+          </a:p>
+        </p:txBody>
+      </p:sp>
+      <p:sp>
+        <p:nvSpPr>
+          <p:cNvPr id="7" name="Rounded Rectangle 6"/>
+          <p:cNvSpPr/>
+          <p:nvPr/>
+        </p:nvSpPr>
+        <p:spPr>
+          <a:xfrm>
+            <a:off x="2048640" y="1888800"/>
+            <a:ext cx="7515600" cy="620000"/>
+          </a:xfrm>
+          <a:prstGeom prst="roundRect">
+            <a:avLst>
+              <a:gd name="adj" fmla="val 8000"/>
+            </a:avLst>
+          </a:prstGeom>
+          <a:solidFill>
+            <a:srgbClr val="E3F0EF"/>
+          </a:solidFill>
+          <a:ln>
+            <a:noFill/>
+          </a:ln>
+          <a:effectLst/>
+        </p:spPr>
+        <p:style>
+          <a:lnRef idx="1">
+            <a:schemeClr val="accent1"/>
+          </a:lnRef>
+          <a:fillRef idx="3">
+            <a:schemeClr val="accent1"/>
+          </a:fillRef>
+          <a:effectRef idx="2">
+            <a:schemeClr val="accent1"/>
+          </a:effectRef>
+          <a:fontRef idx="minor">
+            <a:schemeClr val="lt1"/>
+          </a:fontRef>
+        </p:style>
+        <p:txBody>
+          <a:bodyPr rtlCol="0" anchor="ctr"/>
+          <a:lstStyle/>
+          <a:p/>
+        </p:txBody>
+      </p:sp>
+      <p:sp>
+        <p:nvSpPr>
+          <p:cNvPr id="8" name="TextBox 7"/>
+          <p:cNvSpPr txBox="1"/>
+          <p:nvPr/>
+        </p:nvSpPr>
+        <p:spPr>
+          <a:xfrm>
+            <a:off x="2048640" y="1888800"/>
+            <a:ext cx="7515600" cy="620000"/>
+          </a:xfrm>
+          <a:prstGeom prst="rect">
+            <a:avLst/>
+          </a:prstGeom>
+          <a:noFill/>
+        </p:spPr>
+        <p:txBody>
+          <a:bodyPr wrap="square" lIns="45720" rIns="45720" tIns="27432" bIns="27432" anchor="ctr">
+            <a:spAutoFit/>
+          </a:bodyPr>
+          <a:lstStyle/>
+          <a:p>
+            <a:pPr algn="ctr">
+              <a:spcAft>
+                <a:spcPts val="400"/>
+              </a:spcAft>
+            </a:pPr>
+            <a:r>
+              <a:rPr sz="2000" b="1">
+                <a:solidFill>
+                  <a:srgbClr val="0E7C7B"/>
+                </a:solidFill>
+                <a:latin typeface="Menlo"/>
+              </a:rPr>
+              <a:t>synthetic  =  A  +  λ · (B − A)</a:t>
+            </a:r>
+          </a:p>
+        </p:txBody>
+      </p:sp>
+      <p:sp>
+        <p:nvSpPr>
+          <p:cNvPr id="9" name="TextBox 8"/>
+          <p:cNvSpPr txBox="1"/>
+          <p:nvPr/>
+        </p:nvSpPr>
+        <p:spPr>
+          <a:xfrm>
+            <a:off x="548640" y="2648800"/>
+            <a:ext cx="10515600" cy="520000"/>
+          </a:xfrm>
+          <a:prstGeom prst="rect">
+            <a:avLst/>
+          </a:prstGeom>
+          <a:noFill/>
+        </p:spPr>
+        <p:txBody>
+          <a:bodyPr wrap="square" lIns="45720" rIns="45720" tIns="27432" bIns="27432" anchor="t">
+            <a:spAutoFit/>
+          </a:bodyPr>
+          <a:lstStyle/>
+          <a:p>
+            <a:pPr algn="ctr">
+              <a:spcAft>
+                <a:spcPts val="400"/>
+              </a:spcAft>
+            </a:pPr>
+            <a:r>
+              <a:rPr sz="1600" b="0">
+                <a:solidFill>
+                  <a:srgbClr val="1B2025"/>
+                </a:solidFill>
+                <a:latin typeface="Avenir Next"/>
+              </a:rPr>
+              <a:t>Two real minority points:   </a:t>
+            </a:r>
+            <a:r>
+              <a:rPr sz="1600" b="1">
+                <a:solidFill>
+                  <a:srgbClr val="1B2025"/>
+                </a:solidFill>
+                <a:latin typeface="Menlo"/>
+              </a:rPr>
+              <a:t>A = (2, 6)   B = (4, 10)   λ = 0.25</a:t>
+            </a:r>
+          </a:p>
+        </p:txBody>
+      </p:sp>
+      <p:sp>
+        <p:nvSpPr>
+          <p:cNvPr id="10" name="TextBox 9"/>
+          <p:cNvSpPr txBox="1"/>
+          <p:nvPr/>
+        </p:nvSpPr>
+        <p:spPr>
+          <a:xfrm>
+            <a:off x="548640" y="3288800"/>
+            <a:ext cx="10515600" cy="1900000"/>
+          </a:xfrm>
+          <a:prstGeom prst="rect">
+            <a:avLst/>
+          </a:prstGeom>
+          <a:noFill/>
+        </p:spPr>
+        <p:txBody>
+          <a:bodyPr wrap="square" lIns="45720" rIns="45720" tIns="27432" bIns="27432" anchor="t">
+            <a:spAutoFit/>
+          </a:bodyPr>
+          <a:lstStyle/>
+          <a:p>
+            <a:pPr algn="l">
+              <a:spcAft>
+                <a:spcPts val="1000"/>
+              </a:spcAft>
+            </a:pPr>
+            <a:r>
+              <a:rPr sz="1700" b="1">
+                <a:solidFill>
+                  <a:srgbClr val="0E7C7B"/>
+                </a:solidFill>
+                <a:latin typeface="Avenir Next"/>
+              </a:rPr>
+              <a:t>(a)  </a:t>
+            </a:r>
+            <a:r>
+              <a:rPr sz="1700" b="0">
+                <a:solidFill>
+                  <a:srgbClr val="1B2025"/>
+                </a:solidFill>
+                <a:latin typeface="Avenir Next"/>
+              </a:rPr>
+              <a:t>synthetic = ( 2 + 0.25·(4 − 2),  6 + 0.25·(10 − 6) ) =</a:t>
+            </a:r>
+            <a:r>
+              <a:rPr sz="1700" b="1">
+                <a:solidFill>
+                  <a:srgbClr val="0E7C7B"/>
+                </a:solidFill>
+                <a:latin typeface="Avenir Next"/>
+              </a:rPr>
+              <a:t>  ________</a:t>
+            </a:r>
+          </a:p>
+          <a:p>
+            <a:pPr algn="l">
+              <a:spcAft>
+                <a:spcPts val="1000"/>
+              </a:spcAft>
+            </a:pPr>
+            <a:r>
+              <a:rPr sz="1700" b="1">
+                <a:solidFill>
+                  <a:srgbClr val="0E7C7B"/>
+                </a:solidFill>
+                <a:latin typeface="Avenir Next"/>
+              </a:rPr>
+              <a:t>(b)  </a:t>
+            </a:r>
+            <a:r>
+              <a:rPr sz="1700" b="0">
+                <a:solidFill>
+                  <a:srgbClr val="1B2025"/>
+                </a:solidFill>
+                <a:latin typeface="Avenir Next"/>
+              </a:rPr>
+              <a:t>One sentence: why is raw-spectrum SMOTE risky in 6,000 dimensions?</a:t>
+            </a:r>
+          </a:p>
+        </p:txBody>
+      </p:sp>
+    </p:spTree>
+  </p:cSld>
+  <p:clrMapOvr>
+    <a:masterClrMapping/>
+  </p:clrMapOvr>
+</p:sld>
+</file>
+
+<file path=ppt/slides/slide24.xml><?xml version="1.0" encoding="utf-8"?>
+<p:sld xmlns:a="http://schemas.openxmlformats.org/drawingml/2006/main" xmlns:p="http://schemas.openxmlformats.org/presentationml/2006/main" xmlns:r="http://schemas.openxmlformats.org/officeDocument/2006/relationships">
+  <p:cSld>
+    <p:spTree>
+      <p:nvGrpSpPr>
+        <p:cNvPr id="1" name=""/>
+        <p:cNvGrpSpPr/>
+        <p:nvPr/>
+      </p:nvGrpSpPr>
+      <p:grpSpPr/>
+      <p:sp>
+        <p:nvSpPr>
+          <p:cNvPr id="2" name="Rectangle 1"/>
+          <p:cNvSpPr/>
+          <p:nvPr/>
+        </p:nvSpPr>
+        <p:spPr>
+          <a:xfrm>
+            <a:off x="0" y="0"/>
+            <a:ext cx="12191695" cy="6858000"/>
+          </a:xfrm>
+          <a:prstGeom prst="rect">
+            <a:avLst/>
+          </a:prstGeom>
+          <a:solidFill>
+            <a:srgbClr val="FBFBF8"/>
+          </a:solidFill>
+          <a:ln>
+            <a:noFill/>
+          </a:ln>
+          <a:effectLst/>
+        </p:spPr>
+        <p:style>
+          <a:lnRef idx="1">
+            <a:schemeClr val="accent1"/>
+          </a:lnRef>
+          <a:fillRef idx="3">
+            <a:schemeClr val="accent1"/>
+          </a:fillRef>
+          <a:effectRef idx="2">
+            <a:schemeClr val="accent1"/>
+          </a:effectRef>
+          <a:fontRef idx="minor">
+            <a:schemeClr val="lt1"/>
+          </a:fontRef>
+        </p:style>
+        <p:txBody>
+          <a:bodyPr rtlCol="0" anchor="ctr"/>
+          <a:lstStyle/>
+          <a:p>
+            <a:pPr algn="ctr"/>
+            <a:endParaRPr/>
+          </a:p>
+        </p:txBody>
+      </p:sp>
+      <p:sp>
+        <p:nvSpPr>
+          <p:cNvPr id="3" name="TextBox 2"/>
+          <p:cNvSpPr txBox="1"/>
+          <p:nvPr/>
+        </p:nvSpPr>
+        <p:spPr>
+          <a:xfrm>
+            <a:off x="548640" y="320040"/>
+            <a:ext cx="10972800" cy="365760"/>
+          </a:xfrm>
+          <a:prstGeom prst="rect">
+            <a:avLst/>
+          </a:prstGeom>
+          <a:noFill/>
+        </p:spPr>
+        <p:txBody>
+          <a:bodyPr wrap="square" anchor="t">
+            <a:spAutoFit/>
+          </a:bodyPr>
+          <a:lstStyle/>
+          <a:p>
+            <a:r>
+              <a:rPr sz="1300" b="1" i="0">
+                <a:solidFill>
+                  <a:srgbClr val="8A9099"/>
+                </a:solidFill>
+                <a:latin typeface="Menlo"/>
+              </a:rPr>
+              <a:t>PART A · YOUR TURN (YOU-DO = Q2)</a:t>
+            </a:r>
+          </a:p>
+        </p:txBody>
+      </p:sp>
+      <p:sp>
+        <p:nvSpPr>
+          <p:cNvPr id="4" name="TextBox 3"/>
+          <p:cNvSpPr txBox="1"/>
+          <p:nvPr/>
+        </p:nvSpPr>
+        <p:spPr>
+          <a:xfrm>
+            <a:off x="548640" y="731520"/>
+            <a:ext cx="11064240" cy="1005840"/>
+          </a:xfrm>
+          <a:prstGeom prst="rect">
+            <a:avLst/>
+          </a:prstGeom>
+          <a:noFill/>
+        </p:spPr>
+        <p:txBody>
+          <a:bodyPr wrap="square" anchor="t">
+            <a:spAutoFit/>
+          </a:bodyPr>
+          <a:lstStyle/>
+          <a:p>
+            <a:r>
+              <a:rPr sz="3400" b="1" i="0">
+                <a:solidFill>
+                  <a:srgbClr val="1B2025"/>
+                </a:solidFill>
+                <a:latin typeface="Avenir Next"/>
+              </a:rPr>
+              <a:t>Your turn — AUROC or AUPRC for this screen?</a:t>
+            </a:r>
+          </a:p>
+        </p:txBody>
+      </p:sp>
+      <p:sp>
+        <p:nvSpPr>
+          <p:cNvPr id="6" name="Rectangle 5"/>
+          <p:cNvSpPr/>
+          <p:nvPr/>
+        </p:nvSpPr>
+        <p:spPr>
+          <a:xfrm>
+            <a:off x="548640" y="5538216"/>
+            <a:ext cx="10515600" cy="1182624"/>
+          </a:xfrm>
+          <a:prstGeom prst="rect">
+            <a:avLst/>
+          </a:prstGeom>
+          <a:solidFill>
+            <a:srgbClr val="F1F1EC"/>
+          </a:solidFill>
+          <a:ln w="12700">
+            <a:solidFill>
+              <a:srgbClr val="E09E2F"/>
+            </a:solidFill>
+          </a:ln>
+          <a:effectLst/>
+        </p:spPr>
+        <p:style>
+          <a:lnRef idx="1">
+            <a:schemeClr val="accent1"/>
+          </a:lnRef>
+          <a:fillRef idx="3">
+            <a:schemeClr val="accent1"/>
+          </a:fillRef>
+          <a:effectRef idx="2">
+            <a:schemeClr val="accent1"/>
+          </a:effectRef>
+          <a:fontRef idx="minor">
+            <a:schemeClr val="lt1"/>
+          </a:fontRef>
+        </p:style>
+        <p:txBody>
+          <a:bodyPr wrap="square" lIns="182880" rIns="182880" rtlCol="0" anchor="ctr"/>
+          <a:lstStyle/>
+          <a:p>
+            <a:pPr algn="ctr"/>
+            <a:r>
+              <a:rPr sz="1200" b="1" i="0">
+                <a:solidFill>
+                  <a:srgbClr val="E09E2F"/>
+                </a:solidFill>
+                <a:latin typeface="Menlo"/>
+              </a:rPr>
+              <a:t>CHECKPOINT · </a:t>
+            </a:r>
+            <a:r>
+              <a:rPr sz="1700" b="0" i="0">
+                <a:solidFill>
+                  <a:srgbClr val="3D444C"/>
+                </a:solidFill>
+                <a:latin typeface="Avenir Next"/>
+              </a:rPr>
+              <a:t>Your turn → Quiz 10, Q2. Same screen, 4% prevalence. Place its one operating point on the ROC and on the PR curve, then decide which area to report across all thresholds — and why. Worked answer in the notes.</a:t>
+            </a:r>
+          </a:p>
+        </p:txBody>
+      </p:sp>
+      <p:sp>
+        <p:nvSpPr>
+          <p:cNvPr id="7" name="Rounded Rectangle 6"/>
+          <p:cNvSpPr/>
+          <p:nvPr/>
+        </p:nvSpPr>
+        <p:spPr>
+          <a:xfrm>
+            <a:off x="548640" y="1868800"/>
+            <a:ext cx="10515600" cy="1060000"/>
+          </a:xfrm>
+          <a:prstGeom prst="roundRect">
+            <a:avLst>
+              <a:gd name="adj" fmla="val 8000"/>
+            </a:avLst>
+          </a:prstGeom>
+          <a:solidFill>
+            <a:srgbClr val="FFFFFF"/>
+          </a:solidFill>
+          <a:ln w="12700">
+            <a:solidFill>
+              <a:srgbClr val="D9D9D2"/>
+            </a:solidFill>
+          </a:ln>
+          <a:effectLst/>
+        </p:spPr>
+        <p:style>
+          <a:lnRef idx="1">
+            <a:schemeClr val="accent1"/>
+          </a:lnRef>
+          <a:fillRef idx="3">
+            <a:schemeClr val="accent1"/>
+          </a:fillRef>
+          <a:effectRef idx="2">
+            <a:schemeClr val="accent1"/>
+          </a:effectRef>
+          <a:fontRef idx="minor">
+            <a:schemeClr val="lt1"/>
+          </a:fontRef>
+        </p:style>
+        <p:txBody>
+          <a:bodyPr rtlCol="0" anchor="ctr"/>
+          <a:lstStyle/>
+          <a:p/>
+        </p:txBody>
+      </p:sp>
+      <p:sp>
+        <p:nvSpPr>
+          <p:cNvPr id="8" name="TextBox 7"/>
+          <p:cNvSpPr txBox="1"/>
+          <p:nvPr/>
+        </p:nvSpPr>
+        <p:spPr>
+          <a:xfrm>
+            <a:off x="640080" y="1888800"/>
+            <a:ext cx="10332720" cy="1040000"/>
+          </a:xfrm>
+          <a:prstGeom prst="rect">
+            <a:avLst/>
+          </a:prstGeom>
+          <a:noFill/>
+        </p:spPr>
+        <p:txBody>
+          <a:bodyPr wrap="square" lIns="45720" rIns="45720" tIns="27432" bIns="27432" anchor="t">
+            <a:spAutoFit/>
+          </a:bodyPr>
+          <a:lstStyle/>
+          <a:p>
+            <a:pPr algn="l">
+              <a:spcAft>
+                <a:spcPts val="300"/>
+              </a:spcAft>
+            </a:pPr>
+            <a:r>
+              <a:rPr sz="1500" b="1">
+                <a:solidFill>
+                  <a:srgbClr val="1B2025"/>
+                </a:solidFill>
+                <a:latin typeface="Avenir Next"/>
+              </a:rPr>
+              <a:t>Same screen:  </a:t>
+            </a:r>
+            <a:r>
+              <a:rPr sz="1500" b="0">
+                <a:solidFill>
+                  <a:srgbClr val="1B2025"/>
+                </a:solidFill>
+                <a:latin typeface="Menlo"/>
+              </a:rPr>
+              <a:t>TP = 16   FN = 4   FP = 32   TN = 448</a:t>
+            </a:r>
+            <a:r>
+              <a:rPr sz="1500" b="0">
+                <a:solidFill>
+                  <a:srgbClr val="3D444C"/>
+                </a:solidFill>
+                <a:latin typeface="Avenir Next"/>
+              </a:rPr>
+              <a:t>   ·   rare positives: 20 of 500 = 4% prevalence</a:t>
+            </a:r>
+          </a:p>
+          <a:p>
+            <a:pPr algn="l">
+              <a:spcAft>
+                <a:spcPts val="300"/>
+              </a:spcAft>
+            </a:pPr>
+            <a:r>
+              <a:rPr sz="1400" b="0">
+                <a:solidFill>
+                  <a:srgbClr val="0E7C7B"/>
+                </a:solidFill>
+                <a:latin typeface="Menlo"/>
+              </a:rPr>
+              <a:t>FPR = FP / (FP + TN)     TPR = recall = TP / (TP + FN)     precision = TP / (TP + FP)</a:t>
+            </a:r>
+          </a:p>
+          <a:p>
+            <a:pPr algn="l">
+              <a:spcAft>
+                <a:spcPts val="300"/>
+              </a:spcAft>
+            </a:pPr>
+            <a:r>
+              <a:rPr sz="1400" b="0">
+                <a:solidFill>
+                  <a:srgbClr val="3D444C"/>
+                </a:solidFill>
+                <a:latin typeface="Avenir Next"/>
+              </a:rPr>
+              <a:t>the PR curve’s chance baseline sits at the prevalence (ROC’s sits at 0.5)</a:t>
+            </a:r>
+          </a:p>
+        </p:txBody>
+      </p:sp>
+      <p:sp>
+        <p:nvSpPr>
+          <p:cNvPr id="9" name="TextBox 8"/>
+          <p:cNvSpPr txBox="1"/>
+          <p:nvPr/>
+        </p:nvSpPr>
+        <p:spPr>
+          <a:xfrm>
+            <a:off x="548640" y="3028800"/>
+            <a:ext cx="10515600" cy="2300000"/>
+          </a:xfrm>
+          <a:prstGeom prst="rect">
+            <a:avLst/>
+          </a:prstGeom>
+          <a:noFill/>
+        </p:spPr>
+        <p:txBody>
+          <a:bodyPr wrap="square" lIns="45720" rIns="45720" tIns="27432" bIns="27432" anchor="t">
+            <a:spAutoFit/>
+          </a:bodyPr>
+          <a:lstStyle/>
+          <a:p>
+            <a:pPr algn="l">
+              <a:spcAft>
+                <a:spcPts val="1000"/>
+              </a:spcAft>
+            </a:pPr>
+            <a:r>
+              <a:rPr sz="1600" b="1">
+                <a:solidFill>
+                  <a:srgbClr val="0E7C7B"/>
+                </a:solidFill>
+                <a:latin typeface="Avenir Next"/>
+              </a:rPr>
+              <a:t>(a)  </a:t>
+            </a:r>
+            <a:r>
+              <a:rPr sz="1600" b="0">
+                <a:solidFill>
+                  <a:srgbClr val="1B2025"/>
+                </a:solidFill>
+                <a:latin typeface="Avenir Next"/>
+              </a:rPr>
+              <a:t>ROC point:  FPR = 32 / (32 + 448) =</a:t>
+            </a:r>
+            <a:r>
+              <a:rPr sz="1600" b="1">
+                <a:solidFill>
+                  <a:srgbClr val="0E7C7B"/>
+                </a:solidFill>
+                <a:latin typeface="Avenir Next"/>
+              </a:rPr>
+              <a:t>  ________</a:t>
+            </a:r>
+            <a:r>
+              <a:rPr sz="1600" b="0">
+                <a:solidFill>
+                  <a:srgbClr val="1B2025"/>
+                </a:solidFill>
+                <a:latin typeface="Avenir Next"/>
+              </a:rPr>
+              <a:t>     TPR (recall) =  ________  — does it hug the top-left corner?  ________</a:t>
+            </a:r>
+          </a:p>
+          <a:p>
+            <a:pPr algn="l">
+              <a:spcAft>
+                <a:spcPts val="1000"/>
+              </a:spcAft>
+            </a:pPr>
+            <a:r>
+              <a:rPr sz="1600" b="1">
+                <a:solidFill>
+                  <a:srgbClr val="0E7C7B"/>
+                </a:solidFill>
+                <a:latin typeface="Avenir Next"/>
+              </a:rPr>
+              <a:t>(b)  </a:t>
+            </a:r>
+            <a:r>
+              <a:rPr sz="1600" b="0">
+                <a:solidFill>
+                  <a:srgbClr val="1B2025"/>
+                </a:solidFill>
+                <a:latin typeface="Avenir Next"/>
+              </a:rPr>
+              <a:t>PR point:  recall =</a:t>
+            </a:r>
+            <a:r>
+              <a:rPr sz="1600" b="1">
+                <a:solidFill>
+                  <a:srgbClr val="0E7C7B"/>
+                </a:solidFill>
+                <a:latin typeface="Avenir Next"/>
+              </a:rPr>
+              <a:t>  ________</a:t>
+            </a:r>
+            <a:r>
+              <a:rPr sz="1600" b="0">
+                <a:solidFill>
+                  <a:srgbClr val="1B2025"/>
+                </a:solidFill>
+                <a:latin typeface="Avenir Next"/>
+              </a:rPr>
+              <a:t>     precision =  ________     chance baseline = prevalence =  ________</a:t>
+            </a:r>
+          </a:p>
+          <a:p>
+            <a:pPr algn="l">
+              <a:spcAft>
+                <a:spcPts val="1000"/>
+              </a:spcAft>
+            </a:pPr>
+            <a:r>
+              <a:rPr sz="1600" b="1">
+                <a:solidFill>
+                  <a:srgbClr val="0E7C7B"/>
+                </a:solidFill>
+                <a:latin typeface="Avenir Next"/>
+              </a:rPr>
+              <a:t>(c)  </a:t>
+            </a:r>
+            <a:r>
+              <a:rPr sz="1600" b="0">
+                <a:solidFill>
+                  <a:srgbClr val="1B2025"/>
+                </a:solidFill>
+                <a:latin typeface="Avenir Next"/>
+              </a:rPr>
+              <a:t>To report this screen across ALL thresholds, would you trust the AUROC or the AUPRC (PR curve) — and why?</a:t>
+            </a:r>
+          </a:p>
+        </p:txBody>
+      </p:sp>
+    </p:spTree>
+  </p:cSld>
+  <p:clrMapOvr>
+    <a:masterClrMapping/>
+  </p:clrMapOvr>
+</p:sld>
+</file>
+
 <file path=ppt/slides/slide3.xml><?xml version="1.0" encoding="utf-8"?>
 <p:sld xmlns:a="http://schemas.openxmlformats.org/drawingml/2006/main" xmlns:r="http://schemas.openxmlformats.org/officeDocument/2006/relationships" xmlns:p="http://schemas.openxmlformats.org/presentationml/2006/main">
   <p:cSld>
@@ -6938,7 +8589,7 @@
                 </a:solidFill>
                 <a:latin typeface="Menlo"/>
               </a:rPr>
-              <a:t>PART A · YOUR TURN (YOU-DO) → QUIZ 10</a:t>
+              <a:t>PART A · YOUR TURN (YOU-DO = Q1)</a:t>
             </a:r>
           </a:p>
         </p:txBody>

--- a/slides/pptx/lecture10_imbalanced_data.pptx
+++ b/slides/pptx/lecture10_imbalanced_data.pptx
@@ -1181,7 +1181,7 @@
           <a:lstStyle/>
           <a:p>
             <a:r>
-              <a:t>YOU-DO = Quiz 10 Q3, after the last treatment (curriculum). Worked answer: (a) curation — clean the labels and drop the junk before anything fancier, then deduplicate: embed every spectrum (the CNN's last hidden layer) and treat cosine ≥ 0.99 as the same isolate, keeping one — repeats split across train and test are leakage. (b) class weights / SMOTE / oversample — make the rare class count. (c) focal loss — up-weight the hard, low-confidence cases. (d) curriculum — order easy, or class-balanced prevalence. (e) None of them. Every move re-uses the same 41 resistant spectra (reweighting shouts them louder, SMOTE interpolates between them, focal loss focuses on them, curriculum reorders them) — no new biological information enters. Only collecting more real resistant isolates adds signal.</a:t>
+              <a:t>YOU-DO = Quiz 10 Q3, after the last treatment (curriculum). Worked answer: (a) curation — clean the labels and drop the junk before anything fancier, then deduplicate: embed every spectrum (the CNN's last hidden layer) and treat cosine ≥ 0.99 as the same isolate, keeping one — repeats split across train and test are leakage. (b) class weights / SMOTE / oversample — make the rare class count. (c) focal loss — up-weight the hard, low-confidence cases. (d) curriculum — order easy → hard, or class-balanced → true prevalence. (e) None of them. Every move re-uses the same 41 resistant spectra (reweighting shouts them louder, SMOTE interpolates between them, focal loss focuses on them, curriculum reorders them) — no new biological information enters. Only collecting more real resistant isolates adds signal.</a:t>
             </a:r>
           </a:p>
         </p:txBody>
@@ -1227,7 +1227,7 @@
           <a:lstStyle/>
           <a:p>
             <a:r>
-              <a:t>YOU-DO = Quiz 10 Q4, straight after the SMOTE do-it-together. Worked answer: (a) synthetic = (2 + 0.25 2, 6 + 0.25 4) = (2 + 0.5, 6 + 1) = (2.5, 7) — a quarter of the way from A toward B. (b) A straight-line blend of two real 6,000-dimensional spectra can produce a non-physical spectrum (a peak pattern no instrument would ever record), so pair SMOTE with curation and domain augmentation (m/z jitter), or simply oversample real spectra.</a:t>
+              <a:t>YOU-DO = Quiz 10 Q4, straight after the SMOTE do-it-together. Worked answer: (a) synthetic = (2 + 0.25·2, 6 + 0.25·4) = (2 + 0.5, 6 + 1) = (2.5, 7) — a quarter of the way from A toward B. (b) A straight-line blend of two real 6,000-dimensional spectra can produce a non-physical spectrum (a peak pattern no instrument would ever record), so pair SMOTE with curation and domain augmentation (m/z jitter), or simply oversample real spectra.</a:t>
             </a:r>
           </a:p>
         </p:txBody>
@@ -1273,7 +1273,7 @@
           <a:lstStyle/>
           <a:p>
             <a:r>
-              <a:t>YOU-DO = Quiz 10 Q2, straight after 'why AUROC flatters'. The formulas it needs are restated on the slide. Worked answer: (a) FPR = 32/(32+448) = 32/480 = 0.067; TPR = 0.80 — the point (0.067, 0.80) hugs the top-left, so the ROC/AUROC looks excellent. (b) PR point =(recall 0.80, precision 0.33); PR baseline = prevalence = 20/500 = 0.04 (ROC's baseline is 0.5). (c) Trust the AUPRC / PR curve (reported with recall). At 4% prevalence the 480 true-negatives dominate, so a tiny FPR keeps AUROC flatteringly high even though precision is only 0.33 (2 of 3 flags false). AUROC is invariant to the class ratio; AUPRC collapses toward the prevalence, so it stays honest as recall grows (Saito \&amp; Rehmsmeier 2015).</a:t>
+              <a:t>YOU-DO = Quiz 10 Q2, straight after 'why AUROC flatters'. The formulas it needs are restated on the slide. Worked answer: (a) FPR = 32/(32+448) = 32/480 = 0.067; TPR = 0.80 — the point (0.067, 0.80) hugs the top-left, so the ROC/AUROC looks excellent. (b) PR point =(recall 0.80, precision 0.33); PR baseline = prevalence = 20/500 = 0.04 (ROC's baseline is 0.5). (c) Trust the AUPRC / PR curve (reported with recall). At 4% prevalence the 480 true-negatives dominate, so a tiny FPR keeps AUROC flatteringly high even though precision is only 0.33 (2 of 3 flags false). AUROC is invariant to the class ratio; AUPRC collapses toward the prevalence, so it stays honest as recall grows (Saito &amp; Rehmsmeier 2015).</a:t>
             </a:r>
           </a:p>
         </p:txBody>
@@ -3316,7 +3316,7 @@
 </file>
 
 <file path=ppt/slides/slide11.xml><?xml version="1.0" encoding="utf-8"?>
-<p:sld xmlns:a="http://schemas.openxmlformats.org/drawingml/2006/main" xmlns:r="http://schemas.openxmlformats.org/officeDocument/2006/relationships" xmlns:p="http://schemas.openxmlformats.org/presentationml/2006/main">
+<p:sld xmlns:a="http://schemas.openxmlformats.org/drawingml/2006/main" xmlns:p="http://schemas.openxmlformats.org/presentationml/2006/main" xmlns:r="http://schemas.openxmlformats.org/officeDocument/2006/relationships">
   <p:cSld>
     <p:spTree>
       <p:nvGrpSpPr>
@@ -3324,14 +3324,7 @@
         <p:cNvGrpSpPr/>
         <p:nvPr/>
       </p:nvGrpSpPr>
-      <p:grpSpPr>
-        <a:xfrm>
-          <a:off x="0" y="0"/>
-          <a:ext cx="0" cy="0"/>
-          <a:chOff x="0" y="0"/>
-          <a:chExt cx="0" cy="0"/>
-        </a:xfrm>
-      </p:grpSpPr>
+      <p:grpSpPr/>
       <p:sp>
         <p:nvSpPr>
           <p:cNvPr id="2" name="Rectangle 1"/>
@@ -3406,7 +3399,7 @@
                 </a:solidFill>
                 <a:latin typeface="Menlo"/>
               </a:rPr>
-              <a:t>PART A · ONE HONESTY NOTE (NO QUIZ ITEM)</a:t>
+              <a:t>PART A · YOUR TURN (YOU-DO = Q2)</a:t>
             </a:r>
           </a:p>
         </p:txBody>
@@ -3434,41 +3427,17 @@
           <a:lstStyle/>
           <a:p>
             <a:r>
-              <a:rPr sz="3400" b="1" i="0" dirty="0">
+              <a:rPr sz="3400" b="1" i="0">
                 <a:solidFill>
                   <a:srgbClr val="1B2025"/>
                 </a:solidFill>
                 <a:latin typeface="Avenir Next"/>
               </a:rPr>
-              <a:t>A metric is only valid on the data you tested</a:t>
-            </a:r>
-          </a:p>
-        </p:txBody>
-      </p:sp>
-      <p:pic>
-        <p:nvPicPr>
-          <p:cNvPr id="5" name="Picture 4" descr="fig_shift_drop.png"/>
-          <p:cNvPicPr>
-            <a:picLocks noChangeAspect="1"/>
-          </p:cNvPicPr>
-          <p:nvPr/>
-        </p:nvPicPr>
-        <p:blipFill>
-          <a:blip r:embed="rId3"/>
-          <a:stretch>
-            <a:fillRect/>
-          </a:stretch>
-        </p:blipFill>
-        <p:spPr>
-          <a:xfrm>
-            <a:off x="2383861" y="1828800"/>
-            <a:ext cx="7393798" cy="3358897"/>
-          </a:xfrm>
-          <a:prstGeom prst="rect">
-            <a:avLst/>
-          </a:prstGeom>
-        </p:spPr>
-      </p:pic>
+              <a:t>Your turn — AUROC or AUPRC for this screen?</a:t>
+            </a:r>
+          </a:p>
+        </p:txBody>
+      </p:sp>
       <p:sp>
         <p:nvSpPr>
           <p:cNvPr id="6" name="Rectangle 5"/>
@@ -3477,18 +3446,18 @@
         </p:nvSpPr>
         <p:spPr>
           <a:xfrm>
-            <a:off x="548640" y="5279137"/>
-            <a:ext cx="10515600" cy="1441703"/>
+            <a:off x="548640" y="5538216"/>
+            <a:ext cx="10515600" cy="1182624"/>
           </a:xfrm>
           <a:prstGeom prst="rect">
             <a:avLst/>
           </a:prstGeom>
           <a:solidFill>
-            <a:srgbClr val="E3F0EF"/>
+            <a:srgbClr val="F1F1EC"/>
           </a:solidFill>
           <a:ln w="12700">
             <a:solidFill>
-              <a:srgbClr val="0E7C7B"/>
+              <a:srgbClr val="E09E2F"/>
             </a:solidFill>
           </a:ln>
           <a:effectLst/>
@@ -3515,20 +3484,289 @@
             <a:r>
               <a:rPr sz="1200" b="1" i="0">
                 <a:solidFill>
+                  <a:srgbClr val="E09E2F"/>
+                </a:solidFill>
+                <a:latin typeface="Menlo"/>
+              </a:rPr>
+              <a:t>CHECKPOINT · </a:t>
+            </a:r>
+            <a:r>
+              <a:rPr sz="1700" b="0" i="0">
+                <a:solidFill>
+                  <a:srgbClr val="3D444C"/>
+                </a:solidFill>
+                <a:latin typeface="Avenir Next"/>
+              </a:rPr>
+              <a:t>Your turn → Quiz 10, Q2. Same screen, 4% prevalence. Place its one operating point on the ROC and on the PR curve, then decide which area to report across all thresholds — and why. Worked answer in the notes.</a:t>
+            </a:r>
+          </a:p>
+        </p:txBody>
+      </p:sp>
+      <p:sp>
+        <p:nvSpPr>
+          <p:cNvPr id="7" name="Rounded Rectangle 6"/>
+          <p:cNvSpPr/>
+          <p:nvPr/>
+        </p:nvSpPr>
+        <p:spPr>
+          <a:xfrm>
+            <a:off x="548640" y="1868800"/>
+            <a:ext cx="10515600" cy="1060000"/>
+          </a:xfrm>
+          <a:prstGeom prst="roundRect">
+            <a:avLst>
+              <a:gd name="adj" fmla="val 8000"/>
+            </a:avLst>
+          </a:prstGeom>
+          <a:solidFill>
+            <a:srgbClr val="FFFFFF"/>
+          </a:solidFill>
+          <a:ln w="12700">
+            <a:solidFill>
+              <a:srgbClr val="D9D9D2"/>
+            </a:solidFill>
+          </a:ln>
+          <a:effectLst/>
+        </p:spPr>
+        <p:style>
+          <a:lnRef idx="1">
+            <a:schemeClr val="accent1"/>
+          </a:lnRef>
+          <a:fillRef idx="3">
+            <a:schemeClr val="accent1"/>
+          </a:fillRef>
+          <a:effectRef idx="2">
+            <a:schemeClr val="accent1"/>
+          </a:effectRef>
+          <a:fontRef idx="minor">
+            <a:schemeClr val="lt1"/>
+          </a:fontRef>
+        </p:style>
+        <p:txBody>
+          <a:bodyPr rtlCol="0" anchor="ctr"/>
+          <a:lstStyle/>
+          <a:p/>
+        </p:txBody>
+      </p:sp>
+      <p:sp>
+        <p:nvSpPr>
+          <p:cNvPr id="8" name="TextBox 7"/>
+          <p:cNvSpPr txBox="1"/>
+          <p:nvPr/>
+        </p:nvSpPr>
+        <p:spPr>
+          <a:xfrm>
+            <a:off x="640080" y="1888800"/>
+            <a:ext cx="10332720" cy="1040000"/>
+          </a:xfrm>
+          <a:prstGeom prst="rect">
+            <a:avLst/>
+          </a:prstGeom>
+          <a:noFill/>
+        </p:spPr>
+        <p:txBody>
+          <a:bodyPr wrap="square" lIns="45720" rIns="45720" tIns="27432" bIns="27432" anchor="t">
+            <a:spAutoFit/>
+          </a:bodyPr>
+          <a:lstStyle/>
+          <a:p>
+            <a:pPr algn="l">
+              <a:spcAft>
+                <a:spcPts val="300"/>
+              </a:spcAft>
+            </a:pPr>
+            <a:r>
+              <a:rPr sz="1500" b="1">
+                <a:solidFill>
+                  <a:srgbClr val="1B2025"/>
+                </a:solidFill>
+                <a:latin typeface="Avenir Next"/>
+              </a:rPr>
+              <a:t>Same screen:  </a:t>
+            </a:r>
+            <a:r>
+              <a:rPr sz="1500" b="0">
+                <a:solidFill>
+                  <a:srgbClr val="1B2025"/>
+                </a:solidFill>
+                <a:latin typeface="Menlo"/>
+              </a:rPr>
+              <a:t>TP = 16   FN = 4   FP = 32   TN = 448</a:t>
+            </a:r>
+            <a:r>
+              <a:rPr sz="1500" b="0">
+                <a:solidFill>
+                  <a:srgbClr val="3D444C"/>
+                </a:solidFill>
+                <a:latin typeface="Avenir Next"/>
+              </a:rPr>
+              <a:t>   ·   rare positives: 20 of 500 = 4% prevalence</a:t>
+            </a:r>
+          </a:p>
+          <a:p>
+            <a:pPr algn="l">
+              <a:spcAft>
+                <a:spcPts val="300"/>
+              </a:spcAft>
+            </a:pPr>
+            <a:r>
+              <a:rPr sz="1400" b="0">
+                <a:solidFill>
                   <a:srgbClr val="0E7C7B"/>
                 </a:solidFill>
                 <a:latin typeface="Menlo"/>
               </a:rPr>
-              <a:t>MASS SPEC · </a:t>
-            </a:r>
-            <a:r>
-              <a:rPr sz="1700" b="0" i="0">
+              <a:t>FPR = FP / (FP + TN)     TPR = recall = TP / (TP + FN)     precision = TP / (TP + FP)</a:t>
+            </a:r>
+          </a:p>
+          <a:p>
+            <a:pPr algn="l">
+              <a:spcAft>
+                <a:spcPts val="300"/>
+              </a:spcAft>
+            </a:pPr>
+            <a:r>
+              <a:rPr sz="1400" b="0">
                 <a:solidFill>
                   <a:srgbClr val="3D444C"/>
                 </a:solidFill>
                 <a:latin typeface="Avenir Next"/>
               </a:rPr>
-              <a:t>Even a good PR curve is only a promise about the distribution you validated on. A new instrument, site, or reagent lot SHIFTS the data (left). Real tale (right): DRIAMS-trained resistance models lose 0.07–0.23 AUROC on a new site and decay within 18 months. So validate EXTERNALLY (new site/instrument) and TEMPORALLY (later runs), and split by patient/isolate — never by spectrum.</a:t>
+              <a:t>the PR curve’s chance baseline sits at the prevalence (ROC’s sits at 0.5)</a:t>
+            </a:r>
+          </a:p>
+        </p:txBody>
+      </p:sp>
+      <p:sp>
+        <p:nvSpPr>
+          <p:cNvPr id="9" name="TextBox 8"/>
+          <p:cNvSpPr txBox="1"/>
+          <p:nvPr/>
+        </p:nvSpPr>
+        <p:spPr>
+          <a:xfrm>
+            <a:off x="548640" y="3028800"/>
+            <a:ext cx="10515600" cy="2300000"/>
+          </a:xfrm>
+          <a:prstGeom prst="rect">
+            <a:avLst/>
+          </a:prstGeom>
+          <a:noFill/>
+        </p:spPr>
+        <p:txBody>
+          <a:bodyPr wrap="square" lIns="45720" rIns="45720" tIns="27432" bIns="27432" anchor="t">
+            <a:spAutoFit/>
+          </a:bodyPr>
+          <a:lstStyle/>
+          <a:p>
+            <a:pPr algn="l">
+              <a:spcAft>
+                <a:spcPts val="1000"/>
+              </a:spcAft>
+            </a:pPr>
+            <a:r>
+              <a:rPr sz="1600" b="1">
+                <a:solidFill>
+                  <a:srgbClr val="0E7C7B"/>
+                </a:solidFill>
+                <a:latin typeface="Avenir Next"/>
+              </a:rPr>
+              <a:t>(a)  </a:t>
+            </a:r>
+            <a:r>
+              <a:rPr sz="1600" b="0">
+                <a:solidFill>
+                  <a:srgbClr val="1B2025"/>
+                </a:solidFill>
+                <a:latin typeface="Avenir Next"/>
+              </a:rPr>
+              <a:t>ROC point:  FPR = 32 / (32 + 448) =</a:t>
+            </a:r>
+            <a:r>
+              <a:rPr sz="1600" b="1">
+                <a:solidFill>
+                  <a:srgbClr val="0E7C7B"/>
+                </a:solidFill>
+                <a:latin typeface="Avenir Next"/>
+              </a:rPr>
+              <a:t>  ________</a:t>
+            </a:r>
+            <a:r>
+              <a:rPr sz="1600" b="0">
+                <a:solidFill>
+                  <a:srgbClr val="1B2025"/>
+                </a:solidFill>
+                <a:latin typeface="Avenir Next"/>
+              </a:rPr>
+              <a:t>     TPR (recall) =  ________  — does it hug the top-left corner?  ________</a:t>
+            </a:r>
+          </a:p>
+          <a:p>
+            <a:pPr algn="l">
+              <a:spcAft>
+                <a:spcPts val="1000"/>
+              </a:spcAft>
+            </a:pPr>
+            <a:r>
+              <a:rPr sz="1600" b="1">
+                <a:solidFill>
+                  <a:srgbClr val="0E7C7B"/>
+                </a:solidFill>
+                <a:latin typeface="Avenir Next"/>
+              </a:rPr>
+              <a:t>(b)  </a:t>
+            </a:r>
+            <a:r>
+              <a:rPr sz="1600" b="0">
+                <a:solidFill>
+                  <a:srgbClr val="1B2025"/>
+                </a:solidFill>
+                <a:latin typeface="Avenir Next"/>
+              </a:rPr>
+              <a:t>PR point:  recall =</a:t>
+            </a:r>
+            <a:r>
+              <a:rPr sz="1600" b="1">
+                <a:solidFill>
+                  <a:srgbClr val="0E7C7B"/>
+                </a:solidFill>
+                <a:latin typeface="Avenir Next"/>
+              </a:rPr>
+              <a:t>  ________</a:t>
+            </a:r>
+            <a:r>
+              <a:rPr sz="1600" b="0">
+                <a:solidFill>
+                  <a:srgbClr val="1B2025"/>
+                </a:solidFill>
+                <a:latin typeface="Avenir Next"/>
+              </a:rPr>
+              <a:t>     precision =  ________     chance baseline = prevalence =  ________</a:t>
+            </a:r>
+          </a:p>
+          <a:p>
+            <a:pPr algn="l">
+              <a:spcAft>
+                <a:spcPts val="1000"/>
+              </a:spcAft>
+            </a:pPr>
+            <a:r>
+              <a:rPr sz="1600" b="1">
+                <a:solidFill>
+                  <a:srgbClr val="0E7C7B"/>
+                </a:solidFill>
+                <a:latin typeface="Avenir Next"/>
+              </a:rPr>
+              <a:t>(c)  </a:t>
+            </a:r>
+            <a:r>
+              <a:rPr sz="1600" b="0">
+                <a:solidFill>
+                  <a:srgbClr val="1B2025"/>
+                </a:solidFill>
+                <a:latin typeface="Avenir Next"/>
+              </a:rPr>
+              <a:t>To report this screen across ALL thresholds, would you trust the AUROC or the AUPRC (PR curve) — and why?</a:t>
             </a:r>
           </a:p>
         </p:txBody>
@@ -3632,7 +3870,7 @@
                 </a:solidFill>
                 <a:latin typeface="Menlo"/>
               </a:rPr>
-              <a:t>PART B · THE TREATMENT MENU</a:t>
+              <a:t>PART A · ONE HONESTY NOTE (NO QUIZ ITEM)</a:t>
             </a:r>
           </a:p>
         </p:txBody>
@@ -3646,7 +3884,7 @@
         <p:spPr>
           <a:xfrm>
             <a:off x="548640" y="731520"/>
-            <a:ext cx="11064240" cy="1127760"/>
+            <a:ext cx="11064240" cy="1005840"/>
           </a:xfrm>
           <a:prstGeom prst="rect">
             <a:avLst/>
@@ -3660,20 +3898,20 @@
           <a:lstStyle/>
           <a:p>
             <a:r>
-              <a:rPr sz="3400" b="1" i="0">
+              <a:rPr sz="3400" b="1" i="0" dirty="0">
                 <a:solidFill>
                   <a:srgbClr val="1B2025"/>
                 </a:solidFill>
                 <a:latin typeface="Avenir Next"/>
               </a:rPr>
-              <a:t>Treating imbalance — match the move to the problem</a:t>
+              <a:t>A metric is only valid on the data you tested</a:t>
             </a:r>
           </a:p>
         </p:txBody>
       </p:sp>
       <p:pic>
         <p:nvPicPr>
-          <p:cNvPr id="7" name="Picture 4" descr="fig_treatment_menu.png"/>
+          <p:cNvPr id="5" name="Picture 4" descr="fig_shift_drop.png"/>
           <p:cNvPicPr>
             <a:picLocks noChangeAspect="1"/>
           </p:cNvPicPr>
@@ -3687,8 +3925,8 @@
         </p:blipFill>
         <p:spPr>
           <a:xfrm>
-            <a:off x="1934519" y="1828800"/>
-            <a:ext cx="8322930" cy="3358897"/>
+            <a:off x="2383861" y="1828800"/>
+            <a:ext cx="7393798" cy="3358897"/>
           </a:xfrm>
           <a:prstGeom prst="rect">
             <a:avLst/>
@@ -3754,7 +3992,7 @@
                 </a:solidFill>
                 <a:latin typeface="Avenir Next"/>
               </a:rPr>
-              <a:t>Four moves, each for a different symptom. CURATE when runs are junk/mislabeled. REWEIGHT / SMOTE / oversample when the rare class is ignored. FOCAL LOSS when borderline cases are missed. CURRICULUM when training is unstable across easy/hard. The honest footer: none of these adds NEW resistant signal — only more real resistant spectra does.</a:t>
+              <a:t>Even a good PR curve is only a promise about the distribution you validated on. A new instrument, site, or reagent lot SHIFTS the data (left). Real tale (right): DRIAMS-trained resistance models lose 0.07–0.23 AUROC on a new site and decay within 18 months. So validate EXTERNALLY (new site/instrument) and TEMPORALLY (later runs), and split by patient/isolate — never by spectrum.</a:t>
             </a:r>
           </a:p>
         </p:txBody>
@@ -3858,7 +4096,7 @@
                 </a:solidFill>
                 <a:latin typeface="Menlo"/>
               </a:rPr>
-              <a:t>PART B · 1 · CURATION · WHAT IT ACTUALLY LOOKS LIKE</a:t>
+              <a:t>PART B · THE TREATMENT MENU</a:t>
             </a:r>
           </a:p>
         </p:txBody>
@@ -3892,14 +4130,14 @@
                 </a:solidFill>
                 <a:latin typeface="Avenir Next"/>
               </a:rPr>
-              <a:t>Curate first: fix the labels, drop the junk</a:t>
+              <a:t>Treating imbalance — match the move to the problem</a:t>
             </a:r>
           </a:p>
         </p:txBody>
       </p:sp>
       <p:pic>
         <p:nvPicPr>
-          <p:cNvPr id="7" name="Picture 4" descr="fig_curation.png"/>
+          <p:cNvPr id="7" name="Picture 4" descr="fig_treatment_menu.png"/>
           <p:cNvPicPr>
             <a:picLocks noChangeAspect="1"/>
           </p:cNvPicPr>
@@ -3913,8 +4151,8 @@
         </p:blipFill>
         <p:spPr>
           <a:xfrm>
-            <a:off x="2211738" y="1874519"/>
-            <a:ext cx="7768492" cy="3246120"/>
+            <a:off x="1934519" y="1828800"/>
+            <a:ext cx="8322930" cy="3358897"/>
           </a:xfrm>
           <a:prstGeom prst="rect">
             <a:avLst/>
@@ -3929,8 +4167,8 @@
         </p:nvSpPr>
         <p:spPr>
           <a:xfrm>
-            <a:off x="548640" y="5230368"/>
-            <a:ext cx="10515600" cy="1444752"/>
+            <a:off x="548640" y="5279137"/>
+            <a:ext cx="10515600" cy="1441703"/>
           </a:xfrm>
           <a:prstGeom prst="rect">
             <a:avLst/>
@@ -3980,7 +4218,7 @@
                 </a:solidFill>
                 <a:latin typeface="Avenir Next"/>
               </a:rPr>
-              <a:t>A curation pass on our own 738 spectra: 22 runs failed acceptance, 8 carry an S/R label the two AST methods disagree on, and 12 are replicate shots of an isolate already in the set (train/test leakage). You finish with 35 resistant instead of 41 — fewer examples, a better model, because 3 of those 41 were labelled wrong.</a:t>
+              <a:t>Four moves, each for a different symptom. CURATE when runs are junk/mislabeled. REWEIGHT / SMOTE / oversample when the rare class is ignored. FOCAL LOSS when borderline cases are missed. CURRICULUM when training is unstable across easy/hard. The honest footer: none of these adds NEW resistant signal — only more real resistant spectra does.</a:t>
             </a:r>
           </a:p>
         </p:txBody>
@@ -4084,7 +4322,7 @@
                 </a:solidFill>
                 <a:latin typeface="Menlo"/>
               </a:rPr>
-              <a:t>PART B · 1 · CURATION, CONTINUED · DO-IT-TOGETHER</a:t>
+              <a:t>PART B · 1 · CURATION · WHAT IT ACTUALLY LOOKS LIKE</a:t>
             </a:r>
           </a:p>
         </p:txBody>
@@ -4118,14 +4356,14 @@
                 </a:solidFill>
                 <a:latin typeface="Avenir Next"/>
               </a:rPr>
-              <a:t>Find the duplicates: dedup in embedding space</a:t>
+              <a:t>Curate first: fix the labels, drop the junk</a:t>
             </a:r>
           </a:p>
         </p:txBody>
       </p:sp>
       <p:pic>
         <p:nvPicPr>
-          <p:cNvPr id="7" name="Picture 4" descr="fig_embed_dedup.png"/>
+          <p:cNvPr id="7" name="Picture 4" descr="fig_curation.png"/>
           <p:cNvPicPr>
             <a:picLocks noChangeAspect="1"/>
           </p:cNvPicPr>
@@ -4139,8 +4377,8 @@
         </p:blipFill>
         <p:spPr>
           <a:xfrm>
-            <a:off x="2254525" y="1828800"/>
-            <a:ext cx="7682644" cy="3320000"/>
+            <a:off x="2211738" y="1874519"/>
+            <a:ext cx="7768492" cy="3246120"/>
           </a:xfrm>
           <a:prstGeom prst="rect">
             <a:avLst/>
@@ -4155,18 +4393,18 @@
         </p:nvSpPr>
         <p:spPr>
           <a:xfrm>
-            <a:off x="548640" y="5279136"/>
-            <a:ext cx="10515600" cy="1441703"/>
+            <a:off x="548640" y="5230368"/>
+            <a:ext cx="10515600" cy="1444752"/>
           </a:xfrm>
           <a:prstGeom prst="rect">
             <a:avLst/>
           </a:prstGeom>
           <a:solidFill>
-            <a:srgbClr val="F1F1EC"/>
+            <a:srgbClr val="E3F0EF"/>
           </a:solidFill>
           <a:ln w="12700">
             <a:solidFill>
-              <a:srgbClr val="E09E2F"/>
+              <a:srgbClr val="0E7C7B"/>
             </a:solidFill>
           </a:ln>
           <a:effectLst/>
@@ -4193,11 +4431,11 @@
             <a:r>
               <a:rPr sz="1200" b="1" i="0">
                 <a:solidFill>
-                  <a:srgbClr val="E09E2F"/>
+                  <a:srgbClr val="0E7C7B"/>
                 </a:solidFill>
                 <a:latin typeface="Menlo"/>
               </a:rPr>
-              <a:t>CHECKPOINT · </a:t>
+              <a:t>MASS SPEC · </a:t>
             </a:r>
             <a:r>
               <a:rPr sz="1700" b="0" i="0">
@@ -4206,7 +4444,7 @@
                 </a:solidFill>
                 <a:latin typeface="Avenir Next"/>
               </a:rPr>
-              <a:t>How do you FIND 12 replicates among 738 spectra? Push each through the trained CNN — its last hidden layer IS the spectrum's embedding (Lecture 7), so two shots of one isolate land on top of each other. Ruler: cos(a,b) = (a·b)/(|a|·|b|). Together: a=(3,4,0) vs b=(6,8,0) → 50/(5×10) = 1.00, a near-duplicate; a vs c=(0,4,3) → 16/25 = 0.64, keep both. Rule: cos ≥ 0.99 → keep one.</a:t>
+              <a:t>A curation pass on our own 738 spectra: 22 runs failed acceptance, 8 carry an S/R label the two AST methods disagree on, and 12 are replicate shots of an isolate already in the set (train/test leakage). You finish with 35 resistant instead of 41 — fewer examples, a better model, because 3 of those 41 were labelled wrong.</a:t>
             </a:r>
           </a:p>
         </p:txBody>
@@ -4220,225 +4458,6 @@
 </file>
 
 <file path=ppt/slides/slide15.xml><?xml version="1.0" encoding="utf-8"?>
-<p:sld xmlns:a="http://schemas.openxmlformats.org/drawingml/2006/main" xmlns:p="http://schemas.openxmlformats.org/presentationml/2006/main" xmlns:r="http://schemas.openxmlformats.org/officeDocument/2006/relationships">
-  <p:cSld>
-    <p:spTree>
-      <p:nvGrpSpPr>
-        <p:cNvPr id="1" name=""/>
-        <p:cNvGrpSpPr/>
-        <p:nvPr/>
-      </p:nvGrpSpPr>
-      <p:grpSpPr/>
-      <p:sp>
-        <p:nvSpPr>
-          <p:cNvPr id="2" name="Rectangle 1"/>
-          <p:cNvSpPr/>
-          <p:nvPr/>
-        </p:nvSpPr>
-        <p:spPr>
-          <a:xfrm>
-            <a:off x="0" y="0"/>
-            <a:ext cx="12191695" cy="6858000"/>
-          </a:xfrm>
-          <a:prstGeom prst="rect">
-            <a:avLst/>
-          </a:prstGeom>
-          <a:solidFill>
-            <a:srgbClr val="FBFBF8"/>
-          </a:solidFill>
-          <a:ln>
-            <a:noFill/>
-          </a:ln>
-          <a:effectLst/>
-        </p:spPr>
-        <p:style>
-          <a:lnRef idx="1">
-            <a:schemeClr val="accent1"/>
-          </a:lnRef>
-          <a:fillRef idx="3">
-            <a:schemeClr val="accent1"/>
-          </a:fillRef>
-          <a:effectRef idx="2">
-            <a:schemeClr val="accent1"/>
-          </a:effectRef>
-          <a:fontRef idx="minor">
-            <a:schemeClr val="lt1"/>
-          </a:fontRef>
-        </p:style>
-        <p:txBody>
-          <a:bodyPr rtlCol="0" anchor="ctr"/>
-          <a:lstStyle/>
-          <a:p>
-            <a:pPr algn="ctr"/>
-            <a:endParaRPr/>
-          </a:p>
-        </p:txBody>
-      </p:sp>
-      <p:sp>
-        <p:nvSpPr>
-          <p:cNvPr id="3" name="TextBox 2"/>
-          <p:cNvSpPr txBox="1"/>
-          <p:nvPr/>
-        </p:nvSpPr>
-        <p:spPr>
-          <a:xfrm>
-            <a:off x="548640" y="320040"/>
-            <a:ext cx="10972800" cy="365760"/>
-          </a:xfrm>
-          <a:prstGeom prst="rect">
-            <a:avLst/>
-          </a:prstGeom>
-          <a:noFill/>
-        </p:spPr>
-        <p:txBody>
-          <a:bodyPr wrap="square" anchor="t">
-            <a:spAutoFit/>
-          </a:bodyPr>
-          <a:lstStyle/>
-          <a:p>
-            <a:r>
-              <a:rPr sz="1300" b="1" i="0">
-                <a:solidFill>
-                  <a:srgbClr val="8A9099"/>
-                </a:solidFill>
-                <a:latin typeface="Menlo"/>
-              </a:rPr>
-              <a:t>PART B · 2 · AUGMENTATION · DO-IT-TOGETHER</a:t>
-            </a:r>
-          </a:p>
-        </p:txBody>
-      </p:sp>
-      <p:sp>
-        <p:nvSpPr>
-          <p:cNvPr id="4" name="TextBox 3"/>
-          <p:cNvSpPr txBox="1"/>
-          <p:nvPr/>
-        </p:nvSpPr>
-        <p:spPr>
-          <a:xfrm>
-            <a:off x="548640" y="731520"/>
-            <a:ext cx="11064240" cy="1127760"/>
-          </a:xfrm>
-          <a:prstGeom prst="rect">
-            <a:avLst/>
-          </a:prstGeom>
-          <a:noFill/>
-        </p:spPr>
-        <p:txBody>
-          <a:bodyPr wrap="square" anchor="t">
-            <a:spAutoFit/>
-          </a:bodyPr>
-          <a:lstStyle/>
-          <a:p>
-            <a:r>
-              <a:rPr sz="3400" b="1" i="0">
-                <a:solidFill>
-                  <a:srgbClr val="1B2025"/>
-                </a:solidFill>
-                <a:latin typeface="Avenir Next"/>
-              </a:rPr>
-              <a:t>Augment: more views of the data you already have</a:t>
-            </a:r>
-          </a:p>
-        </p:txBody>
-      </p:sp>
-      <p:pic>
-        <p:nvPicPr>
-          <p:cNvPr id="7" name="Picture 4" descr="fig_augmentation.png"/>
-          <p:cNvPicPr>
-            <a:picLocks noChangeAspect="1"/>
-          </p:cNvPicPr>
-          <p:nvPr/>
-        </p:nvPicPr>
-        <p:blipFill>
-          <a:blip r:embed="rId4"/>
-          <a:stretch>
-            <a:fillRect/>
-          </a:stretch>
-        </p:blipFill>
-        <p:spPr>
-          <a:xfrm>
-            <a:off x="2196518" y="1828800"/>
-            <a:ext cx="7798657" cy="3320000"/>
-          </a:xfrm>
-          <a:prstGeom prst="rect">
-            <a:avLst/>
-          </a:prstGeom>
-        </p:spPr>
-      </p:pic>
-      <p:sp>
-        <p:nvSpPr>
-          <p:cNvPr id="6" name="Rectangle 5"/>
-          <p:cNvSpPr/>
-          <p:nvPr/>
-        </p:nvSpPr>
-        <p:spPr>
-          <a:xfrm>
-            <a:off x="548640" y="5279136"/>
-            <a:ext cx="10515600" cy="1441703"/>
-          </a:xfrm>
-          <a:prstGeom prst="rect">
-            <a:avLst/>
-          </a:prstGeom>
-          <a:solidFill>
-            <a:srgbClr val="F1F1EC"/>
-          </a:solidFill>
-          <a:ln w="12700">
-            <a:solidFill>
-              <a:srgbClr val="E09E2F"/>
-            </a:solidFill>
-          </a:ln>
-          <a:effectLst/>
-        </p:spPr>
-        <p:style>
-          <a:lnRef idx="1">
-            <a:schemeClr val="accent1"/>
-          </a:lnRef>
-          <a:fillRef idx="3">
-            <a:schemeClr val="accent1"/>
-          </a:fillRef>
-          <a:effectRef idx="2">
-            <a:schemeClr val="accent1"/>
-          </a:effectRef>
-          <a:fontRef idx="minor">
-            <a:schemeClr val="lt1"/>
-          </a:fontRef>
-        </p:style>
-        <p:txBody>
-          <a:bodyPr wrap="square" lIns="182880" rIns="182880" rtlCol="0" anchor="ctr"/>
-          <a:lstStyle/>
-          <a:p>
-            <a:pPr algn="ctr"/>
-            <a:r>
-              <a:rPr sz="1200" b="1" i="0">
-                <a:solidFill>
-                  <a:srgbClr val="E09E2F"/>
-                </a:solidFill>
-                <a:latin typeface="Menlo"/>
-              </a:rPr>
-              <a:t>CHECKPOINT · </a:t>
-            </a:r>
-            <a:r>
-              <a:rPr sz="1700" b="0" i="0">
-                <a:solidFill>
-                  <a:srgbClr val="3D444C"/>
-                </a:solidFill>
-                <a:latin typeface="Avenir Next"/>
-              </a:rPr>
-              <a:t>One labelled image, five more of it — flip, rotate, zoom, dim, add noise; every view is still a band neutrophil. Crop too hard and the cell is gone: the label is destroyed. On spectra the same idea is m/z jitter ±0.1%, intensity ×0.9, baseline and noise. Do-it-together: 41 × 8 views = 328, so 697:41 ≈ 17:1 → 697:328 ≈ 2.1:1 — but augment AFTER the split.</a:t>
-            </a:r>
-          </a:p>
-        </p:txBody>
-      </p:sp>
-    </p:spTree>
-  </p:cSld>
-  <p:clrMapOvr>
-    <a:masterClrMapping/>
-  </p:clrMapOvr>
-</p:sld>
-</file>
-
-<file path=ppt/slides/slide16.xml><?xml version="1.0" encoding="utf-8"?>
 <p:sld xmlns:a="http://schemas.openxmlformats.org/drawingml/2006/main" xmlns:r="http://schemas.openxmlformats.org/officeDocument/2006/relationships" xmlns:p="http://schemas.openxmlformats.org/presentationml/2006/main">
   <p:cSld>
     <p:spTree>
@@ -4529,7 +4548,7 @@
                 </a:solidFill>
                 <a:latin typeface="Menlo"/>
               </a:rPr>
-              <a:t>PART B · 3 · MAKE THE RARE CLASS COUNT · DO-IT-TOGETHER</a:t>
+              <a:t>PART B · 1 · CURATION, CONTINUED · DO-IT-TOGETHER</a:t>
             </a:r>
           </a:p>
         </p:txBody>
@@ -4557,20 +4576,20 @@
           <a:lstStyle/>
           <a:p>
             <a:r>
-              <a:rPr sz="3400" b="1" i="0" dirty="0">
+              <a:rPr sz="3400" b="1" i="0">
                 <a:solidFill>
                   <a:srgbClr val="1B2025"/>
                 </a:solidFill>
                 <a:latin typeface="Avenir Next"/>
               </a:rPr>
-              <a:t>Class weights, oversampling, undersampling</a:t>
+              <a:t>Find the duplicates: dedup in embedding space</a:t>
             </a:r>
           </a:p>
         </p:txBody>
       </p:sp>
       <p:pic>
         <p:nvPicPr>
-          <p:cNvPr id="8" name="Picture 4" descr="fig_class_weights.png"/>
+          <p:cNvPr id="7" name="Picture 4" descr="fig_embed_dedup.png"/>
           <p:cNvPicPr>
             <a:picLocks noChangeAspect="1"/>
           </p:cNvPicPr>
@@ -4584,8 +4603,8 @@
         </p:blipFill>
         <p:spPr>
           <a:xfrm>
-            <a:off x="1900703" y="1874519"/>
-            <a:ext cx="8390561" cy="3200400"/>
+            <a:off x="2254525" y="1828800"/>
+            <a:ext cx="7682644" cy="3320000"/>
           </a:xfrm>
           <a:prstGeom prst="rect">
             <a:avLst/>
@@ -4600,8 +4619,8 @@
         </p:nvSpPr>
         <p:spPr>
           <a:xfrm>
-            <a:off x="548640" y="5193792"/>
-            <a:ext cx="10515600" cy="1481328"/>
+            <a:off x="548640" y="5279136"/>
+            <a:ext cx="10515600" cy="1441703"/>
           </a:xfrm>
           <a:prstGeom prst="rect">
             <a:avLst/>
@@ -4651,7 +4670,226 @@
                 </a:solidFill>
                 <a:latin typeface="Avenir Next"/>
               </a:rPr>
-              <a:t>Balanced weights: w = N / (K · n_c). Do-it-together on our split — resistant 738/(2×41) = 9.00, susceptible 738/(2×697) = 0.53; the ratio is exactly the 17:1 imbalance, so one resistant spectrum counts as 17. Oversampling repeats those 41, undersampling throws away 656 real susceptible spectra — and none of it adds a 42nd isolate.</a:t>
+              <a:t>How do you FIND 12 replicates among 738 spectra? Push each through the trained CNN — its last hidden layer IS the spectrum's embedding (Lecture 7), so two shots of one isolate land on top of each other. Ruler: cos(a,b) = (a·b)/(|a|·|b|). Together: a=(3,4,0) vs b=(6,8,0) → 50/(5×10) = 1.00, a near-duplicate; a vs c=(0,4,3) → 16/25 = 0.64, keep both. Rule: cos ≥ 0.99 → keep one.</a:t>
+            </a:r>
+          </a:p>
+        </p:txBody>
+      </p:sp>
+    </p:spTree>
+  </p:cSld>
+  <p:clrMapOvr>
+    <a:masterClrMapping/>
+  </p:clrMapOvr>
+</p:sld>
+</file>
+
+<file path=ppt/slides/slide16.xml><?xml version="1.0" encoding="utf-8"?>
+<p:sld xmlns:a="http://schemas.openxmlformats.org/drawingml/2006/main" xmlns:p="http://schemas.openxmlformats.org/presentationml/2006/main" xmlns:r="http://schemas.openxmlformats.org/officeDocument/2006/relationships">
+  <p:cSld>
+    <p:spTree>
+      <p:nvGrpSpPr>
+        <p:cNvPr id="1" name=""/>
+        <p:cNvGrpSpPr/>
+        <p:nvPr/>
+      </p:nvGrpSpPr>
+      <p:grpSpPr/>
+      <p:sp>
+        <p:nvSpPr>
+          <p:cNvPr id="2" name="Rectangle 1"/>
+          <p:cNvSpPr/>
+          <p:nvPr/>
+        </p:nvSpPr>
+        <p:spPr>
+          <a:xfrm>
+            <a:off x="0" y="0"/>
+            <a:ext cx="12191695" cy="6858000"/>
+          </a:xfrm>
+          <a:prstGeom prst="rect">
+            <a:avLst/>
+          </a:prstGeom>
+          <a:solidFill>
+            <a:srgbClr val="FBFBF8"/>
+          </a:solidFill>
+          <a:ln>
+            <a:noFill/>
+          </a:ln>
+          <a:effectLst/>
+        </p:spPr>
+        <p:style>
+          <a:lnRef idx="1">
+            <a:schemeClr val="accent1"/>
+          </a:lnRef>
+          <a:fillRef idx="3">
+            <a:schemeClr val="accent1"/>
+          </a:fillRef>
+          <a:effectRef idx="2">
+            <a:schemeClr val="accent1"/>
+          </a:effectRef>
+          <a:fontRef idx="minor">
+            <a:schemeClr val="lt1"/>
+          </a:fontRef>
+        </p:style>
+        <p:txBody>
+          <a:bodyPr rtlCol="0" anchor="ctr"/>
+          <a:lstStyle/>
+          <a:p>
+            <a:pPr algn="ctr"/>
+            <a:endParaRPr/>
+          </a:p>
+        </p:txBody>
+      </p:sp>
+      <p:sp>
+        <p:nvSpPr>
+          <p:cNvPr id="3" name="TextBox 2"/>
+          <p:cNvSpPr txBox="1"/>
+          <p:nvPr/>
+        </p:nvSpPr>
+        <p:spPr>
+          <a:xfrm>
+            <a:off x="548640" y="320040"/>
+            <a:ext cx="10972800" cy="365760"/>
+          </a:xfrm>
+          <a:prstGeom prst="rect">
+            <a:avLst/>
+          </a:prstGeom>
+          <a:noFill/>
+        </p:spPr>
+        <p:txBody>
+          <a:bodyPr wrap="square" anchor="t">
+            <a:spAutoFit/>
+          </a:bodyPr>
+          <a:lstStyle/>
+          <a:p>
+            <a:r>
+              <a:rPr sz="1300" b="1" i="0">
+                <a:solidFill>
+                  <a:srgbClr val="8A9099"/>
+                </a:solidFill>
+                <a:latin typeface="Menlo"/>
+              </a:rPr>
+              <a:t>PART B · 2 · AUGMENTATION · DO-IT-TOGETHER</a:t>
+            </a:r>
+          </a:p>
+        </p:txBody>
+      </p:sp>
+      <p:sp>
+        <p:nvSpPr>
+          <p:cNvPr id="4" name="TextBox 3"/>
+          <p:cNvSpPr txBox="1"/>
+          <p:nvPr/>
+        </p:nvSpPr>
+        <p:spPr>
+          <a:xfrm>
+            <a:off x="548640" y="731520"/>
+            <a:ext cx="11064240" cy="1127760"/>
+          </a:xfrm>
+          <a:prstGeom prst="rect">
+            <a:avLst/>
+          </a:prstGeom>
+          <a:noFill/>
+        </p:spPr>
+        <p:txBody>
+          <a:bodyPr wrap="square" anchor="t">
+            <a:spAutoFit/>
+          </a:bodyPr>
+          <a:lstStyle/>
+          <a:p>
+            <a:r>
+              <a:rPr sz="3400" b="1" i="0">
+                <a:solidFill>
+                  <a:srgbClr val="1B2025"/>
+                </a:solidFill>
+                <a:latin typeface="Avenir Next"/>
+              </a:rPr>
+              <a:t>Augment: more views of the data you already have</a:t>
+            </a:r>
+          </a:p>
+        </p:txBody>
+      </p:sp>
+      <p:pic>
+        <p:nvPicPr>
+          <p:cNvPr id="7" name="Picture 4" descr="fig_augmentation.png"/>
+          <p:cNvPicPr>
+            <a:picLocks noChangeAspect="1"/>
+          </p:cNvPicPr>
+          <p:nvPr/>
+        </p:nvPicPr>
+        <p:blipFill>
+          <a:blip r:embed="rId4"/>
+          <a:stretch>
+            <a:fillRect/>
+          </a:stretch>
+        </p:blipFill>
+        <p:spPr>
+          <a:xfrm>
+            <a:off x="2196518" y="1828800"/>
+            <a:ext cx="7798657" cy="3320000"/>
+          </a:xfrm>
+          <a:prstGeom prst="rect">
+            <a:avLst/>
+          </a:prstGeom>
+        </p:spPr>
+      </p:pic>
+      <p:sp>
+        <p:nvSpPr>
+          <p:cNvPr id="6" name="Rectangle 5"/>
+          <p:cNvSpPr/>
+          <p:nvPr/>
+        </p:nvSpPr>
+        <p:spPr>
+          <a:xfrm>
+            <a:off x="548640" y="5279136"/>
+            <a:ext cx="10515600" cy="1441703"/>
+          </a:xfrm>
+          <a:prstGeom prst="rect">
+            <a:avLst/>
+          </a:prstGeom>
+          <a:solidFill>
+            <a:srgbClr val="F1F1EC"/>
+          </a:solidFill>
+          <a:ln w="12700">
+            <a:solidFill>
+              <a:srgbClr val="E09E2F"/>
+            </a:solidFill>
+          </a:ln>
+          <a:effectLst/>
+        </p:spPr>
+        <p:style>
+          <a:lnRef idx="1">
+            <a:schemeClr val="accent1"/>
+          </a:lnRef>
+          <a:fillRef idx="3">
+            <a:schemeClr val="accent1"/>
+          </a:fillRef>
+          <a:effectRef idx="2">
+            <a:schemeClr val="accent1"/>
+          </a:effectRef>
+          <a:fontRef idx="minor">
+            <a:schemeClr val="lt1"/>
+          </a:fontRef>
+        </p:style>
+        <p:txBody>
+          <a:bodyPr wrap="square" lIns="182880" rIns="182880" rtlCol="0" anchor="ctr"/>
+          <a:lstStyle/>
+          <a:p>
+            <a:pPr algn="ctr"/>
+            <a:r>
+              <a:rPr sz="1200" b="1" i="0">
+                <a:solidFill>
+                  <a:srgbClr val="E09E2F"/>
+                </a:solidFill>
+                <a:latin typeface="Menlo"/>
+              </a:rPr>
+              <a:t>CHECKPOINT · </a:t>
+            </a:r>
+            <a:r>
+              <a:rPr sz="1700" b="0" i="0">
+                <a:solidFill>
+                  <a:srgbClr val="3D444C"/>
+                </a:solidFill>
+                <a:latin typeface="Avenir Next"/>
+              </a:rPr>
+              <a:t>One labelled image, five more of it — flip, rotate, zoom, dim, add noise; every view is still a band neutrophil. Crop too hard and the cell is gone: the label is destroyed. On spectra the same idea is m/z jitter ±0.1%, intensity ×0.9, baseline and noise. Do-it-together: 41 × 8 views = 328, so 697:41 ≈ 17:1 → 697:328 ≈ 2.1:1 — but augment AFTER the split.</a:t>
             </a:r>
           </a:p>
         </p:txBody>
@@ -4755,7 +4993,7 @@
                 </a:solidFill>
                 <a:latin typeface="Menlo"/>
               </a:rPr>
-              <a:t>PART B · 4 · SMOTE · DO-IT-TOGETHER</a:t>
+              <a:t>PART B · 3 · MAKE THE RARE CLASS COUNT · DO-IT-TOGETHER</a:t>
             </a:r>
           </a:p>
         </p:txBody>
@@ -4783,20 +5021,20 @@
           <a:lstStyle/>
           <a:p>
             <a:r>
-              <a:rPr sz="3400" b="1" i="0">
+              <a:rPr sz="3400" b="1" i="0" dirty="0">
                 <a:solidFill>
                   <a:srgbClr val="1B2025"/>
                 </a:solidFill>
                 <a:latin typeface="Avenir Next"/>
               </a:rPr>
-              <a:t>SMOTE: synthesize a new minority point between two real ones</a:t>
+              <a:t>Class weights, oversampling, undersampling</a:t>
             </a:r>
           </a:p>
         </p:txBody>
       </p:sp>
       <p:pic>
         <p:nvPicPr>
-          <p:cNvPr id="7" name="Picture 4" descr="fig_smote.png"/>
+          <p:cNvPr id="8" name="Picture 4" descr="fig_class_weights.png"/>
           <p:cNvPicPr>
             <a:picLocks noChangeAspect="1"/>
           </p:cNvPicPr>
@@ -4810,8 +5048,8 @@
         </p:blipFill>
         <p:spPr>
           <a:xfrm>
-            <a:off x="2509427" y="1828800"/>
-            <a:ext cx="7172839" cy="3320000"/>
+            <a:off x="1900703" y="1874519"/>
+            <a:ext cx="8390561" cy="3200400"/>
           </a:xfrm>
           <a:prstGeom prst="rect">
             <a:avLst/>
@@ -4826,8 +5064,8 @@
         </p:nvSpPr>
         <p:spPr>
           <a:xfrm>
-            <a:off x="548640" y="5279136"/>
-            <a:ext cx="10515600" cy="1441703"/>
+            <a:off x="548640" y="5193792"/>
+            <a:ext cx="10515600" cy="1481328"/>
           </a:xfrm>
           <a:prstGeom prst="rect">
             <a:avLst/>
@@ -4877,7 +5115,7 @@
                 </a:solidFill>
                 <a:latin typeface="Avenir Next"/>
               </a:rPr>
-              <a:t>SMOTE fills in the rare class by INTERPOLATING between two real minority points: synthetic = A + λ·(B−A). Do-it-together with two m/z-bin intensities, A = (2, 6) and B = (4, 10), λ = 0.5 → (3, 8). Now the same three points AS SPECTRA (right): the blend carries A's private peak at m/z 4,100 and B's at m/z 6,800 at HALF height — two ghost peaks no real isolate has. That is the caveat, drawn.</a:t>
+              <a:t>Balanced weights: w = N / (K · n_c). Do-it-together on our split — resistant 738/(2×41) = 9.00, susceptible 738/(2×697) = 0.53; the ratio is exactly the 17:1 imbalance, so one resistant spectrum counts as 17. Oversampling repeats those 41, undersampling throws away 656 real susceptible spectra — and none of it adds a 42nd isolate.</a:t>
             </a:r>
           </a:p>
         </p:txBody>
@@ -4981,7 +5219,7 @@
                 </a:solidFill>
                 <a:latin typeface="Menlo"/>
               </a:rPr>
-              <a:t>PART B · 5 · FOCAL LOSS · I-DO</a:t>
+              <a:t>PART B · 4 · SMOTE · DO-IT-TOGETHER</a:t>
             </a:r>
           </a:p>
         </p:txBody>
@@ -5015,14 +5253,14 @@
                 </a:solidFill>
                 <a:latin typeface="Avenir Next"/>
               </a:rPr>
-              <a:t>Focal loss: turn the volume up on the hard cases</a:t>
+              <a:t>SMOTE: synthesize a new minority point between two real ones</a:t>
             </a:r>
           </a:p>
         </p:txBody>
       </p:sp>
       <p:pic>
         <p:nvPicPr>
-          <p:cNvPr id="7" name="Picture 4" descr="fig_focal_volume.png"/>
+          <p:cNvPr id="7" name="Picture 4" descr="fig_smote.png"/>
           <p:cNvPicPr>
             <a:picLocks noChangeAspect="1"/>
           </p:cNvPicPr>
@@ -5036,8 +5274,8 @@
         </p:blipFill>
         <p:spPr>
           <a:xfrm>
-            <a:off x="2481539" y="1828800"/>
-            <a:ext cx="7228615" cy="3320000"/>
+            <a:off x="2509427" y="1828800"/>
+            <a:ext cx="7172839" cy="3320000"/>
           </a:xfrm>
           <a:prstGeom prst="rect">
             <a:avLst/>
@@ -5052,18 +5290,18 @@
         </p:nvSpPr>
         <p:spPr>
           <a:xfrm>
-            <a:off x="548640" y="5279137"/>
+            <a:off x="548640" y="5279136"/>
             <a:ext cx="10515600" cy="1441703"/>
           </a:xfrm>
           <a:prstGeom prst="rect">
             <a:avLst/>
           </a:prstGeom>
           <a:solidFill>
-            <a:srgbClr val="E3F0EF"/>
+            <a:srgbClr val="F1F1EC"/>
           </a:solidFill>
           <a:ln w="12700">
             <a:solidFill>
-              <a:srgbClr val="0E7C7B"/>
+              <a:srgbClr val="E09E2F"/>
             </a:solidFill>
           </a:ln>
           <a:effectLst/>
@@ -5090,11 +5328,11 @@
             <a:r>
               <a:rPr sz="1200" b="1" i="0">
                 <a:solidFill>
-                  <a:srgbClr val="0E7C7B"/>
+                  <a:srgbClr val="E09E2F"/>
                 </a:solidFill>
                 <a:latin typeface="Menlo"/>
               </a:rPr>
-              <a:t>MASS SPEC · </a:t>
+              <a:t>CHECKPOINT · </a:t>
             </a:r>
             <a:r>
               <a:rPr sz="1700" b="0" i="0">
@@ -5103,7 +5341,7 @@
                 </a:solidFill>
                 <a:latin typeface="Avenir Next"/>
               </a:rPr>
-              <a:t>Focal loss reshapes the loss so easy, confident cases stop dominating: FL = (1−p)²·(−ln p). Read the CURVE: γ = 0 is plain cross-entropy; raising γ collapses the confident right-hand side and barely touches p = 0.50. Easy p = 0.90 → 0.001 (DOWN ~100×); hard p = 0.50 → 0.173 (barely moved) — so breakpoint MICs and low-biomass spectra count 165× the easy ones, not 6.6×.</a:t>
+              <a:t>SMOTE fills in the rare class by INTERPOLATING between two real minority points: synthetic = A + λ·(B−A). Do-it-together with two m/z-bin intensities, A = (2, 6) and B = (4, 10), λ = 0.5 → (3, 8). Now the same three points AS SPECTRA (right): the blend carries A's private peak at m/z 4,100 and B's at m/z 6,800 at HALF height — two ghost peaks no real isolate has. That is the caveat, drawn.</a:t>
             </a:r>
           </a:p>
         </p:txBody>
@@ -5117,7 +5355,7 @@
 </file>
 
 <file path=ppt/slides/slide19.xml><?xml version="1.0" encoding="utf-8"?>
-<p:sld xmlns:a="http://schemas.openxmlformats.org/drawingml/2006/main" xmlns:r="http://schemas.openxmlformats.org/officeDocument/2006/relationships" xmlns:p="http://schemas.openxmlformats.org/presentationml/2006/main">
+<p:sld xmlns:a="http://schemas.openxmlformats.org/drawingml/2006/main" xmlns:p="http://schemas.openxmlformats.org/presentationml/2006/main" xmlns:r="http://schemas.openxmlformats.org/officeDocument/2006/relationships">
   <p:cSld>
     <p:spTree>
       <p:nvGrpSpPr>
@@ -5125,14 +5363,7 @@
         <p:cNvGrpSpPr/>
         <p:nvPr/>
       </p:nvGrpSpPr>
-      <p:grpSpPr>
-        <a:xfrm>
-          <a:off x="0" y="0"/>
-          <a:ext cx="0" cy="0"/>
-          <a:chOff x="0" y="0"/>
-          <a:chExt cx="0" cy="0"/>
-        </a:xfrm>
-      </p:grpSpPr>
+      <p:grpSpPr/>
       <p:sp>
         <p:nvSpPr>
           <p:cNvPr id="2" name="Rectangle 1"/>
@@ -5207,7 +5438,7 @@
                 </a:solidFill>
                 <a:latin typeface="Menlo"/>
               </a:rPr>
-              <a:t>PART B · 6 · CURRICULUM LEARNING · THE SCHEDULE</a:t>
+              <a:t>PART B · 4 · SMOTE · YOUR TURN (YOU-DO = Q4)</a:t>
             </a:r>
           </a:p>
         </p:txBody>
@@ -5241,35 +5472,11 @@
                 </a:solidFill>
                 <a:latin typeface="Avenir Next"/>
               </a:rPr>
-              <a:t>Curriculum: the training diet as a schedule</a:t>
-            </a:r>
-          </a:p>
-        </p:txBody>
-      </p:sp>
-      <p:pic>
-        <p:nvPicPr>
-          <p:cNvPr id="7" name="Picture 4" descr="fig_curriculum.png"/>
-          <p:cNvPicPr>
-            <a:picLocks noChangeAspect="1"/>
-          </p:cNvPicPr>
-          <p:nvPr/>
-        </p:nvPicPr>
-        <p:blipFill>
-          <a:blip r:embed="rId3"/>
-          <a:stretch>
-            <a:fillRect/>
-          </a:stretch>
-        </p:blipFill>
-        <p:spPr>
-          <a:xfrm>
-            <a:off x="2389308" y="1828800"/>
-            <a:ext cx="7413078" cy="3320000"/>
-          </a:xfrm>
-          <a:prstGeom prst="rect">
-            <a:avLst/>
-          </a:prstGeom>
-        </p:spPr>
-      </p:pic>
+              <a:t>Your turn — make one SMOTE point</a:t>
+            </a:r>
+          </a:p>
+        </p:txBody>
+      </p:sp>
       <p:sp>
         <p:nvSpPr>
           <p:cNvPr id="6" name="Rectangle 5"/>
@@ -5278,8 +5485,8 @@
         </p:nvSpPr>
         <p:spPr>
           <a:xfrm>
-            <a:off x="548640" y="5279137"/>
-            <a:ext cx="10515600" cy="1441703"/>
+            <a:off x="548640" y="5538216"/>
+            <a:ext cx="10515600" cy="1182624"/>
           </a:xfrm>
           <a:prstGeom prst="rect">
             <a:avLst/>
@@ -5289,7 +5496,7 @@
           </a:solidFill>
           <a:ln w="12700">
             <a:solidFill>
-              <a:srgbClr val="3D444C"/>
+              <a:srgbClr val="E09E2F"/>
             </a:solidFill>
           </a:ln>
           <a:effectLst/>
@@ -5316,20 +5523,233 @@
             <a:r>
               <a:rPr sz="1200" b="1" i="0">
                 <a:solidFill>
+                  <a:srgbClr val="E09E2F"/>
+                </a:solidFill>
+                <a:latin typeface="Menlo"/>
+              </a:rPr>
+              <a:t>CHECKPOINT · </a:t>
+            </a:r>
+            <a:r>
+              <a:rPr sz="1700" b="0" i="0">
+                <a:solidFill>
+                  <a:srgbClr val="3D444C"/>
+                </a:solidFill>
+                <a:latin typeface="Avenir Next"/>
+              </a:rPr>
+              <a:t>Your turn → Quiz 10, Q4. Same formula, new numbers: A = (2, 6), B = (4, 10), λ = 0.25. (a) Compute the synthetic point. (b) Why is raw-spectrum SMOTE risky in 6,000 dimensions? Worked answer in the notes.</a:t>
+            </a:r>
+          </a:p>
+        </p:txBody>
+      </p:sp>
+      <p:sp>
+        <p:nvSpPr>
+          <p:cNvPr id="7" name="Rounded Rectangle 6"/>
+          <p:cNvSpPr/>
+          <p:nvPr/>
+        </p:nvSpPr>
+        <p:spPr>
+          <a:xfrm>
+            <a:off x="2048640" y="1888800"/>
+            <a:ext cx="7515600" cy="620000"/>
+          </a:xfrm>
+          <a:prstGeom prst="roundRect">
+            <a:avLst>
+              <a:gd name="adj" fmla="val 8000"/>
+            </a:avLst>
+          </a:prstGeom>
+          <a:solidFill>
+            <a:srgbClr val="E3F0EF"/>
+          </a:solidFill>
+          <a:ln>
+            <a:noFill/>
+          </a:ln>
+          <a:effectLst/>
+        </p:spPr>
+        <p:style>
+          <a:lnRef idx="1">
+            <a:schemeClr val="accent1"/>
+          </a:lnRef>
+          <a:fillRef idx="3">
+            <a:schemeClr val="accent1"/>
+          </a:fillRef>
+          <a:effectRef idx="2">
+            <a:schemeClr val="accent1"/>
+          </a:effectRef>
+          <a:fontRef idx="minor">
+            <a:schemeClr val="lt1"/>
+          </a:fontRef>
+        </p:style>
+        <p:txBody>
+          <a:bodyPr rtlCol="0" anchor="ctr"/>
+          <a:lstStyle/>
+          <a:p/>
+        </p:txBody>
+      </p:sp>
+      <p:sp>
+        <p:nvSpPr>
+          <p:cNvPr id="8" name="TextBox 7"/>
+          <p:cNvSpPr txBox="1"/>
+          <p:nvPr/>
+        </p:nvSpPr>
+        <p:spPr>
+          <a:xfrm>
+            <a:off x="2048640" y="1888800"/>
+            <a:ext cx="7515600" cy="620000"/>
+          </a:xfrm>
+          <a:prstGeom prst="rect">
+            <a:avLst/>
+          </a:prstGeom>
+          <a:noFill/>
+        </p:spPr>
+        <p:txBody>
+          <a:bodyPr wrap="square" lIns="45720" rIns="45720" tIns="27432" bIns="27432" anchor="ctr">
+            <a:spAutoFit/>
+          </a:bodyPr>
+          <a:lstStyle/>
+          <a:p>
+            <a:pPr algn="ctr">
+              <a:spcAft>
+                <a:spcPts val="400"/>
+              </a:spcAft>
+            </a:pPr>
+            <a:r>
+              <a:rPr sz="2000" b="1">
+                <a:solidFill>
                   <a:srgbClr val="0E7C7B"/>
                 </a:solidFill>
                 <a:latin typeface="Menlo"/>
               </a:rPr>
-              <a:t>MASS SPEC · </a:t>
-            </a:r>
-            <a:r>
-              <a:rPr sz="1700" b="0" i="0">
-                <a:solidFill>
-                  <a:srgbClr val="3D444C"/>
-                </a:solidFill>
-                <a:latin typeface="Avenir Next"/>
-              </a:rPr>
-              <a:t>Don’t feed the model the full, lopsided mix from day one — write a SCHEDULE. Left, over 20 epochs: the sampler anneals from 50% resistant per batch (class-balanced) down to the true 6%, while the hard cases — low-biomass runs, MICs on the breakpoint — are admitted from 0% to 100%. Right: the curriculum run climbs steadily where the shuffled run lurches. Same 41 resistant spectra in both.</a:t>
+              <a:t>synthetic  =  A  +  λ · (B − A)</a:t>
+            </a:r>
+          </a:p>
+        </p:txBody>
+      </p:sp>
+      <p:sp>
+        <p:nvSpPr>
+          <p:cNvPr id="9" name="TextBox 8"/>
+          <p:cNvSpPr txBox="1"/>
+          <p:nvPr/>
+        </p:nvSpPr>
+        <p:spPr>
+          <a:xfrm>
+            <a:off x="548640" y="2648800"/>
+            <a:ext cx="10515600" cy="520000"/>
+          </a:xfrm>
+          <a:prstGeom prst="rect">
+            <a:avLst/>
+          </a:prstGeom>
+          <a:noFill/>
+        </p:spPr>
+        <p:txBody>
+          <a:bodyPr wrap="square" lIns="45720" rIns="45720" tIns="27432" bIns="27432" anchor="t">
+            <a:spAutoFit/>
+          </a:bodyPr>
+          <a:lstStyle/>
+          <a:p>
+            <a:pPr algn="ctr">
+              <a:spcAft>
+                <a:spcPts val="400"/>
+              </a:spcAft>
+            </a:pPr>
+            <a:r>
+              <a:rPr sz="1600" b="0">
+                <a:solidFill>
+                  <a:srgbClr val="1B2025"/>
+                </a:solidFill>
+                <a:latin typeface="Avenir Next"/>
+              </a:rPr>
+              <a:t>Two real minority points:   </a:t>
+            </a:r>
+            <a:r>
+              <a:rPr sz="1600" b="1">
+                <a:solidFill>
+                  <a:srgbClr val="1B2025"/>
+                </a:solidFill>
+                <a:latin typeface="Menlo"/>
+              </a:rPr>
+              <a:t>A = (2, 6)   B = (4, 10)   λ = 0.25</a:t>
+            </a:r>
+          </a:p>
+        </p:txBody>
+      </p:sp>
+      <p:sp>
+        <p:nvSpPr>
+          <p:cNvPr id="10" name="TextBox 9"/>
+          <p:cNvSpPr txBox="1"/>
+          <p:nvPr/>
+        </p:nvSpPr>
+        <p:spPr>
+          <a:xfrm>
+            <a:off x="548640" y="3288800"/>
+            <a:ext cx="10515600" cy="1900000"/>
+          </a:xfrm>
+          <a:prstGeom prst="rect">
+            <a:avLst/>
+          </a:prstGeom>
+          <a:noFill/>
+        </p:spPr>
+        <p:txBody>
+          <a:bodyPr wrap="square" lIns="45720" rIns="45720" tIns="27432" bIns="27432" anchor="t">
+            <a:spAutoFit/>
+          </a:bodyPr>
+          <a:lstStyle/>
+          <a:p>
+            <a:pPr algn="l">
+              <a:spcAft>
+                <a:spcPts val="1000"/>
+              </a:spcAft>
+            </a:pPr>
+            <a:r>
+              <a:rPr sz="1700" b="1">
+                <a:solidFill>
+                  <a:srgbClr val="0E7C7B"/>
+                </a:solidFill>
+                <a:latin typeface="Avenir Next"/>
+              </a:rPr>
+              <a:t>(a)  </a:t>
+            </a:r>
+            <a:r>
+              <a:rPr sz="1700" b="0">
+                <a:solidFill>
+                  <a:srgbClr val="1B2025"/>
+                </a:solidFill>
+                <a:latin typeface="Avenir Next"/>
+              </a:rPr>
+              <a:t>synthetic = ( 2 + 0.25·(4 − 2),  6 + 0.25·(10 − 6) ) =</a:t>
+            </a:r>
+            <a:r>
+              <a:rPr sz="1700" b="1">
+                <a:solidFill>
+                  <a:srgbClr val="0E7C7B"/>
+                </a:solidFill>
+                <a:latin typeface="Avenir Next"/>
+              </a:rPr>
+              <a:t>  ________</a:t>
+            </a:r>
+          </a:p>
+          <a:p>
+            <a:pPr algn="l">
+              <a:spcAft>
+                <a:spcPts val="1000"/>
+              </a:spcAft>
+            </a:pPr>
+            <a:r>
+              <a:rPr sz="1700" b="1">
+                <a:solidFill>
+                  <a:srgbClr val="0E7C7B"/>
+                </a:solidFill>
+                <a:latin typeface="Avenir Next"/>
+              </a:rPr>
+              <a:t>(b)  </a:t>
+            </a:r>
+            <a:r>
+              <a:rPr sz="1700" b="0">
+                <a:solidFill>
+                  <a:srgbClr val="1B2025"/>
+                </a:solidFill>
+                <a:latin typeface="Avenir Next"/>
+              </a:rPr>
+              <a:t>One sentence: why is raw-spectrum SMOTE risky in 6,000 dimensions?</a:t>
             </a:r>
           </a:p>
         </p:txBody>
@@ -5764,7 +6184,7 @@
                 </a:solidFill>
                 <a:latin typeface="Menlo"/>
               </a:rPr>
-              <a:t>LECTURE 10 · WHAT YOU CAN DO NOW</a:t>
+              <a:t>PART B · 5 · FOCAL LOSS · I-DO</a:t>
             </a:r>
           </a:p>
         </p:txBody>
@@ -5778,7 +6198,7 @@
         <p:spPr>
           <a:xfrm>
             <a:off x="548640" y="731520"/>
-            <a:ext cx="11064240" cy="1005840"/>
+            <a:ext cx="11064240" cy="1127760"/>
           </a:xfrm>
           <a:prstGeom prst="rect">
             <a:avLst/>
@@ -5798,134 +6218,35 @@
                 </a:solidFill>
                 <a:latin typeface="Avenir Next"/>
               </a:rPr>
-              <a:t>You can now…</a:t>
-            </a:r>
-          </a:p>
-        </p:txBody>
-      </p:sp>
-      <p:sp>
-        <p:nvSpPr>
-          <p:cNvPr id="5" name="TextBox 4"/>
-          <p:cNvSpPr txBox="1"/>
-          <p:nvPr/>
-        </p:nvSpPr>
-        <p:spPr>
-          <a:xfrm>
-            <a:off x="548640" y="1920240"/>
-            <a:ext cx="10789920" cy="3809999"/>
-          </a:xfrm>
-          <a:prstGeom prst="rect">
-            <a:avLst/>
-          </a:prstGeom>
-          <a:noFill/>
-        </p:spPr>
-        <p:txBody>
-          <a:bodyPr wrap="square" anchor="t">
-            <a:spAutoFit/>
-          </a:bodyPr>
-          <a:lstStyle/>
-          <a:p>
-            <a:pPr>
-              <a:spcAft>
-                <a:spcPts val="1800"/>
-              </a:spcAft>
-            </a:pPr>
-            <a:r>
-              <a:rPr sz="2300" b="1" i="0" dirty="0">
-                <a:solidFill>
-                  <a:srgbClr val="0E7C7B"/>
-                </a:solidFill>
-                <a:latin typeface="Avenir Next"/>
-              </a:rPr>
-              <a:t>•  </a:t>
-            </a:r>
-            <a:r>
-              <a:rPr sz="2300" b="0" i="0" dirty="0">
-                <a:solidFill>
-                  <a:srgbClr val="1B2025"/>
-                </a:solidFill>
-                <a:latin typeface="Avenir Next"/>
-              </a:rPr>
-              <a:t>Compute precision, recall (sensitivity), and specificity by hand — and say why accuracy lies under imbalance</a:t>
-            </a:r>
-          </a:p>
-          <a:p>
-            <a:pPr>
-              <a:spcAft>
-                <a:spcPts val="1800"/>
-              </a:spcAft>
-            </a:pPr>
-            <a:r>
-              <a:rPr sz="2300" b="1" i="0" dirty="0">
-                <a:solidFill>
-                  <a:srgbClr val="0E7C7B"/>
-                </a:solidFill>
-                <a:latin typeface="Avenir Next"/>
-              </a:rPr>
-              <a:t>•  </a:t>
-            </a:r>
-            <a:r>
-              <a:rPr sz="2300" b="0" i="0" dirty="0">
-                <a:solidFill>
-                  <a:srgbClr val="1B2025"/>
-                </a:solidFill>
-                <a:latin typeface="Avenir Next"/>
-              </a:rPr>
-              <a:t>Build an ROC and a PR curve from a threshold sweep — report AUPRC, whose baseline is the prevalence</a:t>
-            </a:r>
-          </a:p>
-          <a:p>
-            <a:pPr>
-              <a:spcAft>
-                <a:spcPts val="1800"/>
-              </a:spcAft>
-            </a:pPr>
-            <a:r>
-              <a:rPr sz="2300" b="1" i="0" dirty="0">
-                <a:solidFill>
-                  <a:srgbClr val="0E7C7B"/>
-                </a:solidFill>
-                <a:latin typeface="Avenir Next"/>
-              </a:rPr>
-              <a:t>•  </a:t>
-            </a:r>
-            <a:r>
-              <a:rPr sz="2300" b="0" i="0" dirty="0">
-                <a:solidFill>
-                  <a:srgbClr val="1B2025"/>
-                </a:solidFill>
-                <a:latin typeface="Avenir Next"/>
-              </a:rPr>
-              <a:t>Demand external + temporal validation — a metric is only valid on the distribution you tested</a:t>
-            </a:r>
-          </a:p>
-          <a:p>
-            <a:pPr>
-              <a:spcAft>
-                <a:spcPts val="1800"/>
-              </a:spcAft>
-            </a:pPr>
-            <a:r>
-              <a:rPr sz="2300" b="1" i="0" dirty="0">
-                <a:solidFill>
-                  <a:srgbClr val="0E7C7B"/>
-                </a:solidFill>
-                <a:latin typeface="Avenir Next"/>
-              </a:rPr>
-              <a:t>•  </a:t>
-            </a:r>
-            <a:r>
-              <a:rPr sz="2300" b="0" i="0" dirty="0">
-                <a:solidFill>
-                  <a:srgbClr val="1B2025"/>
-                </a:solidFill>
-                <a:latin typeface="Avenir Next"/>
-              </a:rPr>
-              <a:t>Treat imbalance with curation, SMOTE, class weights / focal loss, and curriculum — knowing none adds new signal</a:t>
-            </a:r>
-          </a:p>
-        </p:txBody>
-      </p:sp>
+              <a:t>Focal loss: turn the volume up on the hard cases</a:t>
+            </a:r>
+          </a:p>
+        </p:txBody>
+      </p:sp>
+      <p:pic>
+        <p:nvPicPr>
+          <p:cNvPr id="7" name="Picture 4" descr="fig_focal_volume.png"/>
+          <p:cNvPicPr>
+            <a:picLocks noChangeAspect="1"/>
+          </p:cNvPicPr>
+          <p:nvPr/>
+        </p:nvPicPr>
+        <p:blipFill>
+          <a:blip r:embed="rId3"/>
+          <a:stretch>
+            <a:fillRect/>
+          </a:stretch>
+        </p:blipFill>
+        <p:spPr>
+          <a:xfrm>
+            <a:off x="2481539" y="1828800"/>
+            <a:ext cx="7228615" cy="3320000"/>
+          </a:xfrm>
+          <a:prstGeom prst="rect">
+            <a:avLst/>
+          </a:prstGeom>
+        </p:spPr>
+      </p:pic>
       <p:sp>
         <p:nvSpPr>
           <p:cNvPr id="6" name="Rectangle 5"/>
@@ -5934,18 +6255,18 @@
         </p:nvSpPr>
         <p:spPr>
           <a:xfrm>
-            <a:off x="548640" y="5843016"/>
-            <a:ext cx="10515600" cy="923544"/>
+            <a:off x="548640" y="5279137"/>
+            <a:ext cx="10515600" cy="1441703"/>
           </a:xfrm>
           <a:prstGeom prst="rect">
             <a:avLst/>
           </a:prstGeom>
           <a:solidFill>
-            <a:srgbClr val="F1F1EC"/>
+            <a:srgbClr val="E3F0EF"/>
           </a:solidFill>
           <a:ln w="12700">
             <a:solidFill>
-              <a:srgbClr val="3D444C"/>
+              <a:srgbClr val="0E7C7B"/>
             </a:solidFill>
           </a:ln>
           <a:effectLst/>
@@ -5970,13 +6291,22 @@
           <a:p>
             <a:pPr algn="ctr"/>
             <a:r>
+              <a:rPr sz="1200" b="1" i="0">
+                <a:solidFill>
+                  <a:srgbClr val="0E7C7B"/>
+                </a:solidFill>
+                <a:latin typeface="Menlo"/>
+              </a:rPr>
+              <a:t>MASS SPEC · </a:t>
+            </a:r>
+            <a:r>
               <a:rPr sz="1700" b="0" i="0">
                 <a:solidFill>
                   <a:srgbClr val="3D444C"/>
                 </a:solidFill>
                 <a:latin typeface="Avenir Next"/>
               </a:rPr>
-              <a:t>You have worked the whole of Quiz 10 live — the three rates (Q1), AUROC vs. AUPRC (Q2), the treatment match (Q3), and a SMOTE point (Q4). Keep the sheet; it's your checklist for any rare-class assay in your own lab.</a:t>
+              <a:t>Focal loss reshapes the loss so easy, confident cases stop dominating: FL = (1−p)²·(−ln p). Read the CURVE: γ = 0 is plain cross-entropy; raising γ collapses the confident right-hand side and barely touches p = 0.50. Easy p = 0.90 → 0.001 (DOWN ~100×); hard p = 0.50 → 0.173 (barely moved) — so breakpoint MICs and low-biomass spectra count 165× the easy ones, not 6.6×.</a:t>
             </a:r>
           </a:p>
         </p:txBody>
@@ -6080,7 +6410,7 @@
                 </a:solidFill>
                 <a:latin typeface="Menlo"/>
               </a:rPr>
-              <a:t>LECTURE 10 · OVER TO YOUR LAB · DISCUSSION</a:t>
+              <a:t>PART B · 6 · CURRICULUM LEARNING · THE SCHEDULE</a:t>
             </a:r>
           </a:p>
         </p:txBody>
@@ -6094,7 +6424,7 @@
         <p:spPr>
           <a:xfrm>
             <a:off x="548640" y="731520"/>
-            <a:ext cx="11064240" cy="1127760"/>
+            <a:ext cx="11064240" cy="1005840"/>
           </a:xfrm>
           <a:prstGeom prst="rect">
             <a:avLst/>
@@ -6114,134 +6444,35 @@
                 </a:solidFill>
                 <a:latin typeface="Avenir Next"/>
               </a:rPr>
-              <a:t>Next — learning without labels (Lecture 11 + Lab 4)</a:t>
-            </a:r>
-          </a:p>
-        </p:txBody>
-      </p:sp>
-      <p:sp>
-        <p:nvSpPr>
-          <p:cNvPr id="5" name="TextBox 4"/>
-          <p:cNvSpPr txBox="1"/>
-          <p:nvPr/>
-        </p:nvSpPr>
-        <p:spPr>
-          <a:xfrm>
-            <a:off x="548640" y="1920240"/>
-            <a:ext cx="10789920" cy="3566159"/>
-          </a:xfrm>
-          <a:prstGeom prst="rect">
-            <a:avLst/>
-          </a:prstGeom>
-          <a:noFill/>
-        </p:spPr>
-        <p:txBody>
-          <a:bodyPr wrap="square" anchor="t">
-            <a:spAutoFit/>
-          </a:bodyPr>
-          <a:lstStyle/>
-          <a:p>
-            <a:pPr>
-              <a:spcAft>
-                <a:spcPts val="1800"/>
-              </a:spcAft>
-            </a:pPr>
-            <a:r>
-              <a:rPr sz="2100" b="1" i="0">
-                <a:solidFill>
-                  <a:srgbClr val="0E7C7B"/>
-                </a:solidFill>
-                <a:latin typeface="Avenir Next"/>
-              </a:rPr>
-              <a:t>•  </a:t>
-            </a:r>
-            <a:r>
-              <a:rPr sz="2100" b="0" i="0">
-                <a:solidFill>
-                  <a:srgbClr val="1B2025"/>
-                </a:solidFill>
-                <a:latin typeface="Avenir Next"/>
-              </a:rPr>
-              <a:t>Most lab data is UNLABELED — Lecture 11 asks what you can learn without labels</a:t>
-            </a:r>
-          </a:p>
-          <a:p>
-            <a:pPr>
-              <a:spcAft>
-                <a:spcPts val="1800"/>
-              </a:spcAft>
-            </a:pPr>
-            <a:r>
-              <a:rPr sz="2100" b="1" i="0">
-                <a:solidFill>
-                  <a:srgbClr val="0E7C7B"/>
-                </a:solidFill>
-                <a:latin typeface="Avenir Next"/>
-              </a:rPr>
-              <a:t>•  </a:t>
-            </a:r>
-            <a:r>
-              <a:rPr sz="2100" b="0" i="0">
-                <a:solidFill>
-                  <a:srgbClr val="1B2025"/>
-                </a:solidFill>
-                <a:latin typeface="Avenir Next"/>
-              </a:rPr>
-              <a:t>Autoencoders &amp; VAEs: reconstruction error as an anomaly/QC score — a precision/recall threshold, straight back to today</a:t>
-            </a:r>
-          </a:p>
-          <a:p>
-            <a:pPr>
-              <a:spcAft>
-                <a:spcPts val="1800"/>
-              </a:spcAft>
-            </a:pPr>
-            <a:r>
-              <a:rPr sz="2100" b="1" i="0">
-                <a:solidFill>
-                  <a:srgbClr val="0E7C7B"/>
-                </a:solidFill>
-                <a:latin typeface="Avenir Next"/>
-              </a:rPr>
-              <a:t>•  </a:t>
-            </a:r>
-            <a:r>
-              <a:rPr sz="2100" b="0" i="0">
-                <a:solidFill>
-                  <a:srgbClr val="1B2025"/>
-                </a:solidFill>
-                <a:latin typeface="Avenir Next"/>
-              </a:rPr>
-              <a:t>Lab 4 trains a VAE on normal spectra and flags anomalies — your metrics knowledge picks the threshold</a:t>
-            </a:r>
-          </a:p>
-          <a:p>
-            <a:pPr>
-              <a:spcAft>
-                <a:spcPts val="1800"/>
-              </a:spcAft>
-            </a:pPr>
-            <a:r>
-              <a:rPr sz="2100" b="1" i="0">
-                <a:solidFill>
-                  <a:srgbClr val="0E7C7B"/>
-                </a:solidFill>
-                <a:latin typeface="Avenir Next"/>
-              </a:rPr>
-              <a:t>•  </a:t>
-            </a:r>
-            <a:r>
-              <a:rPr sz="2100" b="0" i="0">
-                <a:solidFill>
-                  <a:srgbClr val="1B2025"/>
-                </a:solidFill>
-                <a:latin typeface="Avenir Next"/>
-              </a:rPr>
-              <a:t>💬 Discussion D4: what does 'abnormal' look like in YOUR instrument's output, and would reconstruction error catch it before a human does?</a:t>
-            </a:r>
-          </a:p>
-        </p:txBody>
-      </p:sp>
+              <a:t>Curriculum: the training diet as a schedule</a:t>
+            </a:r>
+          </a:p>
+        </p:txBody>
+      </p:sp>
+      <p:pic>
+        <p:nvPicPr>
+          <p:cNvPr id="7" name="Picture 4" descr="fig_curriculum.png"/>
+          <p:cNvPicPr>
+            <a:picLocks noChangeAspect="1"/>
+          </p:cNvPicPr>
+          <p:nvPr/>
+        </p:nvPicPr>
+        <p:blipFill>
+          <a:blip r:embed="rId3"/>
+          <a:stretch>
+            <a:fillRect/>
+          </a:stretch>
+        </p:blipFill>
+        <p:spPr>
+          <a:xfrm>
+            <a:off x="2389308" y="1828800"/>
+            <a:ext cx="7413078" cy="3320000"/>
+          </a:xfrm>
+          <a:prstGeom prst="rect">
+            <a:avLst/>
+          </a:prstGeom>
+        </p:spPr>
+      </p:pic>
       <p:sp>
         <p:nvSpPr>
           <p:cNvPr id="6" name="Rectangle 5"/>
@@ -6250,8 +6481,8 @@
         </p:nvSpPr>
         <p:spPr>
           <a:xfrm>
-            <a:off x="548640" y="5623559"/>
-            <a:ext cx="10515600" cy="923544"/>
+            <a:off x="548640" y="5279137"/>
+            <a:ext cx="10515600" cy="1441703"/>
           </a:xfrm>
           <a:prstGeom prst="rect">
             <a:avLst/>
@@ -6261,7 +6492,7 @@
           </a:solidFill>
           <a:ln w="12700">
             <a:solidFill>
-              <a:srgbClr val="E09E2F"/>
+              <a:srgbClr val="3D444C"/>
             </a:solidFill>
           </a:ln>
           <a:effectLst/>
@@ -6288,11 +6519,11 @@
             <a:r>
               <a:rPr sz="1200" b="1" i="0">
                 <a:solidFill>
-                  <a:srgbClr val="E09E2F"/>
+                  <a:srgbClr val="0E7C7B"/>
                 </a:solidFill>
                 <a:latin typeface="Menlo"/>
               </a:rPr>
-              <a:t>PAIR · </a:t>
+              <a:t>MASS SPEC · </a:t>
             </a:r>
             <a:r>
               <a:rPr sz="1700" b="0" i="0">
@@ -6301,7 +6532,7 @@
                 </a:solidFill>
                 <a:latin typeface="Avenir Next"/>
               </a:rPr>
-              <a:t>💬 Discussion D4: name one place in your workflow where a rare event hides in a majority-normal stream — and which metric, not accuracy, would tell you if a model caught it.</a:t>
+              <a:t>Don’t feed the model the full, lopsided mix from day one — write a SCHEDULE. Left, over 20 epochs: the sampler anneals from 50% resistant per batch (class-balanced) down to the true 6%, while the hard cases — low-biomass runs, MICs on the breakpoint — are admitted from 0% to 100%. Right: the curriculum run climbs steadily where the shuffled run lurches. Same 41 resistant spectra in both.</a:t>
             </a:r>
           </a:p>
         </p:txBody>
@@ -6953,7 +7184,7 @@
 </file>
 
 <file path=ppt/slides/slide23.xml><?xml version="1.0" encoding="utf-8"?>
-<p:sld xmlns:a="http://schemas.openxmlformats.org/drawingml/2006/main" xmlns:p="http://schemas.openxmlformats.org/presentationml/2006/main" xmlns:r="http://schemas.openxmlformats.org/officeDocument/2006/relationships">
+<p:sld xmlns:a="http://schemas.openxmlformats.org/drawingml/2006/main" xmlns:r="http://schemas.openxmlformats.org/officeDocument/2006/relationships" xmlns:p="http://schemas.openxmlformats.org/presentationml/2006/main">
   <p:cSld>
     <p:spTree>
       <p:nvGrpSpPr>
@@ -6961,7 +7192,14 @@
         <p:cNvGrpSpPr/>
         <p:nvPr/>
       </p:nvGrpSpPr>
-      <p:grpSpPr/>
+      <p:grpSpPr>
+        <a:xfrm>
+          <a:off x="0" y="0"/>
+          <a:ext cx="0" cy="0"/>
+          <a:chOff x="0" y="0"/>
+          <a:chExt cx="0" cy="0"/>
+        </a:xfrm>
+      </p:grpSpPr>
       <p:sp>
         <p:nvSpPr>
           <p:cNvPr id="2" name="Rectangle 1"/>
@@ -7036,7 +7274,7 @@
                 </a:solidFill>
                 <a:latin typeface="Menlo"/>
               </a:rPr>
-              <a:t>PART B · 4 · SMOTE · YOUR TURN (YOU-DO = Q4)</a:t>
+              <a:t>LECTURE 10 · WHAT YOU CAN DO NOW</a:t>
             </a:r>
           </a:p>
         </p:txBody>
@@ -7070,7 +7308,130 @@
                 </a:solidFill>
                 <a:latin typeface="Avenir Next"/>
               </a:rPr>
-              <a:t>Your turn — make one SMOTE point</a:t>
+              <a:t>You can now…</a:t>
+            </a:r>
+          </a:p>
+        </p:txBody>
+      </p:sp>
+      <p:sp>
+        <p:nvSpPr>
+          <p:cNvPr id="5" name="TextBox 4"/>
+          <p:cNvSpPr txBox="1"/>
+          <p:nvPr/>
+        </p:nvSpPr>
+        <p:spPr>
+          <a:xfrm>
+            <a:off x="548640" y="1920240"/>
+            <a:ext cx="10789920" cy="3809999"/>
+          </a:xfrm>
+          <a:prstGeom prst="rect">
+            <a:avLst/>
+          </a:prstGeom>
+          <a:noFill/>
+        </p:spPr>
+        <p:txBody>
+          <a:bodyPr wrap="square" anchor="t">
+            <a:spAutoFit/>
+          </a:bodyPr>
+          <a:lstStyle/>
+          <a:p>
+            <a:pPr>
+              <a:spcAft>
+                <a:spcPts val="1800"/>
+              </a:spcAft>
+            </a:pPr>
+            <a:r>
+              <a:rPr sz="2300" b="1" i="0" dirty="0">
+                <a:solidFill>
+                  <a:srgbClr val="0E7C7B"/>
+                </a:solidFill>
+                <a:latin typeface="Avenir Next"/>
+              </a:rPr>
+              <a:t>•  </a:t>
+            </a:r>
+            <a:r>
+              <a:rPr sz="2300" b="0" i="0" dirty="0">
+                <a:solidFill>
+                  <a:srgbClr val="1B2025"/>
+                </a:solidFill>
+                <a:latin typeface="Avenir Next"/>
+              </a:rPr>
+              <a:t>Compute precision, recall (sensitivity), and specificity by hand — and say why accuracy lies under imbalance</a:t>
+            </a:r>
+          </a:p>
+          <a:p>
+            <a:pPr>
+              <a:spcAft>
+                <a:spcPts val="1800"/>
+              </a:spcAft>
+            </a:pPr>
+            <a:r>
+              <a:rPr sz="2300" b="1" i="0" dirty="0">
+                <a:solidFill>
+                  <a:srgbClr val="0E7C7B"/>
+                </a:solidFill>
+                <a:latin typeface="Avenir Next"/>
+              </a:rPr>
+              <a:t>•  </a:t>
+            </a:r>
+            <a:r>
+              <a:rPr sz="2300" b="0" i="0" dirty="0">
+                <a:solidFill>
+                  <a:srgbClr val="1B2025"/>
+                </a:solidFill>
+                <a:latin typeface="Avenir Next"/>
+              </a:rPr>
+              <a:t>Build an ROC and a PR curve from a threshold sweep — report AUPRC, whose baseline is the prevalence</a:t>
+            </a:r>
+          </a:p>
+          <a:p>
+            <a:pPr>
+              <a:spcAft>
+                <a:spcPts val="1800"/>
+              </a:spcAft>
+            </a:pPr>
+            <a:r>
+              <a:rPr sz="2300" b="1" i="0" dirty="0">
+                <a:solidFill>
+                  <a:srgbClr val="0E7C7B"/>
+                </a:solidFill>
+                <a:latin typeface="Avenir Next"/>
+              </a:rPr>
+              <a:t>•  </a:t>
+            </a:r>
+            <a:r>
+              <a:rPr sz="2300" b="0" i="0" dirty="0">
+                <a:solidFill>
+                  <a:srgbClr val="1B2025"/>
+                </a:solidFill>
+                <a:latin typeface="Avenir Next"/>
+              </a:rPr>
+              <a:t>Demand external + temporal validation — a metric is only valid on the distribution you tested</a:t>
+            </a:r>
+          </a:p>
+          <a:p>
+            <a:pPr>
+              <a:spcAft>
+                <a:spcPts val="1800"/>
+              </a:spcAft>
+            </a:pPr>
+            <a:r>
+              <a:rPr sz="2300" b="1" i="0" dirty="0">
+                <a:solidFill>
+                  <a:srgbClr val="0E7C7B"/>
+                </a:solidFill>
+                <a:latin typeface="Avenir Next"/>
+              </a:rPr>
+              <a:t>•  </a:t>
+            </a:r>
+            <a:r>
+              <a:rPr sz="2300" b="0" i="0" dirty="0">
+                <a:solidFill>
+                  <a:srgbClr val="1B2025"/>
+                </a:solidFill>
+                <a:latin typeface="Avenir Next"/>
+              </a:rPr>
+              <a:t>Treat imbalance with curation, SMOTE, class weights / focal loss, and curriculum — knowing none adds new signal</a:t>
             </a:r>
           </a:p>
         </p:txBody>
@@ -7083,8 +7444,324 @@
         </p:nvSpPr>
         <p:spPr>
           <a:xfrm>
-            <a:off x="548640" y="5538216"/>
-            <a:ext cx="10515600" cy="1182624"/>
+            <a:off x="548640" y="5843016"/>
+            <a:ext cx="10515600" cy="923544"/>
+          </a:xfrm>
+          <a:prstGeom prst="rect">
+            <a:avLst/>
+          </a:prstGeom>
+          <a:solidFill>
+            <a:srgbClr val="F1F1EC"/>
+          </a:solidFill>
+          <a:ln w="12700">
+            <a:solidFill>
+              <a:srgbClr val="3D444C"/>
+            </a:solidFill>
+          </a:ln>
+          <a:effectLst/>
+        </p:spPr>
+        <p:style>
+          <a:lnRef idx="1">
+            <a:schemeClr val="accent1"/>
+          </a:lnRef>
+          <a:fillRef idx="3">
+            <a:schemeClr val="accent1"/>
+          </a:fillRef>
+          <a:effectRef idx="2">
+            <a:schemeClr val="accent1"/>
+          </a:effectRef>
+          <a:fontRef idx="minor">
+            <a:schemeClr val="lt1"/>
+          </a:fontRef>
+        </p:style>
+        <p:txBody>
+          <a:bodyPr wrap="square" lIns="182880" rIns="182880" rtlCol="0" anchor="ctr"/>
+          <a:lstStyle/>
+          <a:p>
+            <a:pPr algn="ctr"/>
+            <a:r>
+              <a:rPr sz="1700" b="0" i="0">
+                <a:solidFill>
+                  <a:srgbClr val="3D444C"/>
+                </a:solidFill>
+                <a:latin typeface="Avenir Next"/>
+              </a:rPr>
+              <a:t>You have worked the whole of Quiz 10 live — the three rates (Q1), AUROC vs. AUPRC (Q2), the treatment match (Q3), and a SMOTE point (Q4). Keep the sheet; it's your checklist for any rare-class assay in your own lab.</a:t>
+            </a:r>
+          </a:p>
+        </p:txBody>
+      </p:sp>
+    </p:spTree>
+  </p:cSld>
+  <p:clrMapOvr>
+    <a:masterClrMapping/>
+  </p:clrMapOvr>
+</p:sld>
+</file>
+
+<file path=ppt/slides/slide24.xml><?xml version="1.0" encoding="utf-8"?>
+<p:sld xmlns:a="http://schemas.openxmlformats.org/drawingml/2006/main" xmlns:r="http://schemas.openxmlformats.org/officeDocument/2006/relationships" xmlns:p="http://schemas.openxmlformats.org/presentationml/2006/main">
+  <p:cSld>
+    <p:spTree>
+      <p:nvGrpSpPr>
+        <p:cNvPr id="1" name=""/>
+        <p:cNvGrpSpPr/>
+        <p:nvPr/>
+      </p:nvGrpSpPr>
+      <p:grpSpPr>
+        <a:xfrm>
+          <a:off x="0" y="0"/>
+          <a:ext cx="0" cy="0"/>
+          <a:chOff x="0" y="0"/>
+          <a:chExt cx="0" cy="0"/>
+        </a:xfrm>
+      </p:grpSpPr>
+      <p:sp>
+        <p:nvSpPr>
+          <p:cNvPr id="2" name="Rectangle 1"/>
+          <p:cNvSpPr/>
+          <p:nvPr/>
+        </p:nvSpPr>
+        <p:spPr>
+          <a:xfrm>
+            <a:off x="0" y="0"/>
+            <a:ext cx="12191695" cy="6858000"/>
+          </a:xfrm>
+          <a:prstGeom prst="rect">
+            <a:avLst/>
+          </a:prstGeom>
+          <a:solidFill>
+            <a:srgbClr val="FBFBF8"/>
+          </a:solidFill>
+          <a:ln>
+            <a:noFill/>
+          </a:ln>
+          <a:effectLst/>
+        </p:spPr>
+        <p:style>
+          <a:lnRef idx="1">
+            <a:schemeClr val="accent1"/>
+          </a:lnRef>
+          <a:fillRef idx="3">
+            <a:schemeClr val="accent1"/>
+          </a:fillRef>
+          <a:effectRef idx="2">
+            <a:schemeClr val="accent1"/>
+          </a:effectRef>
+          <a:fontRef idx="minor">
+            <a:schemeClr val="lt1"/>
+          </a:fontRef>
+        </p:style>
+        <p:txBody>
+          <a:bodyPr rtlCol="0" anchor="ctr"/>
+          <a:lstStyle/>
+          <a:p>
+            <a:pPr algn="ctr"/>
+            <a:endParaRPr/>
+          </a:p>
+        </p:txBody>
+      </p:sp>
+      <p:sp>
+        <p:nvSpPr>
+          <p:cNvPr id="3" name="TextBox 2"/>
+          <p:cNvSpPr txBox="1"/>
+          <p:nvPr/>
+        </p:nvSpPr>
+        <p:spPr>
+          <a:xfrm>
+            <a:off x="548640" y="320040"/>
+            <a:ext cx="10972800" cy="365760"/>
+          </a:xfrm>
+          <a:prstGeom prst="rect">
+            <a:avLst/>
+          </a:prstGeom>
+          <a:noFill/>
+        </p:spPr>
+        <p:txBody>
+          <a:bodyPr wrap="square" anchor="t">
+            <a:spAutoFit/>
+          </a:bodyPr>
+          <a:lstStyle/>
+          <a:p>
+            <a:r>
+              <a:rPr sz="1300" b="1" i="0">
+                <a:solidFill>
+                  <a:srgbClr val="8A9099"/>
+                </a:solidFill>
+                <a:latin typeface="Menlo"/>
+              </a:rPr>
+              <a:t>LECTURE 10 · OVER TO YOUR LAB · DISCUSSION</a:t>
+            </a:r>
+          </a:p>
+        </p:txBody>
+      </p:sp>
+      <p:sp>
+        <p:nvSpPr>
+          <p:cNvPr id="4" name="TextBox 3"/>
+          <p:cNvSpPr txBox="1"/>
+          <p:nvPr/>
+        </p:nvSpPr>
+        <p:spPr>
+          <a:xfrm>
+            <a:off x="548640" y="731520"/>
+            <a:ext cx="11064240" cy="1127760"/>
+          </a:xfrm>
+          <a:prstGeom prst="rect">
+            <a:avLst/>
+          </a:prstGeom>
+          <a:noFill/>
+        </p:spPr>
+        <p:txBody>
+          <a:bodyPr wrap="square" anchor="t">
+            <a:spAutoFit/>
+          </a:bodyPr>
+          <a:lstStyle/>
+          <a:p>
+            <a:r>
+              <a:rPr sz="3400" b="1" i="0">
+                <a:solidFill>
+                  <a:srgbClr val="1B2025"/>
+                </a:solidFill>
+                <a:latin typeface="Avenir Next"/>
+              </a:rPr>
+              <a:t>Next — learning without labels (Lecture 11 + Lab 4)</a:t>
+            </a:r>
+          </a:p>
+        </p:txBody>
+      </p:sp>
+      <p:sp>
+        <p:nvSpPr>
+          <p:cNvPr id="5" name="TextBox 4"/>
+          <p:cNvSpPr txBox="1"/>
+          <p:nvPr/>
+        </p:nvSpPr>
+        <p:spPr>
+          <a:xfrm>
+            <a:off x="548640" y="1920240"/>
+            <a:ext cx="10789920" cy="3566159"/>
+          </a:xfrm>
+          <a:prstGeom prst="rect">
+            <a:avLst/>
+          </a:prstGeom>
+          <a:noFill/>
+        </p:spPr>
+        <p:txBody>
+          <a:bodyPr wrap="square" anchor="t">
+            <a:spAutoFit/>
+          </a:bodyPr>
+          <a:lstStyle/>
+          <a:p>
+            <a:pPr>
+              <a:spcAft>
+                <a:spcPts val="1800"/>
+              </a:spcAft>
+            </a:pPr>
+            <a:r>
+              <a:rPr sz="2100" b="1" i="0">
+                <a:solidFill>
+                  <a:srgbClr val="0E7C7B"/>
+                </a:solidFill>
+                <a:latin typeface="Avenir Next"/>
+              </a:rPr>
+              <a:t>•  </a:t>
+            </a:r>
+            <a:r>
+              <a:rPr sz="2100" b="0" i="0">
+                <a:solidFill>
+                  <a:srgbClr val="1B2025"/>
+                </a:solidFill>
+                <a:latin typeface="Avenir Next"/>
+              </a:rPr>
+              <a:t>Most lab data is UNLABELED — Lecture 11 asks what you can learn without labels</a:t>
+            </a:r>
+          </a:p>
+          <a:p>
+            <a:pPr>
+              <a:spcAft>
+                <a:spcPts val="1800"/>
+              </a:spcAft>
+            </a:pPr>
+            <a:r>
+              <a:rPr sz="2100" b="1" i="0">
+                <a:solidFill>
+                  <a:srgbClr val="0E7C7B"/>
+                </a:solidFill>
+                <a:latin typeface="Avenir Next"/>
+              </a:rPr>
+              <a:t>•  </a:t>
+            </a:r>
+            <a:r>
+              <a:rPr sz="2100" b="0" i="0">
+                <a:solidFill>
+                  <a:srgbClr val="1B2025"/>
+                </a:solidFill>
+                <a:latin typeface="Avenir Next"/>
+              </a:rPr>
+              <a:t>Autoencoders &amp; VAEs: reconstruction error as an anomaly/QC score — a precision/recall threshold, straight back to today</a:t>
+            </a:r>
+          </a:p>
+          <a:p>
+            <a:pPr>
+              <a:spcAft>
+                <a:spcPts val="1800"/>
+              </a:spcAft>
+            </a:pPr>
+            <a:r>
+              <a:rPr sz="2100" b="1" i="0">
+                <a:solidFill>
+                  <a:srgbClr val="0E7C7B"/>
+                </a:solidFill>
+                <a:latin typeface="Avenir Next"/>
+              </a:rPr>
+              <a:t>•  </a:t>
+            </a:r>
+            <a:r>
+              <a:rPr sz="2100" b="0" i="0">
+                <a:solidFill>
+                  <a:srgbClr val="1B2025"/>
+                </a:solidFill>
+                <a:latin typeface="Avenir Next"/>
+              </a:rPr>
+              <a:t>Lab 4 trains a VAE on normal spectra and flags anomalies — your metrics knowledge picks the threshold</a:t>
+            </a:r>
+          </a:p>
+          <a:p>
+            <a:pPr>
+              <a:spcAft>
+                <a:spcPts val="1800"/>
+              </a:spcAft>
+            </a:pPr>
+            <a:r>
+              <a:rPr sz="2100" b="1" i="0">
+                <a:solidFill>
+                  <a:srgbClr val="0E7C7B"/>
+                </a:solidFill>
+                <a:latin typeface="Avenir Next"/>
+              </a:rPr>
+              <a:t>•  </a:t>
+            </a:r>
+            <a:r>
+              <a:rPr sz="2100" b="0" i="0">
+                <a:solidFill>
+                  <a:srgbClr val="1B2025"/>
+                </a:solidFill>
+                <a:latin typeface="Avenir Next"/>
+              </a:rPr>
+              <a:t>💬 Discussion D4: what does 'abnormal' look like in YOUR instrument's output, and would reconstruction error catch it before a human does?</a:t>
+            </a:r>
+          </a:p>
+        </p:txBody>
+      </p:sp>
+      <p:sp>
+        <p:nvSpPr>
+          <p:cNvPr id="6" name="Rectangle 5"/>
+          <p:cNvSpPr/>
+          <p:nvPr/>
+        </p:nvSpPr>
+        <p:spPr>
+          <a:xfrm>
+            <a:off x="548640" y="5623559"/>
+            <a:ext cx="10515600" cy="923544"/>
           </a:xfrm>
           <a:prstGeom prst="rect">
             <a:avLst/>
@@ -7125,7 +7802,7 @@
                 </a:solidFill>
                 <a:latin typeface="Menlo"/>
               </a:rPr>
-              <a:t>CHECKPOINT · </a:t>
+              <a:t>PAIR · </a:t>
             </a:r>
             <a:r>
               <a:rPr sz="1700" b="0" i="0">
@@ -7134,684 +7811,7 @@
                 </a:solidFill>
                 <a:latin typeface="Avenir Next"/>
               </a:rPr>
-              <a:t>Your turn → Quiz 10, Q4. Same formula, new numbers: A = (2, 6), B = (4, 10), λ = 0.25. (a) Compute the synthetic point. (b) Why is raw-spectrum SMOTE risky in 6,000 dimensions? Worked answer in the notes.</a:t>
-            </a:r>
-          </a:p>
-        </p:txBody>
-      </p:sp>
-      <p:sp>
-        <p:nvSpPr>
-          <p:cNvPr id="7" name="Rounded Rectangle 6"/>
-          <p:cNvSpPr/>
-          <p:nvPr/>
-        </p:nvSpPr>
-        <p:spPr>
-          <a:xfrm>
-            <a:off x="2048640" y="1888800"/>
-            <a:ext cx="7515600" cy="620000"/>
-          </a:xfrm>
-          <a:prstGeom prst="roundRect">
-            <a:avLst>
-              <a:gd name="adj" fmla="val 8000"/>
-            </a:avLst>
-          </a:prstGeom>
-          <a:solidFill>
-            <a:srgbClr val="E3F0EF"/>
-          </a:solidFill>
-          <a:ln>
-            <a:noFill/>
-          </a:ln>
-          <a:effectLst/>
-        </p:spPr>
-        <p:style>
-          <a:lnRef idx="1">
-            <a:schemeClr val="accent1"/>
-          </a:lnRef>
-          <a:fillRef idx="3">
-            <a:schemeClr val="accent1"/>
-          </a:fillRef>
-          <a:effectRef idx="2">
-            <a:schemeClr val="accent1"/>
-          </a:effectRef>
-          <a:fontRef idx="minor">
-            <a:schemeClr val="lt1"/>
-          </a:fontRef>
-        </p:style>
-        <p:txBody>
-          <a:bodyPr rtlCol="0" anchor="ctr"/>
-          <a:lstStyle/>
-          <a:p/>
-        </p:txBody>
-      </p:sp>
-      <p:sp>
-        <p:nvSpPr>
-          <p:cNvPr id="8" name="TextBox 7"/>
-          <p:cNvSpPr txBox="1"/>
-          <p:nvPr/>
-        </p:nvSpPr>
-        <p:spPr>
-          <a:xfrm>
-            <a:off x="2048640" y="1888800"/>
-            <a:ext cx="7515600" cy="620000"/>
-          </a:xfrm>
-          <a:prstGeom prst="rect">
-            <a:avLst/>
-          </a:prstGeom>
-          <a:noFill/>
-        </p:spPr>
-        <p:txBody>
-          <a:bodyPr wrap="square" lIns="45720" rIns="45720" tIns="27432" bIns="27432" anchor="ctr">
-            <a:spAutoFit/>
-          </a:bodyPr>
-          <a:lstStyle/>
-          <a:p>
-            <a:pPr algn="ctr">
-              <a:spcAft>
-                <a:spcPts val="400"/>
-              </a:spcAft>
-            </a:pPr>
-            <a:r>
-              <a:rPr sz="2000" b="1">
-                <a:solidFill>
-                  <a:srgbClr val="0E7C7B"/>
-                </a:solidFill>
-                <a:latin typeface="Menlo"/>
-              </a:rPr>
-              <a:t>synthetic  =  A  +  λ · (B − A)</a:t>
-            </a:r>
-          </a:p>
-        </p:txBody>
-      </p:sp>
-      <p:sp>
-        <p:nvSpPr>
-          <p:cNvPr id="9" name="TextBox 8"/>
-          <p:cNvSpPr txBox="1"/>
-          <p:nvPr/>
-        </p:nvSpPr>
-        <p:spPr>
-          <a:xfrm>
-            <a:off x="548640" y="2648800"/>
-            <a:ext cx="10515600" cy="520000"/>
-          </a:xfrm>
-          <a:prstGeom prst="rect">
-            <a:avLst/>
-          </a:prstGeom>
-          <a:noFill/>
-        </p:spPr>
-        <p:txBody>
-          <a:bodyPr wrap="square" lIns="45720" rIns="45720" tIns="27432" bIns="27432" anchor="t">
-            <a:spAutoFit/>
-          </a:bodyPr>
-          <a:lstStyle/>
-          <a:p>
-            <a:pPr algn="ctr">
-              <a:spcAft>
-                <a:spcPts val="400"/>
-              </a:spcAft>
-            </a:pPr>
-            <a:r>
-              <a:rPr sz="1600" b="0">
-                <a:solidFill>
-                  <a:srgbClr val="1B2025"/>
-                </a:solidFill>
-                <a:latin typeface="Avenir Next"/>
-              </a:rPr>
-              <a:t>Two real minority points:   </a:t>
-            </a:r>
-            <a:r>
-              <a:rPr sz="1600" b="1">
-                <a:solidFill>
-                  <a:srgbClr val="1B2025"/>
-                </a:solidFill>
-                <a:latin typeface="Menlo"/>
-              </a:rPr>
-              <a:t>A = (2, 6)   B = (4, 10)   λ = 0.25</a:t>
-            </a:r>
-          </a:p>
-        </p:txBody>
-      </p:sp>
-      <p:sp>
-        <p:nvSpPr>
-          <p:cNvPr id="10" name="TextBox 9"/>
-          <p:cNvSpPr txBox="1"/>
-          <p:nvPr/>
-        </p:nvSpPr>
-        <p:spPr>
-          <a:xfrm>
-            <a:off x="548640" y="3288800"/>
-            <a:ext cx="10515600" cy="1900000"/>
-          </a:xfrm>
-          <a:prstGeom prst="rect">
-            <a:avLst/>
-          </a:prstGeom>
-          <a:noFill/>
-        </p:spPr>
-        <p:txBody>
-          <a:bodyPr wrap="square" lIns="45720" rIns="45720" tIns="27432" bIns="27432" anchor="t">
-            <a:spAutoFit/>
-          </a:bodyPr>
-          <a:lstStyle/>
-          <a:p>
-            <a:pPr algn="l">
-              <a:spcAft>
-                <a:spcPts val="1000"/>
-              </a:spcAft>
-            </a:pPr>
-            <a:r>
-              <a:rPr sz="1700" b="1">
-                <a:solidFill>
-                  <a:srgbClr val="0E7C7B"/>
-                </a:solidFill>
-                <a:latin typeface="Avenir Next"/>
-              </a:rPr>
-              <a:t>(a)  </a:t>
-            </a:r>
-            <a:r>
-              <a:rPr sz="1700" b="0">
-                <a:solidFill>
-                  <a:srgbClr val="1B2025"/>
-                </a:solidFill>
-                <a:latin typeface="Avenir Next"/>
-              </a:rPr>
-              <a:t>synthetic = ( 2 + 0.25·(4 − 2),  6 + 0.25·(10 − 6) ) =</a:t>
-            </a:r>
-            <a:r>
-              <a:rPr sz="1700" b="1">
-                <a:solidFill>
-                  <a:srgbClr val="0E7C7B"/>
-                </a:solidFill>
-                <a:latin typeface="Avenir Next"/>
-              </a:rPr>
-              <a:t>  ________</a:t>
-            </a:r>
-          </a:p>
-          <a:p>
-            <a:pPr algn="l">
-              <a:spcAft>
-                <a:spcPts val="1000"/>
-              </a:spcAft>
-            </a:pPr>
-            <a:r>
-              <a:rPr sz="1700" b="1">
-                <a:solidFill>
-                  <a:srgbClr val="0E7C7B"/>
-                </a:solidFill>
-                <a:latin typeface="Avenir Next"/>
-              </a:rPr>
-              <a:t>(b)  </a:t>
-            </a:r>
-            <a:r>
-              <a:rPr sz="1700" b="0">
-                <a:solidFill>
-                  <a:srgbClr val="1B2025"/>
-                </a:solidFill>
-                <a:latin typeface="Avenir Next"/>
-              </a:rPr>
-              <a:t>One sentence: why is raw-spectrum SMOTE risky in 6,000 dimensions?</a:t>
-            </a:r>
-          </a:p>
-        </p:txBody>
-      </p:sp>
-    </p:spTree>
-  </p:cSld>
-  <p:clrMapOvr>
-    <a:masterClrMapping/>
-  </p:clrMapOvr>
-</p:sld>
-</file>
-
-<file path=ppt/slides/slide24.xml><?xml version="1.0" encoding="utf-8"?>
-<p:sld xmlns:a="http://schemas.openxmlformats.org/drawingml/2006/main" xmlns:p="http://schemas.openxmlformats.org/presentationml/2006/main" xmlns:r="http://schemas.openxmlformats.org/officeDocument/2006/relationships">
-  <p:cSld>
-    <p:spTree>
-      <p:nvGrpSpPr>
-        <p:cNvPr id="1" name=""/>
-        <p:cNvGrpSpPr/>
-        <p:nvPr/>
-      </p:nvGrpSpPr>
-      <p:grpSpPr/>
-      <p:sp>
-        <p:nvSpPr>
-          <p:cNvPr id="2" name="Rectangle 1"/>
-          <p:cNvSpPr/>
-          <p:nvPr/>
-        </p:nvSpPr>
-        <p:spPr>
-          <a:xfrm>
-            <a:off x="0" y="0"/>
-            <a:ext cx="12191695" cy="6858000"/>
-          </a:xfrm>
-          <a:prstGeom prst="rect">
-            <a:avLst/>
-          </a:prstGeom>
-          <a:solidFill>
-            <a:srgbClr val="FBFBF8"/>
-          </a:solidFill>
-          <a:ln>
-            <a:noFill/>
-          </a:ln>
-          <a:effectLst/>
-        </p:spPr>
-        <p:style>
-          <a:lnRef idx="1">
-            <a:schemeClr val="accent1"/>
-          </a:lnRef>
-          <a:fillRef idx="3">
-            <a:schemeClr val="accent1"/>
-          </a:fillRef>
-          <a:effectRef idx="2">
-            <a:schemeClr val="accent1"/>
-          </a:effectRef>
-          <a:fontRef idx="minor">
-            <a:schemeClr val="lt1"/>
-          </a:fontRef>
-        </p:style>
-        <p:txBody>
-          <a:bodyPr rtlCol="0" anchor="ctr"/>
-          <a:lstStyle/>
-          <a:p>
-            <a:pPr algn="ctr"/>
-            <a:endParaRPr/>
-          </a:p>
-        </p:txBody>
-      </p:sp>
-      <p:sp>
-        <p:nvSpPr>
-          <p:cNvPr id="3" name="TextBox 2"/>
-          <p:cNvSpPr txBox="1"/>
-          <p:nvPr/>
-        </p:nvSpPr>
-        <p:spPr>
-          <a:xfrm>
-            <a:off x="548640" y="320040"/>
-            <a:ext cx="10972800" cy="365760"/>
-          </a:xfrm>
-          <a:prstGeom prst="rect">
-            <a:avLst/>
-          </a:prstGeom>
-          <a:noFill/>
-        </p:spPr>
-        <p:txBody>
-          <a:bodyPr wrap="square" anchor="t">
-            <a:spAutoFit/>
-          </a:bodyPr>
-          <a:lstStyle/>
-          <a:p>
-            <a:r>
-              <a:rPr sz="1300" b="1" i="0">
-                <a:solidFill>
-                  <a:srgbClr val="8A9099"/>
-                </a:solidFill>
-                <a:latin typeface="Menlo"/>
-              </a:rPr>
-              <a:t>PART A · YOUR TURN (YOU-DO = Q2)</a:t>
-            </a:r>
-          </a:p>
-        </p:txBody>
-      </p:sp>
-      <p:sp>
-        <p:nvSpPr>
-          <p:cNvPr id="4" name="TextBox 3"/>
-          <p:cNvSpPr txBox="1"/>
-          <p:nvPr/>
-        </p:nvSpPr>
-        <p:spPr>
-          <a:xfrm>
-            <a:off x="548640" y="731520"/>
-            <a:ext cx="11064240" cy="1005840"/>
-          </a:xfrm>
-          <a:prstGeom prst="rect">
-            <a:avLst/>
-          </a:prstGeom>
-          <a:noFill/>
-        </p:spPr>
-        <p:txBody>
-          <a:bodyPr wrap="square" anchor="t">
-            <a:spAutoFit/>
-          </a:bodyPr>
-          <a:lstStyle/>
-          <a:p>
-            <a:r>
-              <a:rPr sz="3400" b="1" i="0">
-                <a:solidFill>
-                  <a:srgbClr val="1B2025"/>
-                </a:solidFill>
-                <a:latin typeface="Avenir Next"/>
-              </a:rPr>
-              <a:t>Your turn — AUROC or AUPRC for this screen?</a:t>
-            </a:r>
-          </a:p>
-        </p:txBody>
-      </p:sp>
-      <p:sp>
-        <p:nvSpPr>
-          <p:cNvPr id="6" name="Rectangle 5"/>
-          <p:cNvSpPr/>
-          <p:nvPr/>
-        </p:nvSpPr>
-        <p:spPr>
-          <a:xfrm>
-            <a:off x="548640" y="5538216"/>
-            <a:ext cx="10515600" cy="1182624"/>
-          </a:xfrm>
-          <a:prstGeom prst="rect">
-            <a:avLst/>
-          </a:prstGeom>
-          <a:solidFill>
-            <a:srgbClr val="F1F1EC"/>
-          </a:solidFill>
-          <a:ln w="12700">
-            <a:solidFill>
-              <a:srgbClr val="E09E2F"/>
-            </a:solidFill>
-          </a:ln>
-          <a:effectLst/>
-        </p:spPr>
-        <p:style>
-          <a:lnRef idx="1">
-            <a:schemeClr val="accent1"/>
-          </a:lnRef>
-          <a:fillRef idx="3">
-            <a:schemeClr val="accent1"/>
-          </a:fillRef>
-          <a:effectRef idx="2">
-            <a:schemeClr val="accent1"/>
-          </a:effectRef>
-          <a:fontRef idx="minor">
-            <a:schemeClr val="lt1"/>
-          </a:fontRef>
-        </p:style>
-        <p:txBody>
-          <a:bodyPr wrap="square" lIns="182880" rIns="182880" rtlCol="0" anchor="ctr"/>
-          <a:lstStyle/>
-          <a:p>
-            <a:pPr algn="ctr"/>
-            <a:r>
-              <a:rPr sz="1200" b="1" i="0">
-                <a:solidFill>
-                  <a:srgbClr val="E09E2F"/>
-                </a:solidFill>
-                <a:latin typeface="Menlo"/>
-              </a:rPr>
-              <a:t>CHECKPOINT · </a:t>
-            </a:r>
-            <a:r>
-              <a:rPr sz="1700" b="0" i="0">
-                <a:solidFill>
-                  <a:srgbClr val="3D444C"/>
-                </a:solidFill>
-                <a:latin typeface="Avenir Next"/>
-              </a:rPr>
-              <a:t>Your turn → Quiz 10, Q2. Same screen, 4% prevalence. Place its one operating point on the ROC and on the PR curve, then decide which area to report across all thresholds — and why. Worked answer in the notes.</a:t>
-            </a:r>
-          </a:p>
-        </p:txBody>
-      </p:sp>
-      <p:sp>
-        <p:nvSpPr>
-          <p:cNvPr id="7" name="Rounded Rectangle 6"/>
-          <p:cNvSpPr/>
-          <p:nvPr/>
-        </p:nvSpPr>
-        <p:spPr>
-          <a:xfrm>
-            <a:off x="548640" y="1868800"/>
-            <a:ext cx="10515600" cy="1060000"/>
-          </a:xfrm>
-          <a:prstGeom prst="roundRect">
-            <a:avLst>
-              <a:gd name="adj" fmla="val 8000"/>
-            </a:avLst>
-          </a:prstGeom>
-          <a:solidFill>
-            <a:srgbClr val="FFFFFF"/>
-          </a:solidFill>
-          <a:ln w="12700">
-            <a:solidFill>
-              <a:srgbClr val="D9D9D2"/>
-            </a:solidFill>
-          </a:ln>
-          <a:effectLst/>
-        </p:spPr>
-        <p:style>
-          <a:lnRef idx="1">
-            <a:schemeClr val="accent1"/>
-          </a:lnRef>
-          <a:fillRef idx="3">
-            <a:schemeClr val="accent1"/>
-          </a:fillRef>
-          <a:effectRef idx="2">
-            <a:schemeClr val="accent1"/>
-          </a:effectRef>
-          <a:fontRef idx="minor">
-            <a:schemeClr val="lt1"/>
-          </a:fontRef>
-        </p:style>
-        <p:txBody>
-          <a:bodyPr rtlCol="0" anchor="ctr"/>
-          <a:lstStyle/>
-          <a:p/>
-        </p:txBody>
-      </p:sp>
-      <p:sp>
-        <p:nvSpPr>
-          <p:cNvPr id="8" name="TextBox 7"/>
-          <p:cNvSpPr txBox="1"/>
-          <p:nvPr/>
-        </p:nvSpPr>
-        <p:spPr>
-          <a:xfrm>
-            <a:off x="640080" y="1888800"/>
-            <a:ext cx="10332720" cy="1040000"/>
-          </a:xfrm>
-          <a:prstGeom prst="rect">
-            <a:avLst/>
-          </a:prstGeom>
-          <a:noFill/>
-        </p:spPr>
-        <p:txBody>
-          <a:bodyPr wrap="square" lIns="45720" rIns="45720" tIns="27432" bIns="27432" anchor="t">
-            <a:spAutoFit/>
-          </a:bodyPr>
-          <a:lstStyle/>
-          <a:p>
-            <a:pPr algn="l">
-              <a:spcAft>
-                <a:spcPts val="300"/>
-              </a:spcAft>
-            </a:pPr>
-            <a:r>
-              <a:rPr sz="1500" b="1">
-                <a:solidFill>
-                  <a:srgbClr val="1B2025"/>
-                </a:solidFill>
-                <a:latin typeface="Avenir Next"/>
-              </a:rPr>
-              <a:t>Same screen:  </a:t>
-            </a:r>
-            <a:r>
-              <a:rPr sz="1500" b="0">
-                <a:solidFill>
-                  <a:srgbClr val="1B2025"/>
-                </a:solidFill>
-                <a:latin typeface="Menlo"/>
-              </a:rPr>
-              <a:t>TP = 16   FN = 4   FP = 32   TN = 448</a:t>
-            </a:r>
-            <a:r>
-              <a:rPr sz="1500" b="0">
-                <a:solidFill>
-                  <a:srgbClr val="3D444C"/>
-                </a:solidFill>
-                <a:latin typeface="Avenir Next"/>
-              </a:rPr>
-              <a:t>   ·   rare positives: 20 of 500 = 4% prevalence</a:t>
-            </a:r>
-          </a:p>
-          <a:p>
-            <a:pPr algn="l">
-              <a:spcAft>
-                <a:spcPts val="300"/>
-              </a:spcAft>
-            </a:pPr>
-            <a:r>
-              <a:rPr sz="1400" b="0">
-                <a:solidFill>
-                  <a:srgbClr val="0E7C7B"/>
-                </a:solidFill>
-                <a:latin typeface="Menlo"/>
-              </a:rPr>
-              <a:t>FPR = FP / (FP + TN)     TPR = recall = TP / (TP + FN)     precision = TP / (TP + FP)</a:t>
-            </a:r>
-          </a:p>
-          <a:p>
-            <a:pPr algn="l">
-              <a:spcAft>
-                <a:spcPts val="300"/>
-              </a:spcAft>
-            </a:pPr>
-            <a:r>
-              <a:rPr sz="1400" b="0">
-                <a:solidFill>
-                  <a:srgbClr val="3D444C"/>
-                </a:solidFill>
-                <a:latin typeface="Avenir Next"/>
-              </a:rPr>
-              <a:t>the PR curve’s chance baseline sits at the prevalence (ROC’s sits at 0.5)</a:t>
-            </a:r>
-          </a:p>
-        </p:txBody>
-      </p:sp>
-      <p:sp>
-        <p:nvSpPr>
-          <p:cNvPr id="9" name="TextBox 8"/>
-          <p:cNvSpPr txBox="1"/>
-          <p:nvPr/>
-        </p:nvSpPr>
-        <p:spPr>
-          <a:xfrm>
-            <a:off x="548640" y="3028800"/>
-            <a:ext cx="10515600" cy="2300000"/>
-          </a:xfrm>
-          <a:prstGeom prst="rect">
-            <a:avLst/>
-          </a:prstGeom>
-          <a:noFill/>
-        </p:spPr>
-        <p:txBody>
-          <a:bodyPr wrap="square" lIns="45720" rIns="45720" tIns="27432" bIns="27432" anchor="t">
-            <a:spAutoFit/>
-          </a:bodyPr>
-          <a:lstStyle/>
-          <a:p>
-            <a:pPr algn="l">
-              <a:spcAft>
-                <a:spcPts val="1000"/>
-              </a:spcAft>
-            </a:pPr>
-            <a:r>
-              <a:rPr sz="1600" b="1">
-                <a:solidFill>
-                  <a:srgbClr val="0E7C7B"/>
-                </a:solidFill>
-                <a:latin typeface="Avenir Next"/>
-              </a:rPr>
-              <a:t>(a)  </a:t>
-            </a:r>
-            <a:r>
-              <a:rPr sz="1600" b="0">
-                <a:solidFill>
-                  <a:srgbClr val="1B2025"/>
-                </a:solidFill>
-                <a:latin typeface="Avenir Next"/>
-              </a:rPr>
-              <a:t>ROC point:  FPR = 32 / (32 + 448) =</a:t>
-            </a:r>
-            <a:r>
-              <a:rPr sz="1600" b="1">
-                <a:solidFill>
-                  <a:srgbClr val="0E7C7B"/>
-                </a:solidFill>
-                <a:latin typeface="Avenir Next"/>
-              </a:rPr>
-              <a:t>  ________</a:t>
-            </a:r>
-            <a:r>
-              <a:rPr sz="1600" b="0">
-                <a:solidFill>
-                  <a:srgbClr val="1B2025"/>
-                </a:solidFill>
-                <a:latin typeface="Avenir Next"/>
-              </a:rPr>
-              <a:t>     TPR (recall) =  ________  — does it hug the top-left corner?  ________</a:t>
-            </a:r>
-          </a:p>
-          <a:p>
-            <a:pPr algn="l">
-              <a:spcAft>
-                <a:spcPts val="1000"/>
-              </a:spcAft>
-            </a:pPr>
-            <a:r>
-              <a:rPr sz="1600" b="1">
-                <a:solidFill>
-                  <a:srgbClr val="0E7C7B"/>
-                </a:solidFill>
-                <a:latin typeface="Avenir Next"/>
-              </a:rPr>
-              <a:t>(b)  </a:t>
-            </a:r>
-            <a:r>
-              <a:rPr sz="1600" b="0">
-                <a:solidFill>
-                  <a:srgbClr val="1B2025"/>
-                </a:solidFill>
-                <a:latin typeface="Avenir Next"/>
-              </a:rPr>
-              <a:t>PR point:  recall =</a:t>
-            </a:r>
-            <a:r>
-              <a:rPr sz="1600" b="1">
-                <a:solidFill>
-                  <a:srgbClr val="0E7C7B"/>
-                </a:solidFill>
-                <a:latin typeface="Avenir Next"/>
-              </a:rPr>
-              <a:t>  ________</a:t>
-            </a:r>
-            <a:r>
-              <a:rPr sz="1600" b="0">
-                <a:solidFill>
-                  <a:srgbClr val="1B2025"/>
-                </a:solidFill>
-                <a:latin typeface="Avenir Next"/>
-              </a:rPr>
-              <a:t>     precision =  ________     chance baseline = prevalence =  ________</a:t>
-            </a:r>
-          </a:p>
-          <a:p>
-            <a:pPr algn="l">
-              <a:spcAft>
-                <a:spcPts val="1000"/>
-              </a:spcAft>
-            </a:pPr>
-            <a:r>
-              <a:rPr sz="1600" b="1">
-                <a:solidFill>
-                  <a:srgbClr val="0E7C7B"/>
-                </a:solidFill>
-                <a:latin typeface="Avenir Next"/>
-              </a:rPr>
-              <a:t>(c)  </a:t>
-            </a:r>
-            <a:r>
-              <a:rPr sz="1600" b="0">
-                <a:solidFill>
-                  <a:srgbClr val="1B2025"/>
-                </a:solidFill>
-                <a:latin typeface="Avenir Next"/>
-              </a:rPr>
-              <a:t>To report this screen across ALL thresholds, would you trust the AUROC or the AUPRC (PR curve) — and why?</a:t>
+              <a:t>💬 Discussion D4: name one place in your workflow where a rare event hides in a majority-normal stream — and which metric, not accuracy, would tell you if a model caught it.</a:t>
             </a:r>
           </a:p>
         </p:txBody>

--- a/slides/pptx/lecture10_imbalanced_data.pptx
+++ b/slides/pptx/lecture10_imbalanced_data.pptx
@@ -5,7 +5,7 @@
     <p:sldMasterId id="2147483658" r:id="rId1"/>
   </p:sldMasterIdLst>
   <p:notesMasterIdLst>
-    <p:notesMasterId r:id="rId22"/>
+    <p:notesMasterId r:id="rId26"/>
   </p:notesMasterIdLst>
   <p:sldIdLst>
     <p:sldId id="256" r:id="rId2"/>
@@ -18,20 +18,20 @@
     <p:sldId id="274" r:id="rId9"/>
     <p:sldId id="275" r:id="rId10"/>
     <p:sldId id="261" r:id="rId11"/>
-    <p:sldId id="282" r:id="rId30"/>
-    <p:sldId id="263" r:id="rId12"/>
-    <p:sldId id="264" r:id="rId13"/>
-    <p:sldId id="276" r:id="rId14"/>
-    <p:sldId id="278" r:id="rId15"/>
-    <p:sldId id="279" r:id="rId27"/>
-    <p:sldId id="277" r:id="rId16"/>
-    <p:sldId id="265" r:id="rId17"/>
-    <p:sldId id="281" r:id="rId29"/>
-    <p:sldId id="266" r:id="rId18"/>
-    <p:sldId id="267" r:id="rId19"/>
-    <p:sldId id="280" r:id="rId28"/>
-    <p:sldId id="270" r:id="rId20"/>
-    <p:sldId id="271" r:id="rId21"/>
+    <p:sldId id="282" r:id="rId12"/>
+    <p:sldId id="263" r:id="rId13"/>
+    <p:sldId id="264" r:id="rId14"/>
+    <p:sldId id="276" r:id="rId15"/>
+    <p:sldId id="278" r:id="rId16"/>
+    <p:sldId id="279" r:id="rId17"/>
+    <p:sldId id="277" r:id="rId18"/>
+    <p:sldId id="265" r:id="rId19"/>
+    <p:sldId id="281" r:id="rId20"/>
+    <p:sldId id="266" r:id="rId21"/>
+    <p:sldId id="267" r:id="rId22"/>
+    <p:sldId id="280" r:id="rId23"/>
+    <p:sldId id="270" r:id="rId24"/>
+    <p:sldId id="271" r:id="rId25"/>
   </p:sldIdLst>
   <p:sldSz cx="12192000" cy="6858000"/>
   <p:notesSz cx="6858000" cy="9144000"/>
@@ -366,18 +366,6 @@
       </p:grpSpPr>
       <p:sp>
         <p:nvSpPr>
-          <p:cNvPr id="2" name="Slide Image Placeholder 1"/>
-          <p:cNvSpPr>
-            <a:spLocks noGrp="1" noRot="1" noChangeAspect="1"/>
-          </p:cNvSpPr>
-          <p:nvPr>
-            <p:ph type="sldImg" idx="2"/>
-          </p:nvPr>
-        </p:nvSpPr>
-        <p:spPr/>
-      </p:sp>
-      <p:sp>
-        <p:nvSpPr>
           <p:cNvPr id="3" name="Notes Placeholder 2"/>
           <p:cNvSpPr>
             <a:spLocks noGrp="1"/>
@@ -392,25 +380,10 @@
           <a:lstStyle/>
           <a:p>
             <a:r>
-              <a:t>One folded-in honesty slide (no you-do — it frames the whole hour, not a compute). Your beautiful precision/recall numbers are a promise about ONE distribution: the data you tested on. Change the distribution and they can collapse silently. BATCH EFFECTS are the everyday culprit — a different MALDI instrument, a new site's prep, a fresh reagent lot — each shifts the data cloud (left panel) though the biology is unchanged. The cautionary tale is the SAME task as Lab 2: DRIAMS-trained antimicrobial-resistance models taken to new specimens lose roughly 0.07–0.23 AUROC across sites, and decay further within about 18 months (right panel; Wiesmann et al., J Clin Microbiol 2025). So internal cross-validation is not enough: validate EXTERNALLY (a held-out site/instrument the model never trained on) and TEMPORALLY (later time periods), and guard against leakage by splitting on patient or isolate, never putting two spectra of the same sample on both sides. Keep this brief — it is the trust guardrail that Part B's treatments must not paper over. Now, on to treating the imbalance itself.</a:t>
-            </a:r>
-          </a:p>
-          <a:p>
-            <a:endParaRPr/>
-          </a:p>
-        </p:txBody>
-      </p:sp>
-      <p:sp>
-        <p:nvSpPr>
-          <p:cNvPr id="4" name="Slide Number Placeholder 3"/>
-          <p:cNvSpPr>
-            <a:spLocks noGrp="1"/>
-          </p:cNvSpPr>
-          <p:nvPr>
-            <p:ph type="sldNum" sz="quarter" idx="5"/>
-          </p:nvPr>
-        </p:nvSpPr>
-        <p:spPr/>
+              <a:t>YOU-DO = Quiz 10 Q2, straight after 'why AUROC flatters'. The formulas it needs are restated on the slide. Worked answer: (a) FPR = 32/(32+448) = 32/480 = 0.067; TPR = 0.80 — the point (0.067, 0.80) hugs the top-left, so the ROC/AUROC looks excellent. (b) PR point =(recall 0.80, precision 0.33); PR baseline = prevalence = 20/500 = 0.04 (ROC's baseline is 0.5). (c) Trust the AUPRC / PR curve (reported with recall). At 4% prevalence the 480 true-negatives dominate, so a tiny FPR keeps AUROC flatteringly high even though precision is only 0.33 (2 of 3 flags false). AUROC is invariant to the class ratio; AUPRC collapses toward the prevalence, so it stays honest as recall grows (Saito &amp; Rehmsmeier 2015).</a:t>
+            </a:r>
+          </a:p>
+        </p:txBody>
       </p:sp>
     </p:spTree>
   </p:cSld>
@@ -465,8 +438,11 @@
           <a:lstStyle/>
           <a:p>
             <a:r>
-              <a:t>The Part-B roadmap as a menu, not a text wall (rule 9). Each move answers a different symptom, and we work the two quantitative ones (SMOTE, focal loss) by hand on the next slides. CURATE: a few hundred clean, correctly-labeled spectra beat thousands of noisy ones — fix mislabels and drop junk runs first. REWEIGHT / SMOTE / OVERSAMPLE: make the rare class count — class weights multiply its loss, oversampling repeats it, SMOTE synthesizes new minority points. FOCAL LOSS: automatically turn up the hard, low-confidence cases near the boundary. CURRICULUM: order the training diet so early training isn't swamped. And the durable truth in the footer, which the decide beat returns to: every one of these RE-USES the 41 resistant spectra you already have — none manufactures new biological signal. Only collecting more real resistant isolates does that. Read the card that matches your symptom; we compute SMOTE next. Each card now carries a concrete example, and each move gets its own worked slide next — SIX of them: curation (the pass on our own 738 spectra), then curation's second half, deduplication in EMBEDDING space (a cosine do-it-together); the reweighting family (class weights worked, then oversample / undersample / augment); SMOTE (worked in feature space and then shown as real spectra); focal loss (the whole FL curve, γ = 0/1/2/5, plus the two numbers); and curriculum (an actual 20-epoch schedule with its two curves). Every one of the four menu cards is now taught to the same depth.</a:t>
-            </a:r>
+              <a:t>One folded-in honesty slide (no you-do — it frames the whole hour, not a compute). Your beautiful precision/recall numbers are a promise about ONE distribution: the data you tested on. Change the distribution and they can collapse silently. BATCH EFFECTS are the everyday culprit — a different MALDI instrument, a new site's prep, a fresh reagent lot — each shifts the data cloud (left panel) though the biology is unchanged. The cautionary tale is the SAME task as Lab 2: DRIAMS-trained antimicrobial-resistance models taken to new specimens lose roughly 0.07–0.23 AUROC across sites, and decay further within about 18 months (right panel; Wiesmann et al., J Clin Microbiol 2025). So internal cross-validation is not enough: validate EXTERNALLY (a held-out site/instrument the model never trained on) and TEMPORALLY (later time periods), and guard against leakage by splitting on patient or isolate, never putting two spectra of the same sample on both sides. Keep this brief — it is the trust guardrail that Part B's treatments must not paper over. Now, on to treating the imbalance itself.</a:t>
+            </a:r>
+          </a:p>
+          <a:p>
+            <a:endParaRPr/>
           </a:p>
         </p:txBody>
       </p:sp>
@@ -535,7 +511,7 @@
           <a:lstStyle/>
           <a:p>
             <a:r>
-              <a:t>Curation leads the menu because it is the only move that changes the DATA instead of the training, and on a 41-member class it is worth more than everything else combined. Walk the pipeline left to right on our real numbers. Start: 738 spectra, 41 R / 697 S. (1) Drop 22 runs that failed acceptance — total ion current under the cut, barely twenty peaks, no crystal formation; one of them was resistant. (2) Resolve 8 spectra whose S/R label disagrees between broth microdilution and disk diffusion — 3 of those 8 are in the resistant class. (3) Group 12 replicate spectra so the same isolate cannot land in both train and test; that is leakage, and it is the commonest way a clinical ML paper reports a number nobody can reproduce. You end at 696 spectra, 35 R / 661 S. Now the punchline, and say it slowly: you have SIX fewer resistant examples and a BETTER model, because 3 of your 41 were teaching the network the wrong answer — with a class that small, three bad labels is 7% of everything the model knows about resistance. Two more cases worth naming from the cards: a mixed culture or a mis-identified species (the label refers to an organism that isn't in the well), and an MIC sitting exactly on the breakpoint, where one dilution flips the call — flag those, don't silently keep them. One thing this slide asserts but does not yet show: how you FIND those 12 replicates. You cannot eyeball 738 spectra pairwise, and the file names lie — so the next slide does it properly, by deduplicating in EMBEDDING space with a cosine ruler, as a do-it-together. And the ordering rule for the rest of Part B: curate BEFORE you reweight or synthesise, or every later move amplifies the mislabelled spectra.</a:t>
+              <a:t>The Part-B roadmap as a menu, not a text wall (rule 9). Each move answers a different symptom, and we work the two quantitative ones (SMOTE, focal loss) by hand on the next slides. CURATE: a few hundred clean, correctly-labeled spectra beat thousands of noisy ones — fix mislabels and drop junk runs first. AUGMENT: make more label-safe VIEWS of the rare spectra you have — m/z jitter ±0.1%, intensity ×0.9, baseline + noise, never a left–right flip — so 41 resistant spectra × 8 views = 328 (17:1 becomes ≈ 2.1:1). REWEIGHT / SMOTE / OVERSAMPLE: make the rare class count — class weights multiply its loss, oversampling repeats it, SMOTE synthesizes new minority points. FOCAL LOSS: automatically turn up the hard, low-confidence cases near the boundary. CURRICULUM: order the training diet so early training isn't swamped. And the durable truth in the footer, which the decide beat returns to: every one of these RE-USES the 41 resistant spectra you already have — none manufactures new biological signal. Only collecting more real resistant isolates does that. Read the card that matches your symptom; we compute SMOTE next. Each card now carries a concrete example, and each move gets its own worked slide next — SEVEN of them, in card order: curation (the pass on our own 738 spectra), then curation's second half, deduplication in EMBEDDING space (a cosine do-it-together); augmentation (taught on a picture, then carried over to spectra); the reweighting family (class weights worked, then oversample / undersample / augment); SMOTE (worked in feature space and then shown as real spectra); focal loss (the whole FL curve, γ = 0/1/2/5, plus the two numbers); and curriculum (an actual 20-epoch schedule with its two curves). Every one of the five menu cards is now taught to the same depth.</a:t>
             </a:r>
           </a:p>
         </p:txBody>
@@ -579,6 +555,18 @@
       </p:grpSpPr>
       <p:sp>
         <p:nvSpPr>
+          <p:cNvPr id="2" name="Slide Image Placeholder 1"/>
+          <p:cNvSpPr>
+            <a:spLocks noGrp="1" noRot="1" noChangeAspect="1"/>
+          </p:cNvSpPr>
+          <p:nvPr>
+            <p:ph type="sldImg" idx="2"/>
+          </p:nvPr>
+        </p:nvSpPr>
+        <p:spPr/>
+      </p:sp>
+      <p:sp>
+        <p:nvSpPr>
           <p:cNvPr id="3" name="Notes Placeholder 2"/>
           <p:cNvSpPr>
             <a:spLocks noGrp="1"/>
@@ -593,10 +581,22 @@
           <a:lstStyle/>
           <a:p>
             <a:r>
-              <a:t>DO-IT-TOGETHER, and the second half of curation — the mechanism behind the '−12 replicate spectra grouped' step you just saw. Start with the problem: the previous slide asserted that 12 of our 738 spectra are repeat shots of an isolate already in the set. How would you actually find them in a real project? Not by eye — 738 spectra is 272,000 pairs. Not by file name or isolate ID either, because those are exactly what is unreliable in a merged, multi-site dataset (that is WHY the duplicates are there). So we let the model tell us. STEP 1, THE EMBEDDING. Push every spectrum through the trained CNN and stop one layer early: the activations of that last hidden layer are a short vector — a few hundred numbers instead of 6,000 — and that vector is the spectrum's EMBEDDING. This is Lecture 7's idea exactly ('things become coordinates'), and Lecture 5's feature maps are what produce it: the network has already learned which peak patterns matter, so spectra it considers alike land near each other. Left panel: every dot is one spectrum, and the three amber rings are the giveaway — a tight little knot of points where a single isolate was shot four times. STEP 2, THE RULER, and this is the arithmetic we do together, so work it cell by cell on the board. cos(a, b) = (a·b) / (|a|·|b|) — the dot product from Lecture 7's attention scores, divided by both lengths so only the DIRECTION counts. Take three toy 3-bin spectra. a = (3, 4, 0) and b = (6, 8, 0): the dot product is 3·6 + 4·8 + 0·0 = 18 + 32 + 0 = 50; |a| = √(9+16) = 5; |b| = √(36+64) = 10; so cos = 50 / (5 × 10) = 50/50 = 1.00. Ask the room what that means before you say it: b is exactly twice a, which is the SAME peak pattern at twice the total ion current — a second shot of the same colony, a hotter spot on the plate. Dividing by the lengths is precisely what makes the ruler blind to that intensity difference, and it is why cosine, not raw distance, is the right tool. Now a against c = (0, 4, 3): dot product = 3·0 + 4·4 + 0·3 = 16; |a| = 5, |c| = √(16+9) = 5; cos = 16/25 = 0.64. Different pattern, different isolate — keep both. STEP 3, THE RULE. Set a threshold: cos ≥ 0.99 means the same isolate, so keep one member of each cluster and drop the rest. On our split that is the 12 spectra (2 R, 10 S) from the curation pipeline, which is how the two slides tie together. WHY IT MATTERS, and say this as the payoff: a duplicate that lands in train AND test is leakage — the model has literally seen the test spectrum, so your AUPRC is a fiction. With a 41-member resistant class, two leaked resistant isolates can move the number by several points. This is the commonest way a clinical ML paper reports a score nobody can reproduce. TWO HONEST CAVEATS. (1) The threshold is a judgement call — 0.99 is strict; too low and you throw away genuinely distinct isolates of the same clone. (2) Chicken-and-egg: the embedding comes from a model trained on the un-deduplicated data, so in practice you iterate, or use a generic/pretrained encoder for the first pass. Assessed in Quiz 10 Q3(a), where the situation now names the repeated isolate. Then on to making the rare class count.</a:t>
-            </a:r>
-          </a:p>
-        </p:txBody>
+              <a:t>Curation leads the menu because it is the only move that changes the DATA instead of the training, and on a 41-member class it is worth more than everything else combined. Walk the pipeline left to right on our real numbers. Start: 738 spectra, 41 R / 697 S. (1) Drop 22 runs that failed acceptance — total ion current under the cut, barely twenty peaks, no crystal formation; one of them was resistant. (2) Resolve 8 spectra whose S/R label disagrees between broth microdilution and disk diffusion — 3 of those 8 are in the resistant class. (3) Group 12 replicate spectra so the same isolate cannot land in both train and test; that is leakage, and it is the commonest way a clinical ML paper reports a number nobody can reproduce. You end at 696 spectra, 35 R / 661 S. Now the punchline, and say it slowly: you have SIX fewer resistant examples and a BETTER model, because 3 of your 41 were teaching the network the wrong answer — with a class that small, three bad labels is 7% of everything the model knows about resistance. Two more cases worth naming from the cards: a mixed culture or a mis-identified species (the label refers to an organism that isn't in the well), and an MIC sitting exactly on the breakpoint, where one dilution flips the call — flag those, don't silently keep them. One thing this slide asserts but does not yet show: how you FIND those 12 replicates. You cannot eyeball 738 spectra pairwise, and the file names lie — so the next slide does it properly, by deduplicating in EMBEDDING space with a cosine ruler, as a do-it-together. And the ordering rule for the rest of Part B: curate BEFORE you reweight or synthesise, or every later move amplifies the mislabelled spectra.</a:t>
+            </a:r>
+          </a:p>
+        </p:txBody>
+      </p:sp>
+      <p:sp>
+        <p:nvSpPr>
+          <p:cNvPr id="4" name="Slide Number Placeholder 3"/>
+          <p:cNvSpPr>
+            <a:spLocks noGrp="1"/>
+          </p:cNvSpPr>
+          <p:nvPr>
+            <p:ph type="sldNum" sz="quarter" idx="5"/>
+          </p:nvPr>
+        </p:nvSpPr>
+        <p:spPr/>
       </p:sp>
     </p:spTree>
   </p:cSld>
@@ -625,18 +625,6 @@
       </p:grpSpPr>
       <p:sp>
         <p:nvSpPr>
-          <p:cNvPr id="2" name="Slide Image Placeholder 1"/>
-          <p:cNvSpPr>
-            <a:spLocks noGrp="1" noRot="1" noChangeAspect="1"/>
-          </p:cNvSpPr>
-          <p:nvPr>
-            <p:ph type="sldImg" idx="2"/>
-          </p:nvPr>
-        </p:nvSpPr>
-        <p:spPr/>
-      </p:sp>
-      <p:sp>
-        <p:nvSpPr>
           <p:cNvPr id="3" name="Notes Placeholder 2"/>
           <p:cNvSpPr>
             <a:spLocks noGrp="1"/>
@@ -651,22 +639,10 @@
           <a:lstStyle/>
           <a:p>
             <a:r>
-              <a:t>The workhorse of the menu and the one they will actually type. THE RULE, which is sklearn's class_weight='balanced' and PyTorch's weight= argument: w_c = N / (K · n_c) — the total, over the number of classes times that class's count. Do it together on the real split: resistant = 738/(2×41) = 9.00; susceptible = 738/(2×697) = 0.53. Ask for the ratio: 9.00/0.53 = 17, which is exactly 697/41 — the formula reproduces the imbalance by construction, so in the loss one resistant spectrum now shouts as loud as 17 susceptible ones. Then the three siblings and what each really means on spectra. OVERSAMPLE: draw each of the 41 about 17 times per epoch (a WeightedRandomSampler); same effect, more compute, and repeating the SAME spectrum invites memorisation. UNDERSAMPLE: cut the majority to 41 — you throw away 656 real spectra, which is almost never the right trade, though it is defensible when the majority is enormous and redundant. AUGMENT: covered on its own slide just before this one — new VIEWS of the 41 you already have, which is the Lab 5 Track A blank, and unlike SMOTE every augmented spectrum is still something an instrument could produce. Refer back to it rather than re-explaining. One warning to give out loud: weighting and oversampling both change the EFFECTIVE prevalence the model sees, so its output probabilities are no longer calibrated to the real 6% — recalibrate before you quote a probability to a clinician. SMOTE is the fourth sibling and gets the next slide because it INVENTS points rather than reusing them.</a:t>
-            </a:r>
-          </a:p>
-        </p:txBody>
-      </p:sp>
-      <p:sp>
-        <p:nvSpPr>
-          <p:cNvPr id="4" name="Slide Number Placeholder 3"/>
-          <p:cNvSpPr>
-            <a:spLocks noGrp="1"/>
-          </p:cNvSpPr>
-          <p:nvPr>
-            <p:ph type="sldNum" sz="quarter" idx="5"/>
-          </p:nvPr>
-        </p:nvSpPr>
-        <p:spPr/>
+              <a:t>DO-IT-TOGETHER, and the second half of curation — the mechanism behind the '−12 replicate spectra grouped' step you just saw. Start with the problem: the previous slide asserted that 12 of our 738 spectra are repeat shots of an isolate already in the set. How would you actually find them in a real project? Not by eye — 738 spectra is 272,000 pairs. Not by file name or isolate ID either, because those are exactly what is unreliable in a merged, multi-site dataset (that is WHY the duplicates are there). So we let the model tell us. STEP 1, THE EMBEDDING. Push every spectrum through the trained CNN and stop one layer early: the activations of that last hidden layer are a short vector — a few hundred numbers instead of 6,000 — and that vector is the spectrum's EMBEDDING. This is Lecture 7's idea exactly ('things become coordinates'), and Lecture 5's feature maps are what produce it: the network has already learned which peak patterns matter, so spectra it considers alike land near each other. Left panel: every dot is one spectrum, and the three amber rings are the giveaway — a tight little knot of points where a single isolate was shot four times. STEP 2, THE RULER, and this is the arithmetic we do together, so work it cell by cell on the board. cos(a, b) = (a·b) / (|a|·|b|) — the dot product from Lecture 7's attention scores, divided by both lengths so only the DIRECTION counts. Take three toy 3-bin spectra. a = (3, 4, 0) and b = (6, 8, 0): the dot product is 3·6 + 4·8 + 0·0 = 18 + 32 + 0 = 50; |a| = √(9+16) = 5; |b| = √(36+64) = 10; so cos = 50 / (5 × 10) = 50/50 = 1.00. Ask the room what that means before you say it: b is exactly twice a, which is the SAME peak pattern at twice the total ion current — a second shot of the same colony, a hotter spot on the plate. Dividing by the lengths is precisely what makes the ruler blind to that intensity difference, and it is why cosine, not raw distance, is the right tool. Now a against c = (0, 4, 3): dot product = 3·0 + 4·4 + 0·3 = 16; |a| = 5, |c| = √(16+9) = 5; cos = 16/25 = 0.64. Different pattern, different isolate — keep both. STEP 3, THE RULE. Set a threshold: cos ≥ 0.99 means the same isolate, so keep one member of each cluster and drop the rest. On our split that is the 12 spectra (2 R, 10 S) from the curation pipeline, which is how the two slides tie together. WHY IT MATTERS, and say this as the payoff: a duplicate that lands in train AND test is leakage — the model has literally seen the test spectrum, so your AUPRC is a fiction. With a 41-member resistant class, two leaked resistant isolates can move the number by several points. This is the commonest way a clinical ML paper reports a score nobody can reproduce. TWO HONEST CAVEATS. (1) The threshold is a judgement call — 0.99 is strict; too low and you throw away genuinely distinct isolates of the same clone. (2) Chicken-and-egg: the embedding comes from a model trained on the un-deduplicated data, so in practice you iterate, or use a generic/pretrained encoder for the first pass. Assessed in Quiz 10 Q3(a), where the situation now names the repeated isolate. Then on to making the rare class count.</a:t>
+            </a:r>
+          </a:p>
+        </p:txBody>
       </p:sp>
     </p:spTree>
   </p:cSld>
@@ -695,18 +671,6 @@
       </p:grpSpPr>
       <p:sp>
         <p:nvSpPr>
-          <p:cNvPr id="2" name="Slide Image Placeholder 1"/>
-          <p:cNvSpPr>
-            <a:spLocks noGrp="1" noRot="1" noChangeAspect="1"/>
-          </p:cNvSpPr>
-          <p:nvPr>
-            <p:ph type="sldImg" idx="2"/>
-          </p:nvPr>
-        </p:nvSpPr>
-        <p:spPr/>
-      </p:sp>
-      <p:sp>
-        <p:nvSpPr>
           <p:cNvPr id="3" name="Notes Placeholder 2"/>
           <p:cNvSpPr>
             <a:spLocks noGrp="1"/>
@@ -721,22 +685,10 @@
           <a:lstStyle/>
           <a:p>
             <a:r>
-              <a:t>Do-it-together (guided cell by cell), and the fourth member of the reweighting family from the previous slide — the only one that INVENTS a data point instead of reusing one. SMOTE = Synthetic Minority Over-sampling TEchnique (Chawla et al. 2002): instead of copying rare examples, it MANUFACTURES new ones on the line between two real minority points. Formula on screen: synthetic = A + λ·(B−A), with λ between 0 and 1 sliding the new point along the segment. LEFT PANEL, the arithmetic. Two toy features stand in for two m/z-bin intensities — bin 1 is m/z 2,700, bin 2 is m/z 5,300. A = (2, 6), B = (4, 10). At λ = 0.5, synthetic = (2 + 0.5·(4−2), 6 + 0.5·(10−6)) = (2 + 1, 6 + 2) = (3, 8) — exactly halfway, marked with the star. Do it live: pick λ, compute each coordinate. RIGHT PANEL, the same three points as SPECTRA, which is where the caveat stops being a warning and becomes something they can see. A is a real resistant spectrum: 2 at m/z 2,700, 6 at m/z 5,300, and a peak of 7 at m/z 4,100. B is another real one: 4 and 10 in the same two bins, plus a peak of 5 at m/z 6,800. Blend them at λ = 0.5 and the two shared bins interpolate sensibly — 3 and 8, exactly the toy answer, so the two panels are the same example. But EVERY other bin interpolates too: A's 4,100 peak survives at 0.5 × 7 = 3.5 and B's 6,800 peak at 0.5 × 5 = 2.5. Those are the hatched bars — half-height GHOST peaks belonging to NEITHER isolate. Ask the room what a half-height peak at 4,100 would mean at the bench: a subpopulation? a contaminant? It means nothing — no instrument produced it. Now scale that up: a real spectrum is 6,000-D, so a straight-line blend invents thousands of such peaks. So in practice pair SMOTE with curation and domain augmentation (small m/z shifts, intensity jitter — the Lab 2 move), or simply oversample real spectra. Quiz 10 Q4 asks for λ = 0.25 on the same A and B → (2.5, 7), and its part (b) is exactly this caveat in one sentence; point them at the sheet before moving on to focal loss.</a:t>
-            </a:r>
-          </a:p>
-        </p:txBody>
-      </p:sp>
-      <p:sp>
-        <p:nvSpPr>
-          <p:cNvPr id="4" name="Slide Number Placeholder 3"/>
-          <p:cNvSpPr>
-            <a:spLocks noGrp="1"/>
-          </p:cNvSpPr>
-          <p:nvPr>
-            <p:ph type="sldNum" sz="quarter" idx="5"/>
-          </p:nvPr>
-        </p:nvSpPr>
-        <p:spPr/>
+              <a:t>NEW (instructor, 2026-09-16; retaught on a PICTURE 2026-09-17). Augmentation used to be three words on the class-weights slide. It sits HERE, straight after curation, because it is the other move that works on the DATA rather than on the training — and because the room needs the validity rule before SMOTE turns up two slides later and breaks it. WHY A MICROSCOPY IMAGE AND NOT A SPECTRUM: augmentation is a visual idea, and a ±0.1% m/z shift is invisible from the back of a room, so the concept is carried by a picture where every transform is unmistakable; the arithmetic underneath is still our real DRIAMS split, so the picture is the bridge and the spectra are the payload. It also happens to be the honest example for this audience: a cell has no canonical orientation, so rotating and flipping a smear genuinely preserves the label in a way that rotating, say, a chest film would not. DO-IT-TOGETHER, ~4 minutes. WALK THE SIX PANELS. Original, then flip, rotate 35°, zoom/crop, and dim + noise — ask the room after each one: is it still a band neutrophil? Yes, every time; the transform changed the pixels and not the truth. Then the sixth panel, and this is the one that teaches the rule: crop too aggressively and the neutrophil is simply outside the frame. Same operation, one step further, and the label is now a lie — you would be training the model to call a field of red cells a neutrophil. THE RULE, top right, and both halves matter: a transform is legitimate only if (1) your instrument could have produced it and (2) it does not change the label. THE TRANSFER, one line, say it explicitly so nobody thinks this is only about images: on spectra the same idea is m/z jitter of about ±0.1% because the mass axis drifts run to run, intensity scaling because ionisation efficiency varies, and added baseline and noise for a poorer acquisition — and never a left-right flip, because a mirrored spectrum is not something any instrument produces. THE ARITHMETIC, done together: 41 resistant spectra, 8 augmented views each, so you train on 41 × 8 = 328. Ask for the new batch imbalance before revealing it — 697 to 328, about 2.1 to 1, against the 697 to 41 ≈ 17 to 1 you started with. That is the biggest single change to effective imbalance in Part B and it costs no new data. THE TRAP, a callback to the slide you just did: augment AFTER the train/test split, never before, or eight views of one isolate scatter across both sides and the model recognises the isolate rather than resistance — the same leakage the embedding-dedup pass removed. THE HONEST FOOTER: still 41 isolates. Augmentation multiplies views, not biology, and your confidence interval is set by the 41. FORWARD POINTER: hold the validity rule, because SMOTE breaks it — a straight-line blend of two real 6000-dim spectra is NOT something an instrument could produce. ASSESSMENT (rule 3): this is the Lab 5 Track A blank — `augment`, an m/z-jitter function whose asserts check that it keeps the shape and changes the values. IMAGE CREDIT is on the figure: Bobjgalindo, 'Band neutrophil', Wikimedia Commons, CC BY-SA 4.0; the six views are produced by the course at build time from that one file.</a:t>
+            </a:r>
+          </a:p>
+        </p:txBody>
       </p:sp>
     </p:spTree>
   </p:cSld>
@@ -791,7 +743,7 @@
           <a:lstStyle/>
           <a:p>
             <a:r>
-              <a:t>I-DO with the whole curve AND the numbers (rule 6). Plain cross-entropy is −ln p on the true class; every example counts by how wrong it is, but a sea of easy, already-correct majority examples still adds up and drowns the rare, hard ones. FOCAL LOSS (Lin et al. 2017) multiplies CE by a 'focusing' factor (1 − p)^γ, which shrinks toward zero as the model grows confident (p → 1). READ THE CURVE FIRST, left panel, and let the shape do the teaching. The black curve is γ = 0 — that IS plain cross-entropy, the −ln p from Lecture 2. Now watch what raising γ does: at the left edge (p small, the model badly wrong) every curve is high and they stay close together — focal loss does NOT let go of examples the model is failing. Move right into the shaded 'already easy' band (p &gt; 0.8) and the curves peel apart and collapse to the axis: the confident examples stop contributing almost entirely. That gap between the black and red curves on the right, and their near-agreement at p = 0.5, is the whole mechanism in one picture. γ is a dial: γ = 0 is plain CE, γ = 2 is the usual default (the red curve), γ = 5 is aggressive. THEN THE TWO POINTS, marked on the curve and worked in the right panel. EASY, confident (p = 0.90): plain CE = −ln 0.90 = 0.105; factor = (1 − 0.90)² = (0.10)² = 0.01; FL = 0.01 × 0.105 = 0.00105 ≈ 0.001 — turned DOWN about 100×. HARD, on the boundary (p = 0.50): plain CE = −ln 0.50 = 0.693; factor = (0.50)² = 0.25; FL = 0.25 × 0.693 = 0.173 — barely reduced. The ratio is the point: under plain CE the hard case counts 0.693 / 0.105 = 6.6× the easy one; under focal loss it counts 0.173 / 0.00105 = 165×. Name the hard cases concretely, because 'low confidence' is abstract until you do: an isolate whose MIC sits one dilution either side of the breakpoint, so the S/R label is nearly a coin toss; a heteroresistant population where only a subclone carries the mechanism, so the spectrum is a blend; a low-biomass or poorly-crystallised run where the peaks the model needs are faint; and a borderline species that shares peaks with the target. Those are the spectra focal loss keeps loud. One practical note: focal loss composes with class weights — the α-weighted form is just this multiplied by the class weight from the earlier slide. No derivation, no separate quiz item — this is the I-do that anchors the 'focal loss' card the Q3 match asks about.</a:t>
+              <a:t>The workhorse of the menu and the one they will actually type. THE RULE, which is sklearn's class_weight='balanced' and PyTorch's weight= argument: w_c = N / (K · n_c) — the total, over the number of classes times that class's count. Do it together on the real split: resistant = 738/(2×41) = 9.00; susceptible = 738/(2×697) = 0.53. Ask for the ratio: 9.00/0.53 = 17, which is exactly 697/41 — the formula reproduces the imbalance by construction, so in the loss one resistant spectrum now shouts as loud as 17 susceptible ones. Then the three siblings and what each really means on spectra. OVERSAMPLE: draw each of the 41 about 17 times per epoch (a WeightedRandomSampler); same effect, more compute, and repeating the SAME spectrum invites memorisation. UNDERSAMPLE: cut the majority to 41 — you throw away 656 real spectra, which is almost never the right trade, though it is defensible when the majority is enormous and redundant. AUGMENT: covered on its own slide just before this one — new VIEWS of the 41 you already have, which is the Lab 5 Track A blank, and unlike SMOTE every augmented spectrum is still something an instrument could produce. Refer back to it rather than re-explaining. One warning to give out loud: weighting and oversampling both change the EFFECTIVE prevalence the model sees, so its output probabilities are no longer calibrated to the real 6% — recalibrate before you quote a probability to a clinician. SMOTE is the fourth sibling and gets the next slide because it INVENTS points rather than reusing them.</a:t>
             </a:r>
           </a:p>
         </p:txBody>
@@ -861,7 +813,64 @@
           <a:lstStyle/>
           <a:p>
             <a:r>
-              <a:t>The last card on the menu, and now a concrete SCHEDULE rather than a slogan. Curriculum learning (Bengio et al. 2009) borrows from how we teach humans: start simple, build up. LEFT PANEL — the schedule you would actually code, on our own split, over 20 epochs. Two knobs, two curves. The TEAL curve is the fraction of each batch that is resistant: hold it at 50% for epochs 1-4 — class-balanced batches, so the rare class cannot be drowned while the model is learning the basics — then anneal it linearly down, reaching the TRUE 6% prevalence at epoch 12 and holding there. That tail matters: a model that finishes training at the real prevalence finishes CALIBRATED, which is the fix for the calibration warning we gave on the class-weights slide. The RED dashed curve is the fraction of hard, borderline spectra admitted at all: 0% for epochs 1-4 (only clean, high-biomass, well-crystallised runs from ONE site), then ramped in from epoch 5 and fully admitted by epoch 14 — low-biomass runs, MICs sitting on the breakpoint, every site. Read the three bands aloud: START (learn the assay), THEN (add the ambiguity), FINALLY (the real world, at the real prevalence). Note that one-site → all-sites is the version that matters for a multi-centre project, and it pairs with the external-validation guardrail from Part A. RIGHT PANEL — what it buys, and be honest about what this panel is: it is labelled ILLUSTRATIVE on the figure because it is a SHAPE, not measured data from our split; say that out loud. The claim it makes is the reproducible one from the literature: the curriculum run climbs smoothly because the model meets the easy signal first, while the shuffled run lurches whenever a batch happens to be all-easy or all-hard — which is exactly the 'training is unstable across easy/hard batches' symptom on the menu, and exactly what Q3(d) asks about. Land the footer: both runs saw the SAME 41 resistant spectra. Curriculum reorders the diet; like every other move in Part B, it adds no new biological signal. That is the last card — send them to Quiz 10 Q3 to match all four moves to their symptoms, and Q4 for the SMOTE point.</a:t>
+              <a:rPr dirty="0"/>
+              <a:t>Do-it-together (guided cell by cell), and the fourth member of the reweighting family from the previous slide — the only one that INVENTS a data point instead of reusing one. SMOTE = Synthetic Minority Over-sampling </a:t>
+            </a:r>
+            <a:r>
+              <a:rPr dirty="0" err="1"/>
+              <a:t>TEchnique</a:t>
+            </a:r>
+            <a:r>
+              <a:rPr dirty="0"/>
+              <a:t> (Chawla et al. 2002): instead of copying rare examples, it MANUFACTURES new ones on the line between two real minority points. Formula on screen: synthetic = A + </a:t>
+            </a:r>
+            <a:r>
+              <a:rPr dirty="0" err="1"/>
+              <a:t>λ</a:t>
+            </a:r>
+            <a:r>
+              <a:rPr dirty="0"/>
+              <a:t>·(B−A), with </a:t>
+            </a:r>
+            <a:r>
+              <a:rPr dirty="0" err="1"/>
+              <a:t>λ</a:t>
+            </a:r>
+            <a:r>
+              <a:rPr dirty="0"/>
+              <a:t> between 0 and 1 sliding the new point along the segment. LEFT PANEL, the arithmetic. Two toy features stand in for two m/z-bin intensities — bin 1 is m/z 2,700, bin 2 is m/z 5,300. A = (2, 6), B = (4, 10). At </a:t>
+            </a:r>
+            <a:r>
+              <a:rPr dirty="0" err="1"/>
+              <a:t>λ</a:t>
+            </a:r>
+            <a:r>
+              <a:rPr dirty="0"/>
+              <a:t> = 0.5, synthetic = (2 + 0.5·(4−2), 6 + 0.5·(10−6)) = (2 + 1, 6 + 2) = (3, 8) — exactly halfway, marked with the star. Do it live: pick </a:t>
+            </a:r>
+            <a:r>
+              <a:rPr dirty="0" err="1"/>
+              <a:t>λ</a:t>
+            </a:r>
+            <a:r>
+              <a:rPr dirty="0"/>
+              <a:t>, compute each coordinate. RIGHT PANEL, the same three points as SPECTRA, which is where the caveat stops being a warning and becomes something they can see. A is a real resistant spectrum: 2 at m/z 2,700, 6 at m/z 5,300, and a peak of 7 at m/z 4,100. B is another real one: 4 and 10 in the same two bins, plus a peak of 5 at m/z 6,800. Blend them at </a:t>
+            </a:r>
+            <a:r>
+              <a:rPr dirty="0" err="1"/>
+              <a:t>λ</a:t>
+            </a:r>
+            <a:r>
+              <a:rPr dirty="0"/>
+              <a:t> = 0.5 and the two shared bins interpolate sensibly — 3 and 8, exactly the toy answer, so the two panels are the same example. But EVERY other bin interpolates too: A's 4,100 peak survives at 0.5 × 7 = 3.5 and B's 6,800 peak at 0.5 × 5 = 2.5. Those are the hatched bars — half-height GHOST peaks belonging to NEITHER isolate. Ask the room what a half-height peak at 4,100 would mean at the bench: a subpopulation? a contaminant? It means nothing — no instrument produced it. Now scale that up: a real spectrum is 6,000-D, so a straight-line blend invents thousands of such peaks. So in practice pair SMOTE with curation and domain augmentation (small m/z shifts, intensity jitter — the Lab 2 move), or simply oversample real spectra. Quiz 10 Q4 asks for </a:t>
+            </a:r>
+            <a:r>
+              <a:rPr dirty="0" err="1"/>
+              <a:t>λ</a:t>
+            </a:r>
+            <a:r>
+              <a:rPr dirty="0"/>
+              <a:t> = 0.25 on the same A and B → (2.5, 7), and its part (b) is exactly this caveat in one sentence; point them at the sheet before moving on to focal loss.</a:t>
             </a:r>
           </a:p>
         </p:txBody>
@@ -905,18 +914,6 @@
       </p:grpSpPr>
       <p:sp>
         <p:nvSpPr>
-          <p:cNvPr id="2" name="Slide Image Placeholder 1"/>
-          <p:cNvSpPr>
-            <a:spLocks noGrp="1" noRot="1" noChangeAspect="1"/>
-          </p:cNvSpPr>
-          <p:nvPr>
-            <p:ph type="sldImg" idx="2"/>
-          </p:nvPr>
-        </p:nvSpPr>
-        <p:spPr/>
-      </p:sp>
-      <p:sp>
-        <p:nvSpPr>
           <p:cNvPr id="3" name="Notes Placeholder 2"/>
           <p:cNvSpPr>
             <a:spLocks noGrp="1"/>
@@ -931,25 +928,10 @@
           <a:lstStyle/>
           <a:p>
             <a:r>
-              <a:t>Recap = the Lecture 10 outcomes, each already exercised this hour: the three-rate confusion-matrix computation (Q1), the AUROC-vs-AUPRC reading and decision (Q2), the external/temporal validation guardrail, and the four treatments — curation, SMOTE (worked), class weights / focal loss (worked), curriculum — with the honest "none add new signal" caveat (Q3-Q4). Quiz 10 was the distributed assessment, filled across the hour and now largely done. Frame the sheet as a reusable checklist they can run against any imbalanced-data project in their own lab.</a:t>
-            </a:r>
-          </a:p>
-          <a:p>
-            <a:endParaRPr/>
-          </a:p>
-        </p:txBody>
-      </p:sp>
-      <p:sp>
-        <p:nvSpPr>
-          <p:cNvPr id="4" name="Slide Number Placeholder 3"/>
-          <p:cNvSpPr>
-            <a:spLocks noGrp="1"/>
-          </p:cNvSpPr>
-          <p:nvPr>
-            <p:ph type="sldNum" sz="quarter" idx="5"/>
-          </p:nvPr>
-        </p:nvSpPr>
-        <p:spPr/>
+              <a:t>YOU-DO = Quiz 10 Q4, straight after the SMOTE do-it-together. Worked answer: (a) synthetic = (2 + 0.25·2, 6 + 0.25·4) = (2 + 0.5, 6 + 1) = (2.5, 7) — a quarter of the way from A toward B. (b) A straight-line blend of two real 6,000-dimensional spectra can produce a non-physical spectrum (a peak pattern no instrument would ever record), so pair SMOTE with curation and domain augmentation (m/z jitter), or simply oversample real spectra.</a:t>
+            </a:r>
+          </a:p>
+        </p:txBody>
       </p:sp>
     </p:spTree>
   </p:cSld>
@@ -1004,11 +986,8 @@
           <a:lstStyle/>
           <a:p>
             <a:r>
-              <a:t>Close by bridging forward and back. Forward: Lecture 11 tackles the common case where labels are scarce or absent — autoencoders and VAEs — and its anomaly threshold is exactly a precision/recall decision on a rare positive, so this hour's metrics carry straight into Lab 4. Back: the imbalance treatments and the external/temporal-validation guardrail are the tools for every rare-class project they plan. Run Discussion D4 as a think-pair-share tied to their own bench: where does a rare event hide in a majority-normal stream, and which metric would they trust to know a model caught it? Harvest two or three, then hand the last minutes to finishing Quiz 10 as Lab 4 context loads.</a:t>
-            </a:r>
-          </a:p>
-          <a:p>
-            <a:endParaRPr/>
+              <a:t>I-DO with the whole curve AND the numbers (rule 6). Plain cross-entropy is −ln p on the true class; every example counts by how wrong it is, but a sea of easy, already-correct majority examples still adds up and drowns the rare, hard ones. FOCAL LOSS (Lin et al. 2017) multiplies CE by a 'focusing' factor (1 − p)^γ, which shrinks toward zero as the model grows confident (p → 1). READ THE CURVE FIRST, left panel, and let the shape do the teaching. The black curve is γ = 0 — that IS plain cross-entropy, the −ln p from Lecture 2. Now watch what raising γ does: at the left edge (p small, the model badly wrong) every curve is high and they stay close together — focal loss does NOT let go of examples the model is failing. Move right into the shaded 'already easy' band (p &gt; 0.8) and the curves peel apart and collapse to the axis: the confident examples stop contributing almost entirely. That gap between the black and red curves on the right, and their near-agreement at p = 0.5, is the whole mechanism in one picture. γ is a dial: γ = 0 is plain CE, γ = 2 is the usual default (the red curve), γ = 5 is aggressive. THEN THE TWO POINTS, marked on the curve and worked in the right panel. EASY, confident (p = 0.90): plain CE = −ln 0.90 = 0.105; factor = (1 − 0.90)² = (0.10)² = 0.01; FL = 0.01 × 0.105 = 0.00105 ≈ 0.001 — turned DOWN about 100×. HARD, on the boundary (p = 0.50): plain CE = −ln 0.50 = 0.693; factor = (0.50)² = 0.25; FL = 0.25 × 0.693 = 0.173 — barely reduced. The ratio is the point: under plain CE the hard case counts 0.693 / 0.105 = 6.6× the easy one; under focal loss it counts 0.173 / 0.00105 = 165×. Name the hard cases concretely, because 'low confidence' is abstract until you do: an isolate whose MIC sits one dilution either side of the breakpoint, so the S/R label is nearly a coin toss; a heteroresistant population where only a subclone carries the mechanism, so the spectrum is a blend; a low-biomass or poorly-crystallised run where the peaks the model needs are faint; and a borderline species that shares peaks with the target. Those are the spectra focal loss keeps loud. One practical note: focal loss composes with class weights — the α-weighted form is just this multiplied by the class weight from the earlier slide. No derivation, no separate quiz item — this is the I-do that anchors the 'focal loss' card the Q3 match asks about.</a:t>
+            </a:r>
           </a:p>
         </p:txBody>
       </p:sp>
@@ -1103,7 +1082,7 @@
 </file>
 
 <file path=ppt/notesSlides/notesSlide20.xml><?xml version="1.0" encoding="utf-8"?>
-<p:notes xmlns:a="http://schemas.openxmlformats.org/drawingml/2006/main" xmlns:p="http://schemas.openxmlformats.org/presentationml/2006/main" xmlns:r="http://schemas.openxmlformats.org/officeDocument/2006/relationships">
+<p:notes xmlns:a="http://schemas.openxmlformats.org/drawingml/2006/main" xmlns:r="http://schemas.openxmlformats.org/officeDocument/2006/relationships" xmlns:p="http://schemas.openxmlformats.org/presentationml/2006/main">
   <p:cSld>
     <p:spTree>
       <p:nvGrpSpPr>
@@ -1121,6 +1100,18 @@
       </p:grpSpPr>
       <p:sp>
         <p:nvSpPr>
+          <p:cNvPr id="2" name="Slide Image Placeholder 1"/>
+          <p:cNvSpPr>
+            <a:spLocks noGrp="1" noRot="1" noChangeAspect="1"/>
+          </p:cNvSpPr>
+          <p:nvPr>
+            <p:ph type="sldImg" idx="2"/>
+          </p:nvPr>
+        </p:nvSpPr>
+        <p:spPr/>
+      </p:sp>
+      <p:sp>
+        <p:nvSpPr>
           <p:cNvPr id="3" name="Notes Placeholder 2"/>
           <p:cNvSpPr>
             <a:spLocks noGrp="1"/>
@@ -1135,10 +1126,22 @@
           <a:lstStyle/>
           <a:p>
             <a:r>
-              <a:t>NEW (instructor, 2026-09-16; retaught on a PICTURE 2026-09-17). Augmentation used to be three words on the class-weights slide. It sits HERE, straight after curation, because it is the other move that works on the DATA rather than on the training — and because the room needs the validity rule before SMOTE turns up two slides later and breaks it. WHY A MICROSCOPY IMAGE AND NOT A SPECTRUM: augmentation is a visual idea, and a ±0.1% m/z shift is invisible from the back of a room, so the concept is carried by a picture where every transform is unmistakable; the arithmetic underneath is still our real DRIAMS split, so the picture is the bridge and the spectra are the payload. It also happens to be the honest example for this audience: a cell has no canonical orientation, so rotating and flipping a smear genuinely preserves the label in a way that rotating, say, a chest film would not. DO-IT-TOGETHER, ~4 minutes. WALK THE SIX PANELS. Original, then flip, rotate 35°, zoom/crop, and dim + noise — ask the room after each one: is it still a band neutrophil? Yes, every time; the transform changed the pixels and not the truth. Then the sixth panel, and this is the one that teaches the rule: crop too aggressively and the neutrophil is simply outside the frame. Same operation, one step further, and the label is now a lie — you would be training the model to call a field of red cells a neutrophil. THE RULE, top right, and both halves matter: a transform is legitimate only if (1) your instrument could have produced it and (2) it does not change the label. THE TRANSFER, one line, say it explicitly so nobody thinks this is only about images: on spectra the same idea is m/z jitter of about ±0.1% because the mass axis drifts run to run, intensity scaling because ionisation efficiency varies, and added baseline and noise for a poorer acquisition — and never a left-right flip, because a mirrored spectrum is not something any instrument produces. THE ARITHMETIC, done together: 41 resistant spectra, 8 augmented views each, so you train on 41 × 8 = 328. Ask for the new batch imbalance before revealing it — 697 to 328, about 2.1 to 1, against the 697 to 41 ≈ 17 to 1 you started with. That is the biggest single change to effective imbalance in Part B and it costs no new data. THE TRAP, a callback to the slide you just did: augment AFTER the train/test split, never before, or eight views of one isolate scatter across both sides and the model recognises the isolate rather than resistance — the same leakage the embedding-dedup pass removed. THE HONEST FOOTER: still 41 isolates. Augmentation multiplies views, not biology, and your confidence interval is set by the 41. FORWARD POINTER: hold the validity rule, because SMOTE breaks it — a straight-line blend of two real 6000-dim spectra is NOT something an instrument could produce. ASSESSMENT (rule 3): this is the Lab 5 Track A blank — `augment`, an m/z-jitter function whose asserts check that it keeps the shape and changes the values. IMAGE CREDIT is on the figure: Bobjgalindo, 'Band neutrophil', Wikimedia Commons, CC BY-SA 4.0; the six views are produced by the course at build time from that one file.</a:t>
-            </a:r>
-          </a:p>
-        </p:txBody>
+              <a:t>The last card on the menu, and now a concrete SCHEDULE rather than a slogan. Curriculum learning (Bengio et al. 2009) borrows from how we teach humans: start simple, build up. LEFT PANEL — the schedule you would actually code, on our own split, over 20 epochs. Two knobs, two curves. The TEAL curve is the fraction of each batch that is resistant: hold it at 50% for epochs 1-4 — class-balanced batches, so the rare class cannot be drowned while the model is learning the basics — then anneal it linearly down, reaching the TRUE 6% prevalence at epoch 12 and holding there. That tail matters: a model that finishes training at the real prevalence finishes CALIBRATED, which is the fix for the calibration warning we gave on the class-weights slide. The RED dashed curve is the fraction of hard, borderline spectra admitted at all: 0% for epochs 1-4 (only clean, high-biomass, well-crystallised runs from ONE site), then ramped in from epoch 5 and fully admitted by epoch 14 — low-biomass runs, MICs sitting on the breakpoint, every site. Read the three bands aloud: START (learn the assay), THEN (add the ambiguity), FINALLY (the real world, at the real prevalence). Note that one-site → all-sites is the version that matters for a multi-centre project, and it pairs with the external-validation guardrail from Part A. RIGHT PANEL — what it buys, and be honest about what this panel is: it is labelled ILLUSTRATIVE on the figure because it is a SHAPE, not measured data from our split; say that out loud. The claim it makes is the reproducible one from the literature: the curriculum run climbs smoothly because the model meets the easy signal first, while the shuffled run lurches whenever a batch happens to be all-easy or all-hard — which is exactly the 'training is unstable across easy/hard batches' symptom on the menu, and exactly what Q3(d) asks about. Land the footer: both runs saw the SAME 41 resistant spectra. Curriculum reorders the diet; like every other move in Part B, it adds no new biological signal. That is the last card — send them to Quiz 10 Q3 to match all four moves to their symptoms, and Q4 for the SMOTE point.</a:t>
+            </a:r>
+          </a:p>
+        </p:txBody>
+      </p:sp>
+      <p:sp>
+        <p:nvSpPr>
+          <p:cNvPr id="4" name="Slide Number Placeholder 3"/>
+          <p:cNvSpPr>
+            <a:spLocks noGrp="1"/>
+          </p:cNvSpPr>
+          <p:nvPr>
+            <p:ph type="sldNum" sz="quarter" idx="5"/>
+          </p:nvPr>
+        </p:nvSpPr>
+        <p:spPr/>
       </p:sp>
     </p:spTree>
   </p:cSld>
@@ -1149,7 +1152,7 @@
 </file>
 
 <file path=ppt/notesSlides/notesSlide21.xml><?xml version="1.0" encoding="utf-8"?>
-<p:notes xmlns:a="http://schemas.openxmlformats.org/drawingml/2006/main" xmlns:p="http://schemas.openxmlformats.org/presentationml/2006/main" xmlns:r="http://schemas.openxmlformats.org/officeDocument/2006/relationships">
+<p:notes xmlns:a="http://schemas.openxmlformats.org/drawingml/2006/main" xmlns:r="http://schemas.openxmlformats.org/officeDocument/2006/relationships" xmlns:p="http://schemas.openxmlformats.org/presentationml/2006/main">
   <p:cSld>
     <p:spTree>
       <p:nvGrpSpPr>
@@ -1195,7 +1198,7 @@
 </file>
 
 <file path=ppt/notesSlides/notesSlide22.xml><?xml version="1.0" encoding="utf-8"?>
-<p:notes xmlns:a="http://schemas.openxmlformats.org/drawingml/2006/main" xmlns:p="http://schemas.openxmlformats.org/presentationml/2006/main" xmlns:r="http://schemas.openxmlformats.org/officeDocument/2006/relationships">
+<p:notes xmlns:a="http://schemas.openxmlformats.org/drawingml/2006/main" xmlns:r="http://schemas.openxmlformats.org/officeDocument/2006/relationships" xmlns:p="http://schemas.openxmlformats.org/presentationml/2006/main">
   <p:cSld>
     <p:spTree>
       <p:nvGrpSpPr>
@@ -1213,6 +1216,18 @@
       </p:grpSpPr>
       <p:sp>
         <p:nvSpPr>
+          <p:cNvPr id="2" name="Slide Image Placeholder 1"/>
+          <p:cNvSpPr>
+            <a:spLocks noGrp="1" noRot="1" noChangeAspect="1"/>
+          </p:cNvSpPr>
+          <p:nvPr>
+            <p:ph type="sldImg" idx="2"/>
+          </p:nvPr>
+        </p:nvSpPr>
+        <p:spPr/>
+      </p:sp>
+      <p:sp>
+        <p:nvSpPr>
           <p:cNvPr id="3" name="Notes Placeholder 2"/>
           <p:cNvSpPr>
             <a:spLocks noGrp="1"/>
@@ -1227,10 +1242,25 @@
           <a:lstStyle/>
           <a:p>
             <a:r>
-              <a:t>YOU-DO = Quiz 10 Q4, straight after the SMOTE do-it-together. Worked answer: (a) synthetic = (2 + 0.25·2, 6 + 0.25·4) = (2 + 0.5, 6 + 1) = (2.5, 7) — a quarter of the way from A toward B. (b) A straight-line blend of two real 6,000-dimensional spectra can produce a non-physical spectrum (a peak pattern no instrument would ever record), so pair SMOTE with curation and domain augmentation (m/z jitter), or simply oversample real spectra.</a:t>
-            </a:r>
-          </a:p>
-        </p:txBody>
+              <a:t>Recap = the Lecture 10 outcomes, each already exercised this hour: the three-rate confusion-matrix computation (Q1), the AUROC-vs-AUPRC reading and decision (Q2), the external/temporal validation guardrail, and the four treatments — curation, SMOTE (worked), class weights / focal loss (worked), curriculum — with the honest "none add new signal" caveat (Q3-Q4). Quiz 10 was the distributed assessment, filled across the hour and now largely done. Frame the sheet as a reusable checklist they can run against any imbalanced-data project in their own lab.</a:t>
+            </a:r>
+          </a:p>
+          <a:p>
+            <a:endParaRPr/>
+          </a:p>
+        </p:txBody>
+      </p:sp>
+      <p:sp>
+        <p:nvSpPr>
+          <p:cNvPr id="4" name="Slide Number Placeholder 3"/>
+          <p:cNvSpPr>
+            <a:spLocks noGrp="1"/>
+          </p:cNvSpPr>
+          <p:nvPr>
+            <p:ph type="sldNum" sz="quarter" idx="5"/>
+          </p:nvPr>
+        </p:nvSpPr>
+        <p:spPr/>
       </p:sp>
     </p:spTree>
   </p:cSld>
@@ -1241,7 +1271,7 @@
 </file>
 
 <file path=ppt/notesSlides/notesSlide23.xml><?xml version="1.0" encoding="utf-8"?>
-<p:notes xmlns:a="http://schemas.openxmlformats.org/drawingml/2006/main" xmlns:p="http://schemas.openxmlformats.org/presentationml/2006/main" xmlns:r="http://schemas.openxmlformats.org/officeDocument/2006/relationships">
+<p:notes xmlns:a="http://schemas.openxmlformats.org/drawingml/2006/main" xmlns:r="http://schemas.openxmlformats.org/officeDocument/2006/relationships" xmlns:p="http://schemas.openxmlformats.org/presentationml/2006/main">
   <p:cSld>
     <p:spTree>
       <p:nvGrpSpPr>
@@ -1259,6 +1289,18 @@
       </p:grpSpPr>
       <p:sp>
         <p:nvSpPr>
+          <p:cNvPr id="2" name="Slide Image Placeholder 1"/>
+          <p:cNvSpPr>
+            <a:spLocks noGrp="1" noRot="1" noChangeAspect="1"/>
+          </p:cNvSpPr>
+          <p:nvPr>
+            <p:ph type="sldImg" idx="2"/>
+          </p:nvPr>
+        </p:nvSpPr>
+        <p:spPr/>
+      </p:sp>
+      <p:sp>
+        <p:nvSpPr>
           <p:cNvPr id="3" name="Notes Placeholder 2"/>
           <p:cNvSpPr>
             <a:spLocks noGrp="1"/>
@@ -1273,10 +1315,25 @@
           <a:lstStyle/>
           <a:p>
             <a:r>
-              <a:t>YOU-DO = Quiz 10 Q2, straight after 'why AUROC flatters'. The formulas it needs are restated on the slide. Worked answer: (a) FPR = 32/(32+448) = 32/480 = 0.067; TPR = 0.80 — the point (0.067, 0.80) hugs the top-left, so the ROC/AUROC looks excellent. (b) PR point =(recall 0.80, precision 0.33); PR baseline = prevalence = 20/500 = 0.04 (ROC's baseline is 0.5). (c) Trust the AUPRC / PR curve (reported with recall). At 4% prevalence the 480 true-negatives dominate, so a tiny FPR keeps AUROC flatteringly high even though precision is only 0.33 (2 of 3 flags false). AUROC is invariant to the class ratio; AUPRC collapses toward the prevalence, so it stays honest as recall grows (Saito &amp; Rehmsmeier 2015).</a:t>
-            </a:r>
-          </a:p>
-        </p:txBody>
+              <a:t>Close by bridging forward and back. Forward: Lecture 11 tackles the common case where labels are scarce or absent — autoencoders and VAEs — and its anomaly threshold is exactly a precision/recall decision on a rare positive, so this hour's metrics carry straight into Lab 4. Back: the imbalance treatments and the external/temporal-validation guardrail are the tools for every rare-class project they plan. Run Discussion D4 as a think-pair-share tied to their own bench: where does a rare event hide in a majority-normal stream, and which metric would they trust to know a model caught it? Harvest two or three, then hand the last minutes to finishing Quiz 10 as Lab 4 context loads.</a:t>
+            </a:r>
+          </a:p>
+          <a:p>
+            <a:endParaRPr/>
+          </a:p>
+        </p:txBody>
+      </p:sp>
+      <p:sp>
+        <p:nvSpPr>
+          <p:cNvPr id="4" name="Slide Number Placeholder 3"/>
+          <p:cNvSpPr>
+            <a:spLocks noGrp="1"/>
+          </p:cNvSpPr>
+          <p:nvPr>
+            <p:ph type="sldNum" sz="quarter" idx="5"/>
+          </p:nvPr>
+        </p:nvSpPr>
+        <p:spPr/>
       </p:sp>
     </p:spTree>
   </p:cSld>
@@ -1404,7 +1461,7 @@
           <a:lstStyle/>
           <a:p>
             <a:r>
-              <a:t>I-DO, the one numeric mechanic of Part A, and the three formulas the quiz needs ON THE DECK before it is asked (rule 3). Read the confusion matrix: rows are the model's CALL (+ / −), columns the TRUTH (+ = resistant, − = susceptible). TP = 30 resistant correctly caught, FN = 11 resistant MISSED, FP = 60 susceptible wrongly flagged, TN = 637 susceptible correctly cleared (the 41 R and 697 S of DRIAMS). Three rates: RECALL / SENSITIVITY = TP/(TP+FN) = 30/(30+11) = 30/41 = 0.73 — we catch about three of every four resistant isolates and MISS one in four. SPECIFICITY = TN/(TN+FP) = 637/(637+60) = 637/697 = 0.91 — we correctly clear 91% of susceptibles. PRECISION = TP/(TP+FP) = 30/(30+60) = 30/90 = 0.33 — of every three isolates we FLAG as resistant, only one truly is. Precision is the new rate this hour (Lecture 4 had only sens/spec): with a rare positive, even a modest false-positive count (60) swamps the true positives (30). And the trap made exact: accuracy = (30+637)/738 = 667/738 = 90%, but always-"susceptible" scores 697/738 = 94% — HIGHER accuracy, zero sensitivity. Every number is exact and matches the Quiz 10 Q1 key. Next slide the room computes all three on a fresh matrix.</a:t>
+              <a:t>I-DO, the one numeric mechanic of Part A, and the four formulas the quiz needs ON THE DECK before it is asked (rule 3). Read the confusion matrix: rows are the model's CALL (+ / −), columns the TRUTH (+ = resistant, − = susceptible). TP = 30 resistant correctly caught, FN = 11 resistant MISSED, FP = 60 susceptible wrongly flagged, TN = 637 susceptible correctly cleared (the 41 R and 697 S of DRIAMS). Four rates: RECALL / SENSITIVITY = TP/(TP+FN) = 30/(30+11) = 30/41 = 0.73 — we catch about three of every four resistant isolates and MISS one in four. SPECIFICITY = TN/(TN+FP) = 637/(637+60) = 637/697 = 0.91 — we correctly clear 91% of susceptibles. FALSE-POSITIVE RATE (FPR) = FP/(FP+TN) = 60/(60+637) = 60/697 = 0.086 — the share of susceptibles we wrongly flag, 8.6%; it is always exactly 1 − specificity (0.086 + 0.914 = 1), and it is the x-axis of the ROC curve three slides on, so define it now. PRECISION = TP/(TP+FP) = 30/(30+60) = 30/90 = 0.33 — of every three isolates we FLAG as resistant, only one truly is. Precision is the new rate this hour (Lecture 4 had only sens/spec): with a rare positive, even a modest false-positive count (60) swamps the true positives (30). And the trap made exact: accuracy = (30+637)/738 = 667/738 = 90%, but always-"susceptible" scores 697/738 = 94% — HIGHER accuracy, zero sensitivity. Every number is exact and matches the Quiz 10 Q1 key. Next slide the room computes all four on a fresh matrix.</a:t>
             </a:r>
           </a:p>
           <a:p>
@@ -1477,7 +1534,7 @@
           <a:lstStyle/>
           <a:p>
             <a:r>
-              <a:t>YOU-DO = Quiz 10 Q1 (same three formulas, new numbers). A rapid resistance screen on 500 isolates, positive = resistant: TP = 16, FN = 4, FP = 32, TN = 448 (20 R / 480 S). RECALL = TP/(TP+FN) = 16/(16+4) = 16/20 = 0.80 (80%). SPECIFICITY = TN/(TN+FP) = 448/(448+32) = 448/480 = 0.93 (93%). PRECISION = TP/(TP+FP) = 16/(16+32) = 16/48 = 0.33 (33%). Accuracy = (16+448)/500 = 464/500 = 93%, yet an always-"susceptible" model scores 480/500 = 96% and catches 0 of 20 resistant. Which rate to trust? RECALL (sensitivity) — the lab must not miss resistant isolates — reported with PRECISION, because precision 0.33 warns that two-thirds of the flags are false and someone must confirm them. Never accuracy alone. Every value is identical to the Quiz 10 Q1 key. Take the three numbers from the floor, then have them fill Q1.</a:t>
+              <a:t>YOU-DO = Quiz 10 Q1 (same four formulas, new numbers). A rapid resistance screen on 500 isolates, positive = resistant: TP = 16, FN = 4, FP = 32, TN = 448 (20 R / 480 S). RECALL = TP/(TP+FN) = 16/(16+4) = 16/20 = 0.80 (80%). SPECIFICITY = TN/(TN+FP) = 448/(448+32) = 448/480 = 0.93 (93%). FPR = FP/(FP+TN) = 32/(32+448) = 32/480 = 0.067 (6.7%) — exactly 1 − specificity, and the ROC x-coordinate the room reuses in Q2(a). PRECISION = TP/(TP+FP) = 16/(16+32) = 16/48 = 0.33 (33%). Accuracy = (16+448)/500 = 464/500 = 93%, yet an always-"susceptible" model scores 480/500 = 96% and catches 0 of 20 resistant. Which rate to trust? RECALL (sensitivity) — the lab must not miss resistant isolates — reported with PRECISION, because precision 0.33 warns that two-thirds of the flags are false and someone must confirm them. Never accuracy alone. Every value is identical to the Quiz 10 Q1 key. Take the four numbers from the floor, then have them fill Q1.</a:t>
             </a:r>
           </a:p>
           <a:p>
@@ -1620,6 +1677,7 @@
           <a:lstStyle/>
           <a:p>
             <a:r>
+              <a:rPr dirty="0"/>
               <a:t>I-DO: build the curve in front of them from the table they just filled. Take each threshold's row and plot ONE dot — the false-positive rate FPR = FP/(FP+TN) across, the true-positive rate (recall) up: t = 0.9 → (0.014, 0.44); t = 0.5 → (0.086, 0.73); t = 0.2 → (0.301, 0.93). Add the two ends every ROC has for free: flag nothing → (0, 0), flag everything → (1, 1). Join them and you have the RECEIVER OPERATING CHARACTERISTIC — the name is wartime radar, ignore it. AUROC is then exactly what it says: the AREA under that curve, here ≈ 0.90 by adding up the trapezoids. Two anchors to fix the scale: the top-left corner is the perfect classifier (catch everything, no false alarms) so its area is 1.0; the diagonal is a coin flip, area 0.5 — anything below 0.5 means the model is worse than guessing. One plain-English reading worth giving: AUROC is the chance that a randomly chosen resistant isolate scores higher than a randomly chosen susceptible one. The virtue is that it needs no threshold — it is the whole sweep in one number. Hold the applause: the next slide plots the SAME sweep as precision vs. recall, and the two numbers do not agree.</a:t>
             </a:r>
           </a:p>
@@ -3316,7 +3374,7 @@
 </file>
 
 <file path=ppt/slides/slide11.xml><?xml version="1.0" encoding="utf-8"?>
-<p:sld xmlns:a="http://schemas.openxmlformats.org/drawingml/2006/main" xmlns:p="http://schemas.openxmlformats.org/presentationml/2006/main" xmlns:r="http://schemas.openxmlformats.org/officeDocument/2006/relationships">
+<p:sld xmlns:a="http://schemas.openxmlformats.org/drawingml/2006/main" xmlns:r="http://schemas.openxmlformats.org/officeDocument/2006/relationships" xmlns:p="http://schemas.openxmlformats.org/presentationml/2006/main">
   <p:cSld>
     <p:spTree>
       <p:nvGrpSpPr>
@@ -3324,7 +3382,14 @@
         <p:cNvGrpSpPr/>
         <p:nvPr/>
       </p:nvGrpSpPr>
-      <p:grpSpPr/>
+      <p:grpSpPr>
+        <a:xfrm>
+          <a:off x="0" y="0"/>
+          <a:ext cx="0" cy="0"/>
+          <a:chOff x="0" y="0"/>
+          <a:chExt cx="0" cy="0"/>
+        </a:xfrm>
+      </p:grpSpPr>
       <p:sp>
         <p:nvSpPr>
           <p:cNvPr id="2" name="Rectangle 1"/>
@@ -3545,7 +3610,9 @@
         <p:txBody>
           <a:bodyPr rtlCol="0" anchor="ctr"/>
           <a:lstStyle/>
-          <a:p/>
+          <a:p>
+            <a:endParaRPr/>
+          </a:p>
         </p:txBody>
       </p:sp>
       <p:sp>
@@ -3565,7 +3632,7 @@
           <a:noFill/>
         </p:spPr>
         <p:txBody>
-          <a:bodyPr wrap="square" lIns="45720" rIns="45720" tIns="27432" bIns="27432" anchor="t">
+          <a:bodyPr wrap="square" lIns="45720" tIns="27432" rIns="45720" bIns="27432" anchor="t">
             <a:spAutoFit/>
           </a:bodyPr>
           <a:lstStyle/>
@@ -3654,7 +3721,7 @@
           <a:noFill/>
         </p:spPr>
         <p:txBody>
-          <a:bodyPr wrap="square" lIns="45720" rIns="45720" tIns="27432" bIns="27432" anchor="t">
+          <a:bodyPr wrap="square" lIns="45720" tIns="27432" rIns="45720" bIns="27432" anchor="t">
             <a:spAutoFit/>
           </a:bodyPr>
           <a:lstStyle/>
@@ -4137,22 +4204,22 @@
       </p:sp>
       <p:pic>
         <p:nvPicPr>
-          <p:cNvPr id="7" name="Picture 4" descr="fig_treatment_menu.png"/>
+          <p:cNvPr id="8" name="Picture 7" descr="fig_treatment_menu.png"/>
           <p:cNvPicPr>
             <a:picLocks noChangeAspect="1"/>
           </p:cNvPicPr>
           <p:nvPr/>
         </p:nvPicPr>
         <p:blipFill>
-          <a:blip r:embed="rId3"/>
+          <a:blip r:embed="rId4"/>
           <a:stretch>
             <a:fillRect/>
           </a:stretch>
         </p:blipFill>
         <p:spPr>
           <a:xfrm>
-            <a:off x="1934519" y="1828800"/>
-            <a:ext cx="8322930" cy="3358897"/>
+            <a:off x="1934518" y="1828800"/>
+            <a:ext cx="8322931" cy="3358897"/>
           </a:xfrm>
           <a:prstGeom prst="rect">
             <a:avLst/>
@@ -4218,7 +4285,7 @@
                 </a:solidFill>
                 <a:latin typeface="Avenir Next"/>
               </a:rPr>
-              <a:t>Four moves, each for a different symptom. CURATE when runs are junk/mislabeled. REWEIGHT / SMOTE / oversample when the rare class is ignored. FOCAL LOSS when borderline cases are missed. CURRICULUM when training is unstable across easy/hard. The honest footer: none of these adds NEW resistant signal — only more real resistant spectra does.</a:t>
+              <a:t>Five moves, each for a different symptom. CURATE when runs are junk/mislabeled. AUGMENT when rare examples are too few. REWEIGHT / SMOTE / oversample when the rare class is ignored. FOCAL LOSS when borderline cases are missed. CURRICULUM when training is unstable across easy/hard. The honest footer: none of these adds NEW resistant signal — only more real resistant spectra does.</a:t>
             </a:r>
           </a:p>
         </p:txBody>
@@ -4684,7 +4751,7 @@
 </file>
 
 <file path=ppt/slides/slide16.xml><?xml version="1.0" encoding="utf-8"?>
-<p:sld xmlns:a="http://schemas.openxmlformats.org/drawingml/2006/main" xmlns:p="http://schemas.openxmlformats.org/presentationml/2006/main" xmlns:r="http://schemas.openxmlformats.org/officeDocument/2006/relationships">
+<p:sld xmlns:a="http://schemas.openxmlformats.org/drawingml/2006/main" xmlns:r="http://schemas.openxmlformats.org/officeDocument/2006/relationships" xmlns:p="http://schemas.openxmlformats.org/presentationml/2006/main">
   <p:cSld>
     <p:spTree>
       <p:nvGrpSpPr>
@@ -4692,7 +4759,14 @@
         <p:cNvGrpSpPr/>
         <p:nvPr/>
       </p:nvGrpSpPr>
-      <p:grpSpPr/>
+      <p:grpSpPr>
+        <a:xfrm>
+          <a:off x="0" y="0"/>
+          <a:ext cx="0" cy="0"/>
+          <a:chOff x="0" y="0"/>
+          <a:chExt cx="0" cy="0"/>
+        </a:xfrm>
+      </p:grpSpPr>
       <p:sp>
         <p:nvSpPr>
           <p:cNvPr id="2" name="Rectangle 1"/>
@@ -4815,7 +4889,7 @@
           <p:nvPr/>
         </p:nvPicPr>
         <p:blipFill>
-          <a:blip r:embed="rId4"/>
+          <a:blip r:embed="rId3"/>
           <a:stretch>
             <a:fillRect/>
           </a:stretch>
@@ -5355,7 +5429,7 @@
 </file>
 
 <file path=ppt/slides/slide19.xml><?xml version="1.0" encoding="utf-8"?>
-<p:sld xmlns:a="http://schemas.openxmlformats.org/drawingml/2006/main" xmlns:p="http://schemas.openxmlformats.org/presentationml/2006/main" xmlns:r="http://schemas.openxmlformats.org/officeDocument/2006/relationships">
+<p:sld xmlns:a="http://schemas.openxmlformats.org/drawingml/2006/main" xmlns:r="http://schemas.openxmlformats.org/officeDocument/2006/relationships" xmlns:p="http://schemas.openxmlformats.org/presentationml/2006/main">
   <p:cSld>
     <p:spTree>
       <p:nvGrpSpPr>
@@ -5363,7 +5437,14 @@
         <p:cNvGrpSpPr/>
         <p:nvPr/>
       </p:nvGrpSpPr>
-      <p:grpSpPr/>
+      <p:grpSpPr>
+        <a:xfrm>
+          <a:off x="0" y="0"/>
+          <a:ext cx="0" cy="0"/>
+          <a:chOff x="0" y="0"/>
+          <a:chExt cx="0" cy="0"/>
+        </a:xfrm>
+      </p:grpSpPr>
       <p:sp>
         <p:nvSpPr>
           <p:cNvPr id="2" name="Rectangle 1"/>
@@ -5582,7 +5663,9 @@
         <p:txBody>
           <a:bodyPr rtlCol="0" anchor="ctr"/>
           <a:lstStyle/>
-          <a:p/>
+          <a:p>
+            <a:endParaRPr/>
+          </a:p>
         </p:txBody>
       </p:sp>
       <p:sp>
@@ -5602,7 +5685,7 @@
           <a:noFill/>
         </p:spPr>
         <p:txBody>
-          <a:bodyPr wrap="square" lIns="45720" rIns="45720" tIns="27432" bIns="27432" anchor="ctr">
+          <a:bodyPr wrap="square" lIns="45720" tIns="27432" rIns="45720" bIns="27432" anchor="ctr">
             <a:spAutoFit/>
           </a:bodyPr>
           <a:lstStyle/>
@@ -5641,7 +5724,7 @@
           <a:noFill/>
         </p:spPr>
         <p:txBody>
-          <a:bodyPr wrap="square" lIns="45720" rIns="45720" tIns="27432" bIns="27432" anchor="t">
+          <a:bodyPr wrap="square" lIns="45720" tIns="27432" rIns="45720" bIns="27432" anchor="t">
             <a:spAutoFit/>
           </a:bodyPr>
           <a:lstStyle/>
@@ -5689,7 +5772,7 @@
           <a:noFill/>
         </p:spPr>
         <p:txBody>
-          <a:bodyPr wrap="square" lIns="45720" rIns="45720" tIns="27432" bIns="27432" anchor="t">
+          <a:bodyPr wrap="square" lIns="45720" tIns="27432" rIns="45720" bIns="27432" anchor="t">
             <a:spAutoFit/>
           </a:bodyPr>
           <a:lstStyle/>
@@ -6546,7 +6629,7 @@
 </file>
 
 <file path=ppt/slides/slide22.xml><?xml version="1.0" encoding="utf-8"?>
-<p:sld xmlns:a="http://schemas.openxmlformats.org/drawingml/2006/main" xmlns:p="http://schemas.openxmlformats.org/presentationml/2006/main" xmlns:r="http://schemas.openxmlformats.org/officeDocument/2006/relationships">
+<p:sld xmlns:a="http://schemas.openxmlformats.org/drawingml/2006/main" xmlns:r="http://schemas.openxmlformats.org/officeDocument/2006/relationships" xmlns:p="http://schemas.openxmlformats.org/presentationml/2006/main">
   <p:cSld>
     <p:spTree>
       <p:nvGrpSpPr>
@@ -6554,7 +6637,14 @@
         <p:cNvGrpSpPr/>
         <p:nvPr/>
       </p:nvGrpSpPr>
-      <p:grpSpPr/>
+      <p:grpSpPr>
+        <a:xfrm>
+          <a:off x="0" y="0"/>
+          <a:ext cx="0" cy="0"/>
+          <a:chOff x="0" y="0"/>
+          <a:chExt cx="0" cy="0"/>
+        </a:xfrm>
+      </p:grpSpPr>
       <p:sp>
         <p:nvSpPr>
           <p:cNvPr id="2" name="Rectangle 1"/>
@@ -6749,7 +6839,7 @@
           <a:noFill/>
         </p:spPr>
         <p:txBody>
-          <a:bodyPr wrap="square" lIns="45720" rIns="45720" tIns="27432" bIns="27432" anchor="ctr">
+          <a:bodyPr wrap="square" lIns="45720" tIns="27432" rIns="45720" bIns="27432" anchor="ctr">
             <a:spAutoFit/>
           </a:bodyPr>
           <a:lstStyle/>
@@ -6810,7 +6900,7 @@
           </a:fontRef>
         </p:style>
         <p:txBody>
-          <a:bodyPr rtlCol="0" anchor="ctr" lIns="45720" rIns="45720"/>
+          <a:bodyPr lIns="45720" rIns="45720" rtlCol="0" anchor="ctr"/>
           <a:lstStyle/>
           <a:p>
             <a:pPr algn="ctr"/>
@@ -6865,7 +6955,7 @@
           </a:fontRef>
         </p:style>
         <p:txBody>
-          <a:bodyPr rtlCol="0" anchor="ctr" lIns="45720" rIns="45720"/>
+          <a:bodyPr lIns="45720" rIns="45720" rtlCol="0" anchor="ctr"/>
           <a:lstStyle/>
           <a:p>
             <a:pPr algn="ctr"/>
@@ -6920,7 +7010,7 @@
           </a:fontRef>
         </p:style>
         <p:txBody>
-          <a:bodyPr rtlCol="0" anchor="ctr" lIns="45720" rIns="45720"/>
+          <a:bodyPr lIns="45720" rIns="45720" rtlCol="0" anchor="ctr"/>
           <a:lstStyle/>
           <a:p>
             <a:pPr algn="ctr"/>
@@ -6975,7 +7065,7 @@
           </a:fontRef>
         </p:style>
         <p:txBody>
-          <a:bodyPr rtlCol="0" anchor="ctr" lIns="45720" rIns="45720"/>
+          <a:bodyPr lIns="45720" rIns="45720" rtlCol="0" anchor="ctr"/>
           <a:lstStyle/>
           <a:p>
             <a:pPr algn="ctr"/>
@@ -7008,7 +7098,7 @@
           <a:noFill/>
         </p:spPr>
         <p:txBody>
-          <a:bodyPr wrap="square" lIns="45720" rIns="45720" tIns="27432" bIns="27432" anchor="t">
+          <a:bodyPr wrap="square" lIns="45720" tIns="27432" rIns="45720" bIns="27432" anchor="t">
             <a:spAutoFit/>
           </a:bodyPr>
           <a:lstStyle/>
@@ -7356,7 +7446,7 @@
                 </a:solidFill>
                 <a:latin typeface="Avenir Next"/>
               </a:rPr>
-              <a:t>Compute precision, recall (sensitivity), and specificity by hand — and say why accuracy lies under imbalance</a:t>
+              <a:t>Compute precision, recall, specificity and FPR by hand — and say why accuracy lies under imbalance</a:t>
             </a:r>
           </a:p>
           <a:p>
@@ -7431,7 +7521,7 @@
                 </a:solidFill>
                 <a:latin typeface="Avenir Next"/>
               </a:rPr>
-              <a:t>Treat imbalance with curation, SMOTE, class weights / focal loss, and curriculum — knowing none adds new signal</a:t>
+              <a:t>Treat imbalance — curate, augment, SMOTE, class weights / focal loss, curriculum — knowing none adds new signal</a:t>
             </a:r>
           </a:p>
         </p:txBody>
@@ -7486,7 +7576,7 @@
                 </a:solidFill>
                 <a:latin typeface="Avenir Next"/>
               </a:rPr>
-              <a:t>You have worked the whole of Quiz 10 live — the three rates (Q1), AUROC vs. AUPRC (Q2), the treatment match (Q3), and a SMOTE point (Q4). Keep the sheet; it's your checklist for any rare-class assay in your own lab.</a:t>
+              <a:t>You have worked the whole of Quiz 10 live — the four rates (Q1), AUROC vs. AUPRC (Q2), the treatment match (Q3), and a SMOTE point (Q4). Keep the sheet; it's your checklist for any rare-class assay in your own lab.</a:t>
             </a:r>
           </a:p>
         </p:txBody>
@@ -8203,6 +8293,43 @@
             <a:r>
               <a:rPr lang="en-US" dirty="0"/>
               <a:t>?</a:t>
+            </a:r>
+          </a:p>
+          <a:p>
+            <a:r>
+              <a:rPr lang="en-US" dirty="0"/>
+              <a:t>False positive rate (FPR): how many </a:t>
+            </a:r>
+            <a:r>
+              <a:rPr lang="en-US" sz="2400" b="1" dirty="0">
+                <a:solidFill>
+                  <a:srgbClr val="00B0F0"/>
+                </a:solidFill>
+              </a:rPr>
+              <a:t>negatives wrongly flagged as positive </a:t>
+            </a:r>
+            <a:r>
+              <a:rPr lang="en-US" dirty="0"/>
+              <a:t>out of all </a:t>
+            </a:r>
+            <a:r>
+              <a:rPr lang="en-US" b="1" dirty="0">
+                <a:solidFill>
+                  <a:srgbClr val="00B0F0"/>
+                </a:solidFill>
+              </a:rPr>
+              <a:t>negatives</a:t>
+            </a:r>
+            <a:r>
+              <a:rPr lang="en-US" dirty="0"/>
+              <a:t>? FPR = 1 − specificity.</a:t>
+            </a:r>
+          </a:p>
+          <a:p>
+            <a:pPr lvl="1"/>
+            <a:r>
+              <a:rPr lang="en-US" dirty="0" sz="2000" b="0"/>
+              <a:t>e.g. 60 of 697 susceptible isolates flagged resistant → FPR = 60/697 = 8.6% (and specificity = 637/697 = 91.4%: the two always add to 100%)</a:t>
             </a:r>
           </a:p>
         </p:txBody>
@@ -8363,7 +8490,7 @@
                 </a:solidFill>
                 <a:latin typeface="Menlo"/>
               </a:rPr>
-              <a:t>PART A · THREE RATES BY HAND · I-DO</a:t>
+              <a:t>PART A · FOUR RATES BY HAND · I-DO</a:t>
             </a:r>
           </a:p>
         </p:txBody>
@@ -8397,29 +8524,29 @@
                 </a:solidFill>
                 <a:latin typeface="Avenir Next"/>
               </a:rPr>
-              <a:t>Precision, recall, specificity — worked by hand</a:t>
+              <a:t>Recall, specificity, FPR, precision — by hand</a:t>
             </a:r>
           </a:p>
         </p:txBody>
       </p:sp>
       <p:pic>
         <p:nvPicPr>
-          <p:cNvPr id="5" name="Picture 4" descr="fig_confusion_ido.png"/>
+          <p:cNvPr id="7" name="Picture 6" descr="fig_confusion_ido.png"/>
           <p:cNvPicPr>
             <a:picLocks noChangeAspect="1"/>
           </p:cNvPicPr>
           <p:nvPr/>
         </p:nvPicPr>
         <p:blipFill>
-          <a:blip r:embed="rId3"/>
+          <a:blip r:embed="rId4"/>
           <a:stretch>
             <a:fillRect/>
           </a:stretch>
         </p:blipFill>
         <p:spPr>
           <a:xfrm>
-            <a:off x="2166412" y="1828800"/>
-            <a:ext cx="7828696" cy="3617976"/>
+            <a:off x="2092440" y="1828800"/>
+            <a:ext cx="7976640" cy="3617976"/>
           </a:xfrm>
           <a:prstGeom prst="rect">
             <a:avLst/>
@@ -8485,7 +8612,7 @@
                 </a:solidFill>
                 <a:latin typeface="Avenir Next"/>
               </a:rPr>
-              <a:t>recall (sensitivity) = TP/(TP+FN) = 30/41 = 0.73 · specificity = TN/(TN+FP) = 637/697 = 0.91 · precision = TP/(TP+FP) = 30/90 = 0.33. Accuracy = 667/738 = 90% — yet ALWAYS-'susceptible' scores 94%. Precision 0.33 means 2 of every 3 isolates we flag are FALSE alarms.</a:t>
+              <a:t>recall 30/41 = 0.73 · specificity 637/697 = 0.91 · FPR 60/697 = 0.086 (= 1 − specificity) · precision 30/90 = 0.33 — the four formulas are in the figure. Accuracy = 667/738 = 90% — yet ALWAYS-'susceptible' scores 94%. Precision 0.33 means 2 of every 3 isolates we flag are FALSE alarms.</a:t>
             </a:r>
           </a:p>
         </p:txBody>
@@ -8623,29 +8750,29 @@
                 </a:solidFill>
                 <a:latin typeface="Avenir Next"/>
               </a:rPr>
-              <a:t>Your matrix — compute all three rates</a:t>
+              <a:t>Your matrix — compute all four rates</a:t>
             </a:r>
           </a:p>
         </p:txBody>
       </p:sp>
       <p:pic>
         <p:nvPicPr>
-          <p:cNvPr id="8" name="Picture 4" descr="fig_confusion_youdo.png"/>
+          <p:cNvPr id="9" name="Picture 8" descr="fig_confusion_youdo.png"/>
           <p:cNvPicPr>
             <a:picLocks noChangeAspect="1"/>
           </p:cNvPicPr>
           <p:nvPr/>
         </p:nvPicPr>
         <p:blipFill>
-          <a:blip r:embed="rId3"/>
+          <a:blip r:embed="rId4"/>
           <a:stretch>
             <a:fillRect/>
           </a:stretch>
         </p:blipFill>
         <p:spPr>
           <a:xfrm>
-            <a:off x="2203704" y="1828800"/>
-            <a:ext cx="7754112" cy="3621024"/>
+            <a:off x="2132603" y="1828800"/>
+            <a:ext cx="7896314" cy="3621024"/>
           </a:xfrm>
           <a:prstGeom prst="rect">
             <a:avLst/>
@@ -8711,7 +8838,7 @@
                 </a:solidFill>
                 <a:latin typeface="Avenir Next"/>
               </a:rPr>
-              <a:t>Your turn → Quiz 10, Q1. Same three formulas, new counts: TP=16, FN=4, FP=32, TN=448. Compute recall, specificity, and precision — then say which rate you trust under this heavy imbalance, and why accuracy (which an always-'susceptible' model scores 96%) is misleading. Worked answer in the notes.</a:t>
+              <a:t>Your turn → Quiz 10, Q1. Same four formulas, new counts: TP=16, FN=4, FP=32, TN=448. Compute recall, specificity, FPR and precision — then say which rate you trust under this heavy imbalance, and why accuracy (which an always-'susceptible' model scores 96%) is misleading. Worked answer in the notes.</a:t>
             </a:r>
           </a:p>
         </p:txBody>
@@ -8922,7 +9049,7 @@
           <a:p>
             <a:pPr algn="ctr"/>
             <a:r>
-              <a:rPr sz="1200" b="1" i="0">
+              <a:rPr sz="1200" b="1" i="0" dirty="0">
                 <a:solidFill>
                   <a:srgbClr val="E09E2F"/>
                 </a:solidFill>
@@ -8931,7 +9058,7 @@
               <a:t>CHECKPOINT · </a:t>
             </a:r>
             <a:r>
-              <a:rPr sz="1700" b="0" i="0">
+              <a:rPr sz="1700" b="0" i="0" dirty="0">
                 <a:solidFill>
                   <a:srgbClr val="3D444C"/>
                 </a:solidFill>
